--- a/output/presentations/02-llm-reasoning-engine.pptx
+++ b/output/presentations/02-llm-reasoning-engine.pptx
@@ -2,22 +2,24 @@
 <file path=ppt/presentation.xml><?xml version="1.0" encoding="utf-8"?>
 <p:presentation xmlns:p="http://schemas.openxmlformats.org/presentationml/2006/main">
   <p:sldMasterIdLst>
-    <p:sldMasterId xmlns:r="http://schemas.openxmlformats.org/officeDocument/2006/relationships" id="2147483648" r:id="R25cc39b1c7c4473b"/>
+    <p:sldMasterId xmlns:r="http://schemas.openxmlformats.org/officeDocument/2006/relationships" id="2147483648" r:id="R94381ad31f0743b5"/>
   </p:sldMasterIdLst>
   <p:notesMasterIdLst>
-    <p:notesMasterId xmlns:r="http://schemas.openxmlformats.org/officeDocument/2006/relationships" r:id="Rf3ccebdefb724510"/>
+    <p:notesMasterId xmlns:r="http://schemas.openxmlformats.org/officeDocument/2006/relationships" r:id="Rd7fad9b164ac4321"/>
   </p:notesMasterIdLst>
   <p:sldIdLst>
-    <p:sldId xmlns:r="http://schemas.openxmlformats.org/officeDocument/2006/relationships" id="256" r:id="Rbec15da611714a62"/>
-    <p:sldId xmlns:r="http://schemas.openxmlformats.org/officeDocument/2006/relationships" id="257" r:id="Ra7304e5945494529"/>
-    <p:sldId xmlns:r="http://schemas.openxmlformats.org/officeDocument/2006/relationships" id="258" r:id="R9c5e8e65c1b04e49"/>
-    <p:sldId xmlns:r="http://schemas.openxmlformats.org/officeDocument/2006/relationships" id="259" r:id="R07ac0595175e47bd"/>
-    <p:sldId xmlns:r="http://schemas.openxmlformats.org/officeDocument/2006/relationships" id="260" r:id="Rb8875916d18d48cd"/>
-    <p:sldId xmlns:r="http://schemas.openxmlformats.org/officeDocument/2006/relationships" id="261" r:id="Rc80f34cc1a33424c"/>
-    <p:sldId xmlns:r="http://schemas.openxmlformats.org/officeDocument/2006/relationships" id="262" r:id="Rb996bbbc7e584f97"/>
-    <p:sldId xmlns:r="http://schemas.openxmlformats.org/officeDocument/2006/relationships" id="263" r:id="R70c4e832c6744d76"/>
-    <p:sldId xmlns:r="http://schemas.openxmlformats.org/officeDocument/2006/relationships" id="264" r:id="R1e84b14dfb3d4cc9"/>
-    <p:sldId xmlns:r="http://schemas.openxmlformats.org/officeDocument/2006/relationships" id="265" r:id="R212ed866b24942d3"/>
+    <p:sldId xmlns:r="http://schemas.openxmlformats.org/officeDocument/2006/relationships" id="256" r:id="R92792453ef364458"/>
+    <p:sldId xmlns:r="http://schemas.openxmlformats.org/officeDocument/2006/relationships" id="257" r:id="R3548673a00b0422d"/>
+    <p:sldId xmlns:r="http://schemas.openxmlformats.org/officeDocument/2006/relationships" id="258" r:id="R3810494321194db0"/>
+    <p:sldId xmlns:r="http://schemas.openxmlformats.org/officeDocument/2006/relationships" id="259" r:id="R86b8977a811d49b1"/>
+    <p:sldId xmlns:r="http://schemas.openxmlformats.org/officeDocument/2006/relationships" id="260" r:id="Rce7bb0896dc14fa9"/>
+    <p:sldId xmlns:r="http://schemas.openxmlformats.org/officeDocument/2006/relationships" id="261" r:id="R553e74ea87e94892"/>
+    <p:sldId xmlns:r="http://schemas.openxmlformats.org/officeDocument/2006/relationships" id="262" r:id="Rd45871b235ab4829"/>
+    <p:sldId xmlns:r="http://schemas.openxmlformats.org/officeDocument/2006/relationships" id="263" r:id="Rac9da8d3b3ce43d0"/>
+    <p:sldId xmlns:r="http://schemas.openxmlformats.org/officeDocument/2006/relationships" id="264" r:id="Rd2b694f194674c0c"/>
+    <p:sldId xmlns:r="http://schemas.openxmlformats.org/officeDocument/2006/relationships" id="265" r:id="Ra608dd697c7542d3"/>
+    <p:sldId xmlns:r="http://schemas.openxmlformats.org/officeDocument/2006/relationships" id="266" r:id="R5bd6aca896ed4eec"/>
+    <p:sldId xmlns:r="http://schemas.openxmlformats.org/officeDocument/2006/relationships" id="267" r:id="R0eaa1383a0274b24"/>
   </p:sldIdLst>
   <p:sldSz cx="12192000" cy="6858000"/>
   <p:notesSz cx="6858000" cy="9144000"/>
@@ -461,12 +463,57 @@
           </a:p>
           <a:p xmlns:a="http://schemas.openxmlformats.org/drawingml/2006/main">
             <a:r>
+              <a:t>Edition: 2026-09-09</a:t>
+            </a:r>
+          </a:p>
+          <a:p xmlns:a="http://schemas.openxmlformats.org/drawingml/2006/main">
+            <a:r>
+              <a:t/>
+            </a:r>
+          </a:p>
+          <a:p xmlns:a="http://schemas.openxmlformats.org/drawingml/2006/main">
+            <a:r>
               <a:t>[Sources]</a:t>
             </a:r>
           </a:p>
           <a:p xmlns:a="http://schemas.openxmlformats.org/drawingml/2006/main">
             <a:r>
-              <a:t>- Supplied source presentation: 02-llm-reasoning-engine.pdf</a:t>
+              <a:t>- Original source presentation: 02-llm-reasoning-engine.pdf</a:t>
+            </a:r>
+          </a:p>
+          <a:p xmlns:a="http://schemas.openxmlformats.org/drawingml/2006/main">
+            <a:r>
+              <a:t>- P3: Would this change your answer?. Anthropic/Fellows preprint, arXiv v1, 2026-08-17. https://arxiv.org/abs/2608.16747 CHIVE tests counterfactual prompt changes. Generated explanations remain hypotheses. Official post: August 21.</a:t>
+            </a:r>
+          </a:p>
+          <a:p xmlns:a="http://schemas.openxmlformats.org/drawingml/2006/main">
+            <a:r>
+              <a:t>- S4: Gemini structured outputs. Google documentation, accessed, 2026-09-09. https://ai.google.dev/gemini-api/docs/structured-output Supported schemas constrain structure. Application validation must check meaning and policy.</a:t>
+            </a:r>
+          </a:p>
+          <a:p xmlns:a="http://schemas.openxmlformats.org/drawingml/2006/main">
+            <a:r>
+              <a:t/>
+            </a:r>
+          </a:p>
+          <a:p xmlns:a="http://schemas.openxmlformats.org/drawingml/2006/main">
+            <a:r>
+              <a:t>[Assessed practice]</a:t>
+            </a:r>
+          </a:p>
+          <a:p xmlns:a="http://schemas.openxmlformats.org/drawingml/2006/main">
+            <a:r>
+              <a:t>Keep a factual task fixed and add one misleading cue. Predict whether the answer will change. Record both conditions and identify which check tests structure, evidence, or policy.</a:t>
+            </a:r>
+          </a:p>
+          <a:p xmlns:a="http://schemas.openxmlformats.org/drawingml/2006/main">
+            <a:r>
+              <a:t>Acceptance: The submission contains paired inputs and a testable prediction. It does not treat verbal reasoning as ground truth.</a:t>
+            </a:r>
+          </a:p>
+          <a:p xmlns:a="http://schemas.openxmlformats.org/drawingml/2006/main">
+            <a:r>
+              <a:t>Lab: labs/07_agents_sdk_evaluation.ipynb</a:t>
             </a:r>
           </a:p>
         </p:txBody>
@@ -536,6 +583,136 @@
           <a:lstStyle xmlns:a="http://schemas.openxmlformats.org/drawingml/2006/main"/>
           <a:p xmlns:a="http://schemas.openxmlformats.org/drawingml/2006/main">
             <a:r>
+              <a:t>Use as retrieval practice. Ask for an answer that defines, compares, traces, and evaluates.</a:t>
+            </a:r>
+          </a:p>
+          <a:p xmlns:a="http://schemas.openxmlformats.org/drawingml/2006/main">
+            <a:r>
+              <a:t/>
+            </a:r>
+          </a:p>
+          <a:p xmlns:a="http://schemas.openxmlformats.org/drawingml/2006/main">
+            <a:r>
+              <a:t>Edition: 2026-09-09</a:t>
+            </a:r>
+          </a:p>
+          <a:p xmlns:a="http://schemas.openxmlformats.org/drawingml/2006/main">
+            <a:r>
+              <a:t/>
+            </a:r>
+          </a:p>
+          <a:p xmlns:a="http://schemas.openxmlformats.org/drawingml/2006/main">
+            <a:r>
+              <a:t>[Sources]</a:t>
+            </a:r>
+          </a:p>
+          <a:p xmlns:a="http://schemas.openxmlformats.org/drawingml/2006/main">
+            <a:r>
+              <a:t>- Original source presentation: 02-llm-reasoning-engine.pdf</a:t>
+            </a:r>
+          </a:p>
+          <a:p xmlns:a="http://schemas.openxmlformats.org/drawingml/2006/main">
+            <a:r>
+              <a:t>- P3: Would this change your answer?. Anthropic/Fellows preprint, arXiv v1, 2026-08-17. https://arxiv.org/abs/2608.16747 CHIVE tests counterfactual prompt changes. Generated explanations remain hypotheses. Official post: August 21.</a:t>
+            </a:r>
+          </a:p>
+          <a:p xmlns:a="http://schemas.openxmlformats.org/drawingml/2006/main">
+            <a:r>
+              <a:t>- S4: Gemini structured outputs. Google documentation, accessed, 2026-09-09. https://ai.google.dev/gemini-api/docs/structured-output Supported schemas constrain structure. Application validation must check meaning and policy.</a:t>
+            </a:r>
+          </a:p>
+          <a:p xmlns:a="http://schemas.openxmlformats.org/drawingml/2006/main">
+            <a:r>
+              <a:t/>
+            </a:r>
+          </a:p>
+          <a:p xmlns:a="http://schemas.openxmlformats.org/drawingml/2006/main">
+            <a:r>
+              <a:t>[Assessed practice]</a:t>
+            </a:r>
+          </a:p>
+          <a:p xmlns:a="http://schemas.openxmlformats.org/drawingml/2006/main">
+            <a:r>
+              <a:t>Keep a factual task fixed and add one misleading cue. Predict whether the answer will change. Record both conditions and identify which check tests structure, evidence, or policy.</a:t>
+            </a:r>
+          </a:p>
+          <a:p xmlns:a="http://schemas.openxmlformats.org/drawingml/2006/main">
+            <a:r>
+              <a:t>Acceptance: The submission contains paired inputs and a testable prediction. It does not treat verbal reasoning as ground truth.</a:t>
+            </a:r>
+          </a:p>
+          <a:p xmlns:a="http://schemas.openxmlformats.org/drawingml/2006/main">
+            <a:r>
+              <a:t>Lab: labs/07_agents_sdk_evaluation.ipynb</a:t>
+            </a:r>
+          </a:p>
+        </p:txBody>
+      </p:sp>
+      <p:sp>
+        <p:nvSpPr>
+          <p:cNvPr id="4" name="Slide Number Placeholder 3"/>
+          <p:cNvSpPr>
+            <a:spLocks xmlns:a="http://schemas.openxmlformats.org/drawingml/2006/main" noGrp="1"/>
+          </p:cNvSpPr>
+          <p:nvPr>
+            <p:ph type="sldNum" idx="5"/>
+          </p:nvPr>
+        </p:nvSpPr>
+        <p:spPr/>
+        <p:txBody>
+          <a:bodyPr xmlns:a="http://schemas.openxmlformats.org/drawingml/2006/main"/>
+          <a:lstStyle xmlns:a="http://schemas.openxmlformats.org/drawingml/2006/main"/>
+          <a:p xmlns:a="http://schemas.openxmlformats.org/drawingml/2006/main"/>
+        </p:txBody>
+      </p:sp>
+    </p:spTree>
+  </p:cSld>
+  <p:clrMapOvr>
+    <a:masterClrMapping xmlns:a="http://schemas.openxmlformats.org/drawingml/2006/main"/>
+  </p:clrMapOvr>
+</p:notes>
+</file>
+
+<file path=ppt/notesSlides/notesSlide11.xml><?xml version="1.0" encoding="utf-8"?>
+<p:notes xmlns:p="http://schemas.openxmlformats.org/presentationml/2006/main">
+  <p:cSld>
+    <p:spTree>
+      <p:nvGrpSpPr>
+        <p:cNvPr id="1" name=""/>
+        <p:cNvGrpSpPr/>
+        <p:nvPr/>
+      </p:nvGrpSpPr>
+      <p:grpSpPr>
+        <a:xfrm xmlns:a="http://schemas.openxmlformats.org/drawingml/2006/main"/>
+      </p:grpSpPr>
+      <p:sp>
+        <p:nvSpPr>
+          <p:cNvPr id="2" name="Slide Image Placeholder 1"/>
+          <p:cNvSpPr>
+            <a:spLocks xmlns:a="http://schemas.openxmlformats.org/drawingml/2006/main" noGrp="1"/>
+          </p:cNvSpPr>
+          <p:nvPr>
+            <p:ph type="sldImg" idx="0"/>
+          </p:nvPr>
+        </p:nvSpPr>
+        <p:spPr/>
+      </p:sp>
+      <p:sp>
+        <p:nvSpPr>
+          <p:cNvPr id="3" name="Notes Placeholder 2"/>
+          <p:cNvSpPr>
+            <a:spLocks xmlns:a="http://schemas.openxmlformats.org/drawingml/2006/main" noGrp="1"/>
+          </p:cNvSpPr>
+          <p:nvPr>
+            <p:ph type="body" idx="1"/>
+          </p:nvPr>
+        </p:nvSpPr>
+        <p:spPr/>
+        <p:txBody>
+          <a:bodyPr xmlns:a="http://schemas.openxmlformats.org/drawingml/2006/main"/>
+          <a:lstStyle xmlns:a="http://schemas.openxmlformats.org/drawingml/2006/main"/>
+          <a:p xmlns:a="http://schemas.openxmlformats.org/drawingml/2006/main">
+            <a:r>
               <a:t>Close by restating the four durable ideas and linking forward to the next chapter.</a:t>
             </a:r>
           </a:p>
@@ -546,12 +723,187 @@
           </a:p>
           <a:p xmlns:a="http://schemas.openxmlformats.org/drawingml/2006/main">
             <a:r>
+              <a:t>Edition: 2026-09-09</a:t>
+            </a:r>
+          </a:p>
+          <a:p xmlns:a="http://schemas.openxmlformats.org/drawingml/2006/main">
+            <a:r>
+              <a:t/>
+            </a:r>
+          </a:p>
+          <a:p xmlns:a="http://schemas.openxmlformats.org/drawingml/2006/main">
+            <a:r>
               <a:t>[Sources]</a:t>
             </a:r>
           </a:p>
           <a:p xmlns:a="http://schemas.openxmlformats.org/drawingml/2006/main">
             <a:r>
-              <a:t>- Supplied source presentation: 02-llm-reasoning-engine.pdf</a:t>
+              <a:t>- Original source presentation: 02-llm-reasoning-engine.pdf</a:t>
+            </a:r>
+          </a:p>
+          <a:p xmlns:a="http://schemas.openxmlformats.org/drawingml/2006/main">
+            <a:r>
+              <a:t>- P3: Would this change your answer?. Anthropic/Fellows preprint, arXiv v1, 2026-08-17. https://arxiv.org/abs/2608.16747 CHIVE tests counterfactual prompt changes. Generated explanations remain hypotheses. Official post: August 21.</a:t>
+            </a:r>
+          </a:p>
+          <a:p xmlns:a="http://schemas.openxmlformats.org/drawingml/2006/main">
+            <a:r>
+              <a:t>- S4: Gemini structured outputs. Google documentation, accessed, 2026-09-09. https://ai.google.dev/gemini-api/docs/structured-output Supported schemas constrain structure. Application validation must check meaning and policy.</a:t>
+            </a:r>
+          </a:p>
+          <a:p xmlns:a="http://schemas.openxmlformats.org/drawingml/2006/main">
+            <a:r>
+              <a:t/>
+            </a:r>
+          </a:p>
+          <a:p xmlns:a="http://schemas.openxmlformats.org/drawingml/2006/main">
+            <a:r>
+              <a:t>[Assessed practice]</a:t>
+            </a:r>
+          </a:p>
+          <a:p xmlns:a="http://schemas.openxmlformats.org/drawingml/2006/main">
+            <a:r>
+              <a:t>Keep a factual task fixed and add one misleading cue. Predict whether the answer will change. Record both conditions and identify which check tests structure, evidence, or policy.</a:t>
+            </a:r>
+          </a:p>
+          <a:p xmlns:a="http://schemas.openxmlformats.org/drawingml/2006/main">
+            <a:r>
+              <a:t>Acceptance: The submission contains paired inputs and a testable prediction. It does not treat verbal reasoning as ground truth.</a:t>
+            </a:r>
+          </a:p>
+          <a:p xmlns:a="http://schemas.openxmlformats.org/drawingml/2006/main">
+            <a:r>
+              <a:t>Lab: labs/07_agents_sdk_evaluation.ipynb</a:t>
+            </a:r>
+          </a:p>
+        </p:txBody>
+      </p:sp>
+      <p:sp>
+        <p:nvSpPr>
+          <p:cNvPr id="4" name="Slide Number Placeholder 3"/>
+          <p:cNvSpPr>
+            <a:spLocks xmlns:a="http://schemas.openxmlformats.org/drawingml/2006/main" noGrp="1"/>
+          </p:cNvSpPr>
+          <p:nvPr>
+            <p:ph type="sldNum" idx="5"/>
+          </p:nvPr>
+        </p:nvSpPr>
+        <p:spPr/>
+        <p:txBody>
+          <a:bodyPr xmlns:a="http://schemas.openxmlformats.org/drawingml/2006/main"/>
+          <a:lstStyle xmlns:a="http://schemas.openxmlformats.org/drawingml/2006/main"/>
+          <a:p xmlns:a="http://schemas.openxmlformats.org/drawingml/2006/main"/>
+        </p:txBody>
+      </p:sp>
+    </p:spTree>
+  </p:cSld>
+  <p:clrMapOvr>
+    <a:masterClrMapping xmlns:a="http://schemas.openxmlformats.org/drawingml/2006/main"/>
+  </p:clrMapOvr>
+</p:notes>
+</file>
+
+<file path=ppt/notesSlides/notesSlide12.xml><?xml version="1.0" encoding="utf-8"?>
+<p:notes xmlns:p="http://schemas.openxmlformats.org/presentationml/2006/main">
+  <p:cSld>
+    <p:spTree>
+      <p:nvGrpSpPr>
+        <p:cNvPr id="1" name=""/>
+        <p:cNvGrpSpPr/>
+        <p:nvPr/>
+      </p:nvGrpSpPr>
+      <p:grpSpPr>
+        <a:xfrm xmlns:a="http://schemas.openxmlformats.org/drawingml/2006/main"/>
+      </p:grpSpPr>
+      <p:sp>
+        <p:nvSpPr>
+          <p:cNvPr id="2" name="Slide Image Placeholder 1"/>
+          <p:cNvSpPr>
+            <a:spLocks xmlns:a="http://schemas.openxmlformats.org/drawingml/2006/main" noGrp="1"/>
+          </p:cNvSpPr>
+          <p:nvPr>
+            <p:ph type="sldImg" idx="0"/>
+          </p:nvPr>
+        </p:nvSpPr>
+        <p:spPr/>
+      </p:sp>
+      <p:sp>
+        <p:nvSpPr>
+          <p:cNvPr id="3" name="Notes Placeholder 2"/>
+          <p:cNvSpPr>
+            <a:spLocks xmlns:a="http://schemas.openxmlformats.org/drawingml/2006/main" noGrp="1"/>
+          </p:cNvSpPr>
+          <p:nvPr>
+            <p:ph type="body" idx="1"/>
+          </p:nvPr>
+        </p:nvSpPr>
+        <p:spPr/>
+        <p:txBody>
+          <a:bodyPr xmlns:a="http://schemas.openxmlformats.org/drawingml/2006/main"/>
+          <a:lstStyle xmlns:a="http://schemas.openxmlformats.org/drawingml/2006/main"/>
+          <a:p xmlns:a="http://schemas.openxmlformats.org/drawingml/2006/main">
+            <a:r>
+              <a:t>Assess the submitted evidence with the stated acceptance check. Reading links and limitations follow.</a:t>
+            </a:r>
+          </a:p>
+          <a:p xmlns:a="http://schemas.openxmlformats.org/drawingml/2006/main">
+            <a:r>
+              <a:t/>
+            </a:r>
+          </a:p>
+          <a:p xmlns:a="http://schemas.openxmlformats.org/drawingml/2006/main">
+            <a:r>
+              <a:t>Edition: 2026-09-09</a:t>
+            </a:r>
+          </a:p>
+          <a:p xmlns:a="http://schemas.openxmlformats.org/drawingml/2006/main">
+            <a:r>
+              <a:t/>
+            </a:r>
+          </a:p>
+          <a:p xmlns:a="http://schemas.openxmlformats.org/drawingml/2006/main">
+            <a:r>
+              <a:t>[Sources]</a:t>
+            </a:r>
+          </a:p>
+          <a:p xmlns:a="http://schemas.openxmlformats.org/drawingml/2006/main">
+            <a:r>
+              <a:t>- Original source presentation: 02-llm-reasoning-engine.pdf</a:t>
+            </a:r>
+          </a:p>
+          <a:p xmlns:a="http://schemas.openxmlformats.org/drawingml/2006/main">
+            <a:r>
+              <a:t>- P3: Would this change your answer?. Anthropic/Fellows preprint, arXiv v1, 2026-08-17. https://arxiv.org/abs/2608.16747 CHIVE tests counterfactual prompt changes. Generated explanations remain hypotheses. Official post: August 21.</a:t>
+            </a:r>
+          </a:p>
+          <a:p xmlns:a="http://schemas.openxmlformats.org/drawingml/2006/main">
+            <a:r>
+              <a:t>- S4: Gemini structured outputs. Google documentation, accessed, 2026-09-09. https://ai.google.dev/gemini-api/docs/structured-output Supported schemas constrain structure. Application validation must check meaning and policy.</a:t>
+            </a:r>
+          </a:p>
+          <a:p xmlns:a="http://schemas.openxmlformats.org/drawingml/2006/main">
+            <a:r>
+              <a:t/>
+            </a:r>
+          </a:p>
+          <a:p xmlns:a="http://schemas.openxmlformats.org/drawingml/2006/main">
+            <a:r>
+              <a:t>[Assessed practice]</a:t>
+            </a:r>
+          </a:p>
+          <a:p xmlns:a="http://schemas.openxmlformats.org/drawingml/2006/main">
+            <a:r>
+              <a:t>Keep a factual task fixed and add one misleading cue. Predict whether the answer will change. Record both conditions and identify which check tests structure, evidence, or policy.</a:t>
+            </a:r>
+          </a:p>
+          <a:p xmlns:a="http://schemas.openxmlformats.org/drawingml/2006/main">
+            <a:r>
+              <a:t>Acceptance: The submission contains paired inputs and a testable prediction. It does not treat verbal reasoning as ground truth.</a:t>
+            </a:r>
+          </a:p>
+          <a:p xmlns:a="http://schemas.openxmlformats.org/drawingml/2006/main">
+            <a:r>
+              <a:t>Lab: labs/07_agents_sdk_evaluation.ipynb</a:t>
             </a:r>
           </a:p>
         </p:txBody>
@@ -631,12 +983,57 @@
           </a:p>
           <a:p xmlns:a="http://schemas.openxmlformats.org/drawingml/2006/main">
             <a:r>
+              <a:t>Edition: 2026-09-09</a:t>
+            </a:r>
+          </a:p>
+          <a:p xmlns:a="http://schemas.openxmlformats.org/drawingml/2006/main">
+            <a:r>
+              <a:t/>
+            </a:r>
+          </a:p>
+          <a:p xmlns:a="http://schemas.openxmlformats.org/drawingml/2006/main">
+            <a:r>
               <a:t>[Sources]</a:t>
             </a:r>
           </a:p>
           <a:p xmlns:a="http://schemas.openxmlformats.org/drawingml/2006/main">
             <a:r>
-              <a:t>- Supplied source presentation: 02-llm-reasoning-engine.pdf</a:t>
+              <a:t>- Original source presentation: 02-llm-reasoning-engine.pdf</a:t>
+            </a:r>
+          </a:p>
+          <a:p xmlns:a="http://schemas.openxmlformats.org/drawingml/2006/main">
+            <a:r>
+              <a:t>- P3: Would this change your answer?. Anthropic/Fellows preprint, arXiv v1, 2026-08-17. https://arxiv.org/abs/2608.16747 CHIVE tests counterfactual prompt changes. Generated explanations remain hypotheses. Official post: August 21.</a:t>
+            </a:r>
+          </a:p>
+          <a:p xmlns:a="http://schemas.openxmlformats.org/drawingml/2006/main">
+            <a:r>
+              <a:t>- S4: Gemini structured outputs. Google documentation, accessed, 2026-09-09. https://ai.google.dev/gemini-api/docs/structured-output Supported schemas constrain structure. Application validation must check meaning and policy.</a:t>
+            </a:r>
+          </a:p>
+          <a:p xmlns:a="http://schemas.openxmlformats.org/drawingml/2006/main">
+            <a:r>
+              <a:t/>
+            </a:r>
+          </a:p>
+          <a:p xmlns:a="http://schemas.openxmlformats.org/drawingml/2006/main">
+            <a:r>
+              <a:t>[Assessed practice]</a:t>
+            </a:r>
+          </a:p>
+          <a:p xmlns:a="http://schemas.openxmlformats.org/drawingml/2006/main">
+            <a:r>
+              <a:t>Keep a factual task fixed and add one misleading cue. Predict whether the answer will change. Record both conditions and identify which check tests structure, evidence, or policy.</a:t>
+            </a:r>
+          </a:p>
+          <a:p xmlns:a="http://schemas.openxmlformats.org/drawingml/2006/main">
+            <a:r>
+              <a:t>Acceptance: The submission contains paired inputs and a testable prediction. It does not treat verbal reasoning as ground truth.</a:t>
+            </a:r>
+          </a:p>
+          <a:p xmlns:a="http://schemas.openxmlformats.org/drawingml/2006/main">
+            <a:r>
+              <a:t>Lab: labs/07_agents_sdk_evaluation.ipynb</a:t>
             </a:r>
           </a:p>
         </p:txBody>
@@ -716,12 +1113,57 @@
           </a:p>
           <a:p xmlns:a="http://schemas.openxmlformats.org/drawingml/2006/main">
             <a:r>
+              <a:t>Edition: 2026-09-09</a:t>
+            </a:r>
+          </a:p>
+          <a:p xmlns:a="http://schemas.openxmlformats.org/drawingml/2006/main">
+            <a:r>
+              <a:t/>
+            </a:r>
+          </a:p>
+          <a:p xmlns:a="http://schemas.openxmlformats.org/drawingml/2006/main">
+            <a:r>
               <a:t>[Sources]</a:t>
             </a:r>
           </a:p>
           <a:p xmlns:a="http://schemas.openxmlformats.org/drawingml/2006/main">
             <a:r>
-              <a:t>- Supplied source presentation: 02-llm-reasoning-engine.pdf</a:t>
+              <a:t>- Original source presentation: 02-llm-reasoning-engine.pdf</a:t>
+            </a:r>
+          </a:p>
+          <a:p xmlns:a="http://schemas.openxmlformats.org/drawingml/2006/main">
+            <a:r>
+              <a:t>- P3: Would this change your answer?. Anthropic/Fellows preprint, arXiv v1, 2026-08-17. https://arxiv.org/abs/2608.16747 CHIVE tests counterfactual prompt changes. Generated explanations remain hypotheses. Official post: August 21.</a:t>
+            </a:r>
+          </a:p>
+          <a:p xmlns:a="http://schemas.openxmlformats.org/drawingml/2006/main">
+            <a:r>
+              <a:t>- S4: Gemini structured outputs. Google documentation, accessed, 2026-09-09. https://ai.google.dev/gemini-api/docs/structured-output Supported schemas constrain structure. Application validation must check meaning and policy.</a:t>
+            </a:r>
+          </a:p>
+          <a:p xmlns:a="http://schemas.openxmlformats.org/drawingml/2006/main">
+            <a:r>
+              <a:t/>
+            </a:r>
+          </a:p>
+          <a:p xmlns:a="http://schemas.openxmlformats.org/drawingml/2006/main">
+            <a:r>
+              <a:t>[Assessed practice]</a:t>
+            </a:r>
+          </a:p>
+          <a:p xmlns:a="http://schemas.openxmlformats.org/drawingml/2006/main">
+            <a:r>
+              <a:t>Keep a factual task fixed and add one misleading cue. Predict whether the answer will change. Record both conditions and identify which check tests structure, evidence, or policy.</a:t>
+            </a:r>
+          </a:p>
+          <a:p xmlns:a="http://schemas.openxmlformats.org/drawingml/2006/main">
+            <a:r>
+              <a:t>Acceptance: The submission contains paired inputs and a testable prediction. It does not treat verbal reasoning as ground truth.</a:t>
+            </a:r>
+          </a:p>
+          <a:p xmlns:a="http://schemas.openxmlformats.org/drawingml/2006/main">
+            <a:r>
+              <a:t>Lab: labs/07_agents_sdk_evaluation.ipynb</a:t>
             </a:r>
           </a:p>
         </p:txBody>
@@ -801,12 +1243,57 @@
           </a:p>
           <a:p xmlns:a="http://schemas.openxmlformats.org/drawingml/2006/main">
             <a:r>
+              <a:t>Edition: 2026-09-09</a:t>
+            </a:r>
+          </a:p>
+          <a:p xmlns:a="http://schemas.openxmlformats.org/drawingml/2006/main">
+            <a:r>
+              <a:t/>
+            </a:r>
+          </a:p>
+          <a:p xmlns:a="http://schemas.openxmlformats.org/drawingml/2006/main">
+            <a:r>
               <a:t>[Sources]</a:t>
             </a:r>
           </a:p>
           <a:p xmlns:a="http://schemas.openxmlformats.org/drawingml/2006/main">
             <a:r>
-              <a:t>- Supplied source presentation: 02-llm-reasoning-engine.pdf</a:t>
+              <a:t>- Original source presentation: 02-llm-reasoning-engine.pdf</a:t>
+            </a:r>
+          </a:p>
+          <a:p xmlns:a="http://schemas.openxmlformats.org/drawingml/2006/main">
+            <a:r>
+              <a:t>- P3: Would this change your answer?. Anthropic/Fellows preprint, arXiv v1, 2026-08-17. https://arxiv.org/abs/2608.16747 CHIVE tests counterfactual prompt changes. Generated explanations remain hypotheses. Official post: August 21.</a:t>
+            </a:r>
+          </a:p>
+          <a:p xmlns:a="http://schemas.openxmlformats.org/drawingml/2006/main">
+            <a:r>
+              <a:t>- S4: Gemini structured outputs. Google documentation, accessed, 2026-09-09. https://ai.google.dev/gemini-api/docs/structured-output Supported schemas constrain structure. Application validation must check meaning and policy.</a:t>
+            </a:r>
+          </a:p>
+          <a:p xmlns:a="http://schemas.openxmlformats.org/drawingml/2006/main">
+            <a:r>
+              <a:t/>
+            </a:r>
+          </a:p>
+          <a:p xmlns:a="http://schemas.openxmlformats.org/drawingml/2006/main">
+            <a:r>
+              <a:t>[Assessed practice]</a:t>
+            </a:r>
+          </a:p>
+          <a:p xmlns:a="http://schemas.openxmlformats.org/drawingml/2006/main">
+            <a:r>
+              <a:t>Keep a factual task fixed and add one misleading cue. Predict whether the answer will change. Record both conditions and identify which check tests structure, evidence, or policy.</a:t>
+            </a:r>
+          </a:p>
+          <a:p xmlns:a="http://schemas.openxmlformats.org/drawingml/2006/main">
+            <a:r>
+              <a:t>Acceptance: The submission contains paired inputs and a testable prediction. It does not treat verbal reasoning as ground truth.</a:t>
+            </a:r>
+          </a:p>
+          <a:p xmlns:a="http://schemas.openxmlformats.org/drawingml/2006/main">
+            <a:r>
+              <a:t>Lab: labs/07_agents_sdk_evaluation.ipynb</a:t>
             </a:r>
           </a:p>
         </p:txBody>
@@ -886,12 +1373,57 @@
           </a:p>
           <a:p xmlns:a="http://schemas.openxmlformats.org/drawingml/2006/main">
             <a:r>
+              <a:t>Edition: 2026-09-09</a:t>
+            </a:r>
+          </a:p>
+          <a:p xmlns:a="http://schemas.openxmlformats.org/drawingml/2006/main">
+            <a:r>
+              <a:t/>
+            </a:r>
+          </a:p>
+          <a:p xmlns:a="http://schemas.openxmlformats.org/drawingml/2006/main">
+            <a:r>
               <a:t>[Sources]</a:t>
             </a:r>
           </a:p>
           <a:p xmlns:a="http://schemas.openxmlformats.org/drawingml/2006/main">
             <a:r>
-              <a:t>- Supplied source presentation: 02-llm-reasoning-engine.pdf</a:t>
+              <a:t>- Original source presentation: 02-llm-reasoning-engine.pdf</a:t>
+            </a:r>
+          </a:p>
+          <a:p xmlns:a="http://schemas.openxmlformats.org/drawingml/2006/main">
+            <a:r>
+              <a:t>- P3: Would this change your answer?. Anthropic/Fellows preprint, arXiv v1, 2026-08-17. https://arxiv.org/abs/2608.16747 CHIVE tests counterfactual prompt changes. Generated explanations remain hypotheses. Official post: August 21.</a:t>
+            </a:r>
+          </a:p>
+          <a:p xmlns:a="http://schemas.openxmlformats.org/drawingml/2006/main">
+            <a:r>
+              <a:t>- S4: Gemini structured outputs. Google documentation, accessed, 2026-09-09. https://ai.google.dev/gemini-api/docs/structured-output Supported schemas constrain structure. Application validation must check meaning and policy.</a:t>
+            </a:r>
+          </a:p>
+          <a:p xmlns:a="http://schemas.openxmlformats.org/drawingml/2006/main">
+            <a:r>
+              <a:t/>
+            </a:r>
+          </a:p>
+          <a:p xmlns:a="http://schemas.openxmlformats.org/drawingml/2006/main">
+            <a:r>
+              <a:t>[Assessed practice]</a:t>
+            </a:r>
+          </a:p>
+          <a:p xmlns:a="http://schemas.openxmlformats.org/drawingml/2006/main">
+            <a:r>
+              <a:t>Keep a factual task fixed and add one misleading cue. Predict whether the answer will change. Record both conditions and identify which check tests structure, evidence, or policy.</a:t>
+            </a:r>
+          </a:p>
+          <a:p xmlns:a="http://schemas.openxmlformats.org/drawingml/2006/main">
+            <a:r>
+              <a:t>Acceptance: The submission contains paired inputs and a testable prediction. It does not treat verbal reasoning as ground truth.</a:t>
+            </a:r>
+          </a:p>
+          <a:p xmlns:a="http://schemas.openxmlformats.org/drawingml/2006/main">
+            <a:r>
+              <a:t>Lab: labs/07_agents_sdk_evaluation.ipynb</a:t>
             </a:r>
           </a:p>
         </p:txBody>
@@ -971,12 +1503,57 @@
           </a:p>
           <a:p xmlns:a="http://schemas.openxmlformats.org/drawingml/2006/main">
             <a:r>
+              <a:t>Edition: 2026-09-09</a:t>
+            </a:r>
+          </a:p>
+          <a:p xmlns:a="http://schemas.openxmlformats.org/drawingml/2006/main">
+            <a:r>
+              <a:t/>
+            </a:r>
+          </a:p>
+          <a:p xmlns:a="http://schemas.openxmlformats.org/drawingml/2006/main">
+            <a:r>
               <a:t>[Sources]</a:t>
             </a:r>
           </a:p>
           <a:p xmlns:a="http://schemas.openxmlformats.org/drawingml/2006/main">
             <a:r>
-              <a:t>- Supplied source presentation: 02-llm-reasoning-engine.pdf</a:t>
+              <a:t>- Original source presentation: 02-llm-reasoning-engine.pdf</a:t>
+            </a:r>
+          </a:p>
+          <a:p xmlns:a="http://schemas.openxmlformats.org/drawingml/2006/main">
+            <a:r>
+              <a:t>- P3: Would this change your answer?. Anthropic/Fellows preprint, arXiv v1, 2026-08-17. https://arxiv.org/abs/2608.16747 CHIVE tests counterfactual prompt changes. Generated explanations remain hypotheses. Official post: August 21.</a:t>
+            </a:r>
+          </a:p>
+          <a:p xmlns:a="http://schemas.openxmlformats.org/drawingml/2006/main">
+            <a:r>
+              <a:t>- S4: Gemini structured outputs. Google documentation, accessed, 2026-09-09. https://ai.google.dev/gemini-api/docs/structured-output Supported schemas constrain structure. Application validation must check meaning and policy.</a:t>
+            </a:r>
+          </a:p>
+          <a:p xmlns:a="http://schemas.openxmlformats.org/drawingml/2006/main">
+            <a:r>
+              <a:t/>
+            </a:r>
+          </a:p>
+          <a:p xmlns:a="http://schemas.openxmlformats.org/drawingml/2006/main">
+            <a:r>
+              <a:t>[Assessed practice]</a:t>
+            </a:r>
+          </a:p>
+          <a:p xmlns:a="http://schemas.openxmlformats.org/drawingml/2006/main">
+            <a:r>
+              <a:t>Keep a factual task fixed and add one misleading cue. Predict whether the answer will change. Record both conditions and identify which check tests structure, evidence, or policy.</a:t>
+            </a:r>
+          </a:p>
+          <a:p xmlns:a="http://schemas.openxmlformats.org/drawingml/2006/main">
+            <a:r>
+              <a:t>Acceptance: The submission contains paired inputs and a testable prediction. It does not treat verbal reasoning as ground truth.</a:t>
+            </a:r>
+          </a:p>
+          <a:p xmlns:a="http://schemas.openxmlformats.org/drawingml/2006/main">
+            <a:r>
+              <a:t>Lab: labs/07_agents_sdk_evaluation.ipynb</a:t>
             </a:r>
           </a:p>
         </p:txBody>
@@ -1056,12 +1633,57 @@
           </a:p>
           <a:p xmlns:a="http://schemas.openxmlformats.org/drawingml/2006/main">
             <a:r>
+              <a:t>Edition: 2026-09-09</a:t>
+            </a:r>
+          </a:p>
+          <a:p xmlns:a="http://schemas.openxmlformats.org/drawingml/2006/main">
+            <a:r>
+              <a:t/>
+            </a:r>
+          </a:p>
+          <a:p xmlns:a="http://schemas.openxmlformats.org/drawingml/2006/main">
+            <a:r>
               <a:t>[Sources]</a:t>
             </a:r>
           </a:p>
           <a:p xmlns:a="http://schemas.openxmlformats.org/drawingml/2006/main">
             <a:r>
-              <a:t>- Supplied source presentation: 02-llm-reasoning-engine.pdf</a:t>
+              <a:t>- Original source presentation: 02-llm-reasoning-engine.pdf</a:t>
+            </a:r>
+          </a:p>
+          <a:p xmlns:a="http://schemas.openxmlformats.org/drawingml/2006/main">
+            <a:r>
+              <a:t>- P3: Would this change your answer?. Anthropic/Fellows preprint, arXiv v1, 2026-08-17. https://arxiv.org/abs/2608.16747 CHIVE tests counterfactual prompt changes. Generated explanations remain hypotheses. Official post: August 21.</a:t>
+            </a:r>
+          </a:p>
+          <a:p xmlns:a="http://schemas.openxmlformats.org/drawingml/2006/main">
+            <a:r>
+              <a:t>- S4: Gemini structured outputs. Google documentation, accessed, 2026-09-09. https://ai.google.dev/gemini-api/docs/structured-output Supported schemas constrain structure. Application validation must check meaning and policy.</a:t>
+            </a:r>
+          </a:p>
+          <a:p xmlns:a="http://schemas.openxmlformats.org/drawingml/2006/main">
+            <a:r>
+              <a:t/>
+            </a:r>
+          </a:p>
+          <a:p xmlns:a="http://schemas.openxmlformats.org/drawingml/2006/main">
+            <a:r>
+              <a:t>[Assessed practice]</a:t>
+            </a:r>
+          </a:p>
+          <a:p xmlns:a="http://schemas.openxmlformats.org/drawingml/2006/main">
+            <a:r>
+              <a:t>Keep a factual task fixed and add one misleading cue. Predict whether the answer will change. Record both conditions and identify which check tests structure, evidence, or policy.</a:t>
+            </a:r>
+          </a:p>
+          <a:p xmlns:a="http://schemas.openxmlformats.org/drawingml/2006/main">
+            <a:r>
+              <a:t>Acceptance: The submission contains paired inputs and a testable prediction. It does not treat verbal reasoning as ground truth.</a:t>
+            </a:r>
+          </a:p>
+          <a:p xmlns:a="http://schemas.openxmlformats.org/drawingml/2006/main">
+            <a:r>
+              <a:t>Lab: labs/07_agents_sdk_evaluation.ipynb</a:t>
             </a:r>
           </a:p>
         </p:txBody>
@@ -1141,12 +1763,57 @@
           </a:p>
           <a:p xmlns:a="http://schemas.openxmlformats.org/drawingml/2006/main">
             <a:r>
+              <a:t>Edition: 2026-09-09</a:t>
+            </a:r>
+          </a:p>
+          <a:p xmlns:a="http://schemas.openxmlformats.org/drawingml/2006/main">
+            <a:r>
+              <a:t/>
+            </a:r>
+          </a:p>
+          <a:p xmlns:a="http://schemas.openxmlformats.org/drawingml/2006/main">
+            <a:r>
               <a:t>[Sources]</a:t>
             </a:r>
           </a:p>
           <a:p xmlns:a="http://schemas.openxmlformats.org/drawingml/2006/main">
             <a:r>
-              <a:t>- Supplied source presentation: 02-llm-reasoning-engine.pdf</a:t>
+              <a:t>- Original source presentation: 02-llm-reasoning-engine.pdf</a:t>
+            </a:r>
+          </a:p>
+          <a:p xmlns:a="http://schemas.openxmlformats.org/drawingml/2006/main">
+            <a:r>
+              <a:t>- P3: Would this change your answer?. Anthropic/Fellows preprint, arXiv v1, 2026-08-17. https://arxiv.org/abs/2608.16747 CHIVE tests counterfactual prompt changes. Generated explanations remain hypotheses. Official post: August 21.</a:t>
+            </a:r>
+          </a:p>
+          <a:p xmlns:a="http://schemas.openxmlformats.org/drawingml/2006/main">
+            <a:r>
+              <a:t>- S4: Gemini structured outputs. Google documentation, accessed, 2026-09-09. https://ai.google.dev/gemini-api/docs/structured-output Supported schemas constrain structure. Application validation must check meaning and policy.</a:t>
+            </a:r>
+          </a:p>
+          <a:p xmlns:a="http://schemas.openxmlformats.org/drawingml/2006/main">
+            <a:r>
+              <a:t/>
+            </a:r>
+          </a:p>
+          <a:p xmlns:a="http://schemas.openxmlformats.org/drawingml/2006/main">
+            <a:r>
+              <a:t>[Assessed practice]</a:t>
+            </a:r>
+          </a:p>
+          <a:p xmlns:a="http://schemas.openxmlformats.org/drawingml/2006/main">
+            <a:r>
+              <a:t>Keep a factual task fixed and add one misleading cue. Predict whether the answer will change. Record both conditions and identify which check tests structure, evidence, or policy.</a:t>
+            </a:r>
+          </a:p>
+          <a:p xmlns:a="http://schemas.openxmlformats.org/drawingml/2006/main">
+            <a:r>
+              <a:t>Acceptance: The submission contains paired inputs and a testable prediction. It does not treat verbal reasoning as ground truth.</a:t>
+            </a:r>
+          </a:p>
+          <a:p xmlns:a="http://schemas.openxmlformats.org/drawingml/2006/main">
+            <a:r>
+              <a:t>Lab: labs/07_agents_sdk_evaluation.ipynb</a:t>
             </a:r>
           </a:p>
         </p:txBody>
@@ -1216,7 +1883,7 @@
           <a:lstStyle xmlns:a="http://schemas.openxmlformats.org/drawingml/2006/main"/>
           <a:p xmlns:a="http://schemas.openxmlformats.org/drawingml/2006/main">
             <a:r>
-              <a:t>Use as retrieval practice. Ask for an answer that defines, compares, traces, and evaluates.</a:t>
+              <a:t>Explain the claim first, then use the numbered points as evidence and design consequences.</a:t>
             </a:r>
           </a:p>
           <a:p xmlns:a="http://schemas.openxmlformats.org/drawingml/2006/main">
@@ -1226,12 +1893,57 @@
           </a:p>
           <a:p xmlns:a="http://schemas.openxmlformats.org/drawingml/2006/main">
             <a:r>
+              <a:t>Edition: 2026-09-09</a:t>
+            </a:r>
+          </a:p>
+          <a:p xmlns:a="http://schemas.openxmlformats.org/drawingml/2006/main">
+            <a:r>
+              <a:t/>
+            </a:r>
+          </a:p>
+          <a:p xmlns:a="http://schemas.openxmlformats.org/drawingml/2006/main">
+            <a:r>
               <a:t>[Sources]</a:t>
             </a:r>
           </a:p>
           <a:p xmlns:a="http://schemas.openxmlformats.org/drawingml/2006/main">
             <a:r>
-              <a:t>- Supplied source presentation: 02-llm-reasoning-engine.pdf</a:t>
+              <a:t>- Original source presentation: 02-llm-reasoning-engine.pdf</a:t>
+            </a:r>
+          </a:p>
+          <a:p xmlns:a="http://schemas.openxmlformats.org/drawingml/2006/main">
+            <a:r>
+              <a:t>- P3: Would this change your answer?. Anthropic/Fellows preprint, arXiv v1, 2026-08-17. https://arxiv.org/abs/2608.16747 CHIVE tests counterfactual prompt changes. Generated explanations remain hypotheses. Official post: August 21.</a:t>
+            </a:r>
+          </a:p>
+          <a:p xmlns:a="http://schemas.openxmlformats.org/drawingml/2006/main">
+            <a:r>
+              <a:t>- S4: Gemini structured outputs. Google documentation, accessed, 2026-09-09. https://ai.google.dev/gemini-api/docs/structured-output Supported schemas constrain structure. Application validation must check meaning and policy.</a:t>
+            </a:r>
+          </a:p>
+          <a:p xmlns:a="http://schemas.openxmlformats.org/drawingml/2006/main">
+            <a:r>
+              <a:t/>
+            </a:r>
+          </a:p>
+          <a:p xmlns:a="http://schemas.openxmlformats.org/drawingml/2006/main">
+            <a:r>
+              <a:t>[Assessed practice]</a:t>
+            </a:r>
+          </a:p>
+          <a:p xmlns:a="http://schemas.openxmlformats.org/drawingml/2006/main">
+            <a:r>
+              <a:t>Keep a factual task fixed and add one misleading cue. Predict whether the answer will change. Record both conditions and identify which check tests structure, evidence, or policy.</a:t>
+            </a:r>
+          </a:p>
+          <a:p xmlns:a="http://schemas.openxmlformats.org/drawingml/2006/main">
+            <a:r>
+              <a:t>Acceptance: The submission contains paired inputs and a testable prediction. It does not treat verbal reasoning as ground truth.</a:t>
+            </a:r>
+          </a:p>
+          <a:p xmlns:a="http://schemas.openxmlformats.org/drawingml/2006/main">
+            <a:r>
+              <a:t>Lab: labs/07_agents_sdk_evaluation.ipynb</a:t>
             </a:r>
           </a:p>
         </p:txBody>
@@ -1299,7 +2011,7 @@
   </p:cSld>
   <p:clrMap bg1="lt1" tx1="dk1" bg2="lt2" tx2="dk2" accent1="accent1" accent2="accent2" accent3="accent3" accent4="accent4" accent5="accent5" accent6="accent6" hlink="hlink" folHlink="folHlink"/>
   <p:sldLayoutIdLst>
-    <p:sldLayoutId xmlns:r="http://schemas.openxmlformats.org/officeDocument/2006/relationships" id="2147483649" r:id="Rb7d0da13379f473c"/>
+    <p:sldLayoutId xmlns:r="http://schemas.openxmlformats.org/officeDocument/2006/relationships" id="2147483649" r:id="Ra49ac49cada84efd"/>
   </p:sldLayoutIdLst>
   <p:txStyles>
     <p:titleStyle>
@@ -1850,7 +2562,7 @@
           <p:cNvPr id="8" name="title-accent">
             <a:extLst xmlns:a="http://schemas.openxmlformats.org/drawingml/2006/main">
               <a:ext uri="{FF2B5EF4-FFF2-40B4-BE49-F238E27FC236}">
-                <a16:creationId xmlns:a16="http://schemas.microsoft.com/office/drawing/2014/main" id="{FFCAD085-7523-4738-8AD1-66888FE92D9F}"/>
+                <a16:creationId xmlns:a16="http://schemas.microsoft.com/office/drawing/2014/main" id="{AD665FD6-3BF5-40B7-8D69-CDB9F17A3D05}"/>
               </a:ext>
             </a:extLst>
           </p:cNvPr>
@@ -1883,7 +2595,7 @@
           <p:cNvPr id="2" name="course-title">
             <a:extLst xmlns:a="http://schemas.openxmlformats.org/drawingml/2006/main">
               <a:ext uri="{FF2B5EF4-FFF2-40B4-BE49-F238E27FC236}">
-                <a16:creationId xmlns:a16="http://schemas.microsoft.com/office/drawing/2014/main" id="{DBF08186-5748-4A14-B976-9DE13172BBCE}"/>
+                <a16:creationId xmlns:a16="http://schemas.microsoft.com/office/drawing/2014/main" id="{DDB17FE0-045B-4C76-90B8-2C36E076123F}"/>
               </a:ext>
             </a:extLst>
           </p:cNvPr>
@@ -1941,7 +2653,7 @@
           <p:cNvPr id="3" name="chapter-number">
             <a:extLst xmlns:a="http://schemas.openxmlformats.org/drawingml/2006/main">
               <a:ext uri="{FF2B5EF4-FFF2-40B4-BE49-F238E27FC236}">
-                <a16:creationId xmlns:a16="http://schemas.microsoft.com/office/drawing/2014/main" id="{E76ED6DF-B8B7-4B1D-B782-6D6513EC5656}"/>
+                <a16:creationId xmlns:a16="http://schemas.microsoft.com/office/drawing/2014/main" id="{5581BF2D-DA36-495E-A086-076577CC94EB}"/>
               </a:ext>
             </a:extLst>
           </p:cNvPr>
@@ -1999,7 +2711,7 @@
           <p:cNvPr id="4" name="deck-title">
             <a:extLst xmlns:a="http://schemas.openxmlformats.org/drawingml/2006/main">
               <a:ext uri="{FF2B5EF4-FFF2-40B4-BE49-F238E27FC236}">
-                <a16:creationId xmlns:a16="http://schemas.microsoft.com/office/drawing/2014/main" id="{26CB3DC0-FB1A-407C-9A6B-91A9E28E1DF1}"/>
+                <a16:creationId xmlns:a16="http://schemas.microsoft.com/office/drawing/2014/main" id="{D1E00C3C-F69B-4BA7-BACF-17764252B200}"/>
               </a:ext>
             </a:extLst>
           </p:cNvPr>
@@ -2057,7 +2769,7 @@
           <p:cNvPr id="5" name="deck-thesis">
             <a:extLst xmlns:a="http://schemas.openxmlformats.org/drawingml/2006/main">
               <a:ext uri="{FF2B5EF4-FFF2-40B4-BE49-F238E27FC236}">
-                <a16:creationId xmlns:a16="http://schemas.microsoft.com/office/drawing/2014/main" id="{E11829D3-F50C-43A7-A320-5959824C9FD2}"/>
+                <a16:creationId xmlns:a16="http://schemas.microsoft.com/office/drawing/2014/main" id="{FBDBAA47-3FB1-494E-BAEF-B08F5026DD5D}"/>
               </a:ext>
             </a:extLst>
           </p:cNvPr>
@@ -2115,7 +2827,7 @@
           <p:cNvPr id="6" name="title-marker">
             <a:extLst xmlns:a="http://schemas.openxmlformats.org/drawingml/2006/main">
               <a:ext uri="{FF2B5EF4-FFF2-40B4-BE49-F238E27FC236}">
-                <a16:creationId xmlns:a16="http://schemas.microsoft.com/office/drawing/2014/main" id="{A5A71B28-9DAE-4C00-BF94-6EC4E70DFF2D}"/>
+                <a16:creationId xmlns:a16="http://schemas.microsoft.com/office/drawing/2014/main" id="{ADDB6F86-DD3C-4547-AC87-4E26108D5EEB}"/>
               </a:ext>
             </a:extLst>
           </p:cNvPr>
@@ -2148,7 +2860,7 @@
           <p:cNvPr id="7" name="title-marker-text">
             <a:extLst xmlns:a="http://schemas.openxmlformats.org/drawingml/2006/main">
               <a:ext uri="{FF2B5EF4-FFF2-40B4-BE49-F238E27FC236}">
-                <a16:creationId xmlns:a16="http://schemas.microsoft.com/office/drawing/2014/main" id="{8B728D22-B43E-4796-88CF-8FFDB4BC860D}"/>
+                <a16:creationId xmlns:a16="http://schemas.microsoft.com/office/drawing/2014/main" id="{C353B4EA-2BC6-402C-830F-3D23D4C45E56}"/>
               </a:ext>
             </a:extLst>
           </p:cNvPr>
@@ -2227,7 +2939,7 @@
     </p:spTree>
     <p:extLst>
       <p:ext uri="{BB962C8B-B14F-4D97-AF65-F5344CB8AC3E}">
-        <p14:creationId xmlns:p14="http://schemas.microsoft.com/office/powerpoint/2010/main" val="1136001823"/>
+        <p14:creationId xmlns:p14="http://schemas.microsoft.com/office/powerpoint/2010/main" val="1033710037"/>
       </p:ext>
     </p:extLst>
   </p:cSld>
@@ -2235,6 +2947,996 @@
 </file>
 
 <file path=ppt/slides/slide10.xml><?xml version="1.0" encoding="utf-8"?>
+<p:sld xmlns:p="http://schemas.openxmlformats.org/presentationml/2006/main">
+  <p:cSld>
+    <p:bg>
+      <p:bgPr>
+        <a:solidFill xmlns:a="http://schemas.openxmlformats.org/drawingml/2006/main">
+          <a:srgbClr val="FFFFFF"/>
+        </a:solidFill>
+      </p:bgPr>
+    </p:bg>
+    <p:spTree>
+      <p:nvGrpSpPr>
+        <p:cNvPr id="1" name=""/>
+        <p:cNvGrpSpPr/>
+        <p:nvPr/>
+      </p:nvGrpSpPr>
+      <p:grpSpPr>
+        <a:xfrm xmlns:a="http://schemas.openxmlformats.org/drawingml/2006/main"/>
+      </p:grpSpPr>
+      <p:sp>
+        <p:nvSpPr>
+          <p:cNvPr id="18" name="accent-line">
+            <a:extLst xmlns:a="http://schemas.openxmlformats.org/drawingml/2006/main">
+              <a:ext uri="{FF2B5EF4-FFF2-40B4-BE49-F238E27FC236}">
+                <a16:creationId xmlns:a16="http://schemas.microsoft.com/office/drawing/2014/main" id="{CBDF2CD3-4940-4FA4-8E3F-7AF26B0062ED}"/>
+              </a:ext>
+            </a:extLst>
+          </p:cNvPr>
+          <p:cNvSpPr>
+            <a:spLocks xmlns:a="http://schemas.openxmlformats.org/drawingml/2006/main" noGrp="1"/>
+          </p:cNvSpPr>
+          <p:nvPr/>
+        </p:nvSpPr>
+        <p:spPr>
+          <a:xfrm xmlns:a="http://schemas.openxmlformats.org/drawingml/2006/main">
+            <a:off x="390525" y="304800"/>
+            <a:ext cx="11410950" cy="66675"/>
+          </a:xfrm>
+          <a:prstGeom xmlns:a="http://schemas.openxmlformats.org/drawingml/2006/main" prst="rect">
+            <a:avLst/>
+          </a:prstGeom>
+          <a:solidFill xmlns:a="http://schemas.openxmlformats.org/drawingml/2006/main">
+            <a:srgbClr val="B9F15B"/>
+          </a:solidFill>
+          <a:ln xmlns:a="http://schemas.openxmlformats.org/drawingml/2006/main" w="0">
+            <a:solidFill>
+              <a:srgbClr val="B9F15B"/>
+            </a:solidFill>
+            <a:prstDash val="solid"/>
+          </a:ln>
+        </p:spPr>
+      </p:sp>
+      <p:sp>
+        <p:nvSpPr>
+          <p:cNvPr id="2" name="chapter-label">
+            <a:extLst xmlns:a="http://schemas.openxmlformats.org/drawingml/2006/main">
+              <a:ext uri="{FF2B5EF4-FFF2-40B4-BE49-F238E27FC236}">
+                <a16:creationId xmlns:a16="http://schemas.microsoft.com/office/drawing/2014/main" id="{E364D624-CA72-4250-85D2-489CB3C61D19}"/>
+              </a:ext>
+            </a:extLst>
+          </p:cNvPr>
+          <p:cNvSpPr>
+            <a:spLocks xmlns:a="http://schemas.openxmlformats.org/drawingml/2006/main" noGrp="1"/>
+          </p:cNvSpPr>
+          <p:nvPr/>
+        </p:nvSpPr>
+        <p:spPr>
+          <a:xfrm xmlns:a="http://schemas.openxmlformats.org/drawingml/2006/main">
+            <a:off x="390525" y="466725"/>
+            <a:ext cx="4953000" cy="323850"/>
+          </a:xfrm>
+          <a:prstGeom xmlns:a="http://schemas.openxmlformats.org/drawingml/2006/main" prst="rect">
+            <a:avLst/>
+          </a:prstGeom>
+          <a:noFill xmlns:a="http://schemas.openxmlformats.org/drawingml/2006/main"/>
+          <a:ln xmlns:a="http://schemas.openxmlformats.org/drawingml/2006/main" w="0">
+            <a:noFill/>
+            <a:prstDash val="solid"/>
+          </a:ln>
+        </p:spPr>
+        <p:txBody>
+          <a:bodyPr xmlns:a="http://schemas.openxmlformats.org/drawingml/2006/main" anchor="t">
+            <a:noAutofit/>
+          </a:bodyPr>
+          <a:lstStyle xmlns:a="http://schemas.openxmlformats.org/drawingml/2006/main"/>
+          <a:p xmlns:a="http://schemas.openxmlformats.org/drawingml/2006/main">
+            <a:pPr algn="l">
+              <a:defRPr sz="1275" b="1">
+                <a:solidFill>
+                  <a:srgbClr val="5B5B57"/>
+                </a:solidFill>
+                <a:latin typeface="Helvetica Neue"/>
+                <a:ea typeface="Helvetica Neue"/>
+                <a:cs typeface="Helvetica Neue"/>
+              </a:defRPr>
+            </a:pPr>
+            <a:r>
+              <a:rPr sz="1275" b="1">
+                <a:solidFill>
+                  <a:srgbClr val="5B5B57"/>
+                </a:solidFill>
+                <a:latin typeface="Helvetica Neue"/>
+                <a:ea typeface="Helvetica Neue"/>
+                <a:cs typeface="Helvetica Neue"/>
+              </a:rPr>
+              <a:t>EXAM CHECK  /  02</a:t>
+            </a:r>
+          </a:p>
+        </p:txBody>
+      </p:sp>
+      <p:sp>
+        <p:nvSpPr>
+          <p:cNvPr id="3" name="slide-number">
+            <a:extLst xmlns:a="http://schemas.openxmlformats.org/drawingml/2006/main">
+              <a:ext uri="{FF2B5EF4-FFF2-40B4-BE49-F238E27FC236}">
+                <a16:creationId xmlns:a16="http://schemas.microsoft.com/office/drawing/2014/main" id="{44A5F98C-AD93-4A03-8AE3-5595440CD594}"/>
+              </a:ext>
+            </a:extLst>
+          </p:cNvPr>
+          <p:cNvSpPr>
+            <a:spLocks xmlns:a="http://schemas.openxmlformats.org/drawingml/2006/main" noGrp="1"/>
+          </p:cNvSpPr>
+          <p:nvPr/>
+        </p:nvSpPr>
+        <p:spPr>
+          <a:xfrm xmlns:a="http://schemas.openxmlformats.org/drawingml/2006/main">
+            <a:off x="11049000" y="6286500"/>
+            <a:ext cx="742950" cy="266700"/>
+          </a:xfrm>
+          <a:prstGeom xmlns:a="http://schemas.openxmlformats.org/drawingml/2006/main" prst="rect">
+            <a:avLst/>
+          </a:prstGeom>
+          <a:noFill xmlns:a="http://schemas.openxmlformats.org/drawingml/2006/main"/>
+          <a:ln xmlns:a="http://schemas.openxmlformats.org/drawingml/2006/main" w="0">
+            <a:noFill/>
+            <a:prstDash val="solid"/>
+          </a:ln>
+        </p:spPr>
+        <p:txBody>
+          <a:bodyPr xmlns:a="http://schemas.openxmlformats.org/drawingml/2006/main" anchor="t">
+            <a:noAutofit/>
+          </a:bodyPr>
+          <a:lstStyle xmlns:a="http://schemas.openxmlformats.org/drawingml/2006/main"/>
+          <a:p xmlns:a="http://schemas.openxmlformats.org/drawingml/2006/main">
+            <a:pPr algn="r">
+              <a:defRPr sz="1200" b="0">
+                <a:solidFill>
+                  <a:srgbClr val="5B5B57"/>
+                </a:solidFill>
+                <a:latin typeface="Helvetica Neue"/>
+                <a:ea typeface="Helvetica Neue"/>
+                <a:cs typeface="Helvetica Neue"/>
+              </a:defRPr>
+            </a:pPr>
+            <a:r>
+              <a:rPr sz="1200" b="0">
+                <a:solidFill>
+                  <a:srgbClr val="5B5B57"/>
+                </a:solidFill>
+                <a:latin typeface="Helvetica Neue"/>
+                <a:ea typeface="Helvetica Neue"/>
+                <a:cs typeface="Helvetica Neue"/>
+              </a:rPr>
+              <a:t>10</a:t>
+            </a:r>
+          </a:p>
+        </p:txBody>
+      </p:sp>
+      <p:sp>
+        <p:nvSpPr>
+          <p:cNvPr id="4" name="chapter-footer">
+            <a:extLst xmlns:a="http://schemas.openxmlformats.org/drawingml/2006/main">
+              <a:ext uri="{FF2B5EF4-FFF2-40B4-BE49-F238E27FC236}">
+                <a16:creationId xmlns:a16="http://schemas.microsoft.com/office/drawing/2014/main" id="{95BFFE60-9C6F-4F19-B01E-D7E74D1C68F8}"/>
+              </a:ext>
+            </a:extLst>
+          </p:cNvPr>
+          <p:cNvSpPr>
+            <a:spLocks xmlns:a="http://schemas.openxmlformats.org/drawingml/2006/main" noGrp="1"/>
+          </p:cNvSpPr>
+          <p:nvPr/>
+        </p:nvSpPr>
+        <p:spPr>
+          <a:xfrm xmlns:a="http://schemas.openxmlformats.org/drawingml/2006/main">
+            <a:off x="390525" y="6286500"/>
+            <a:ext cx="8191500" cy="266700"/>
+          </a:xfrm>
+          <a:prstGeom xmlns:a="http://schemas.openxmlformats.org/drawingml/2006/main" prst="rect">
+            <a:avLst/>
+          </a:prstGeom>
+          <a:noFill xmlns:a="http://schemas.openxmlformats.org/drawingml/2006/main"/>
+          <a:ln xmlns:a="http://schemas.openxmlformats.org/drawingml/2006/main" w="0">
+            <a:noFill/>
+            <a:prstDash val="solid"/>
+          </a:ln>
+        </p:spPr>
+        <p:txBody>
+          <a:bodyPr xmlns:a="http://schemas.openxmlformats.org/drawingml/2006/main" anchor="t">
+            <a:noAutofit/>
+          </a:bodyPr>
+          <a:lstStyle xmlns:a="http://schemas.openxmlformats.org/drawingml/2006/main"/>
+          <a:p xmlns:a="http://schemas.openxmlformats.org/drawingml/2006/main">
+            <a:pPr algn="l">
+              <a:defRPr sz="1125" b="0">
+                <a:solidFill>
+                  <a:srgbClr val="5B5B57"/>
+                </a:solidFill>
+                <a:latin typeface="Helvetica Neue"/>
+                <a:ea typeface="Helvetica Neue"/>
+                <a:cs typeface="Helvetica Neue"/>
+              </a:defRPr>
+            </a:pPr>
+            <a:r>
+              <a:rPr sz="1125" b="0">
+                <a:solidFill>
+                  <a:srgbClr val="5B5B57"/>
+                </a:solidFill>
+                <a:latin typeface="Helvetica Neue"/>
+                <a:ea typeface="Helvetica Neue"/>
+                <a:cs typeface="Helvetica Neue"/>
+              </a:rPr>
+              <a:t>The LLM as a Reasoning Engine</a:t>
+            </a:r>
+          </a:p>
+        </p:txBody>
+      </p:sp>
+      <p:sp>
+        <p:nvSpPr>
+          <p:cNvPr id="5" name="exam-title">
+            <a:extLst xmlns:a="http://schemas.openxmlformats.org/drawingml/2006/main">
+              <a:ext uri="{FF2B5EF4-FFF2-40B4-BE49-F238E27FC236}">
+                <a16:creationId xmlns:a16="http://schemas.microsoft.com/office/drawing/2014/main" id="{E68C5D46-5752-4A8D-9422-E1F87FF9D8E0}"/>
+              </a:ext>
+            </a:extLst>
+          </p:cNvPr>
+          <p:cNvSpPr>
+            <a:spLocks xmlns:a="http://schemas.openxmlformats.org/drawingml/2006/main" noGrp="1"/>
+          </p:cNvSpPr>
+          <p:nvPr/>
+        </p:nvSpPr>
+        <p:spPr>
+          <a:xfrm xmlns:a="http://schemas.openxmlformats.org/drawingml/2006/main">
+            <a:off x="390525" y="981075"/>
+            <a:ext cx="10668000" cy="781050"/>
+          </a:xfrm>
+          <a:prstGeom xmlns:a="http://schemas.openxmlformats.org/drawingml/2006/main" prst="rect">
+            <a:avLst/>
+          </a:prstGeom>
+          <a:noFill xmlns:a="http://schemas.openxmlformats.org/drawingml/2006/main"/>
+          <a:ln xmlns:a="http://schemas.openxmlformats.org/drawingml/2006/main" w="0">
+            <a:noFill/>
+            <a:prstDash val="solid"/>
+          </a:ln>
+        </p:spPr>
+        <p:txBody>
+          <a:bodyPr xmlns:a="http://schemas.openxmlformats.org/drawingml/2006/main" anchor="t">
+            <a:noAutofit/>
+          </a:bodyPr>
+          <a:lstStyle xmlns:a="http://schemas.openxmlformats.org/drawingml/2006/main"/>
+          <a:p xmlns:a="http://schemas.openxmlformats.org/drawingml/2006/main">
+            <a:pPr algn="l">
+              <a:defRPr sz="3150" b="1">
+                <a:solidFill>
+                  <a:srgbClr val="111111"/>
+                </a:solidFill>
+                <a:latin typeface="Helvetica Neue"/>
+                <a:ea typeface="Helvetica Neue"/>
+                <a:cs typeface="Helvetica Neue"/>
+              </a:defRPr>
+            </a:pPr>
+            <a:r>
+              <a:rPr sz="3150" b="1">
+                <a:solidFill>
+                  <a:srgbClr val="111111"/>
+                </a:solidFill>
+                <a:latin typeface="Helvetica Neue"/>
+                <a:ea typeface="Helvetica Neue"/>
+                <a:cs typeface="Helvetica Neue"/>
+              </a:rPr>
+              <a:t>Can you answer these without notes?</a:t>
+            </a:r>
+          </a:p>
+        </p:txBody>
+      </p:sp>
+      <p:sp>
+        <p:nvSpPr>
+          <p:cNvPr id="6" name="exam-number-1">
+            <a:extLst xmlns:a="http://schemas.openxmlformats.org/drawingml/2006/main">
+              <a:ext uri="{FF2B5EF4-FFF2-40B4-BE49-F238E27FC236}">
+                <a16:creationId xmlns:a16="http://schemas.microsoft.com/office/drawing/2014/main" id="{A678862D-5651-4110-9E89-913D5EFA861B}"/>
+              </a:ext>
+            </a:extLst>
+          </p:cNvPr>
+          <p:cNvSpPr>
+            <a:spLocks xmlns:a="http://schemas.openxmlformats.org/drawingml/2006/main" noGrp="1"/>
+          </p:cNvSpPr>
+          <p:nvPr/>
+        </p:nvSpPr>
+        <p:spPr>
+          <a:xfrm xmlns:a="http://schemas.openxmlformats.org/drawingml/2006/main">
+            <a:off x="390525" y="2238375"/>
+            <a:ext cx="590550" cy="400050"/>
+          </a:xfrm>
+          <a:prstGeom xmlns:a="http://schemas.openxmlformats.org/drawingml/2006/main" prst="rect">
+            <a:avLst/>
+          </a:prstGeom>
+          <a:noFill xmlns:a="http://schemas.openxmlformats.org/drawingml/2006/main"/>
+          <a:ln xmlns:a="http://schemas.openxmlformats.org/drawingml/2006/main" w="0">
+            <a:noFill/>
+            <a:prstDash val="solid"/>
+          </a:ln>
+        </p:spPr>
+        <p:txBody>
+          <a:bodyPr xmlns:a="http://schemas.openxmlformats.org/drawingml/2006/main" anchor="t">
+            <a:noAutofit/>
+          </a:bodyPr>
+          <a:lstStyle xmlns:a="http://schemas.openxmlformats.org/drawingml/2006/main"/>
+          <a:p xmlns:a="http://schemas.openxmlformats.org/drawingml/2006/main">
+            <a:pPr algn="l">
+              <a:defRPr sz="1725" b="1">
+                <a:solidFill>
+                  <a:srgbClr val="B9F15B"/>
+                </a:solidFill>
+                <a:latin typeface="Helvetica Neue"/>
+                <a:ea typeface="Helvetica Neue"/>
+                <a:cs typeface="Helvetica Neue"/>
+              </a:defRPr>
+            </a:pPr>
+            <a:r>
+              <a:rPr sz="1725" b="1">
+                <a:solidFill>
+                  <a:srgbClr val="B9F15B"/>
+                </a:solidFill>
+                <a:latin typeface="Helvetica Neue"/>
+                <a:ea typeface="Helvetica Neue"/>
+                <a:cs typeface="Helvetica Neue"/>
+              </a:rPr>
+              <a:t>01</a:t>
+            </a:r>
+          </a:p>
+        </p:txBody>
+      </p:sp>
+      <p:sp>
+        <p:nvSpPr>
+          <p:cNvPr id="7" name="exam-question-1">
+            <a:extLst xmlns:a="http://schemas.openxmlformats.org/drawingml/2006/main">
+              <a:ext uri="{FF2B5EF4-FFF2-40B4-BE49-F238E27FC236}">
+                <a16:creationId xmlns:a16="http://schemas.microsoft.com/office/drawing/2014/main" id="{E06370DF-BE0E-4B47-A3F9-E21311E2467A}"/>
+              </a:ext>
+            </a:extLst>
+          </p:cNvPr>
+          <p:cNvSpPr>
+            <a:spLocks xmlns:a="http://schemas.openxmlformats.org/drawingml/2006/main" noGrp="1"/>
+          </p:cNvSpPr>
+          <p:nvPr/>
+        </p:nvSpPr>
+        <p:spPr>
+          <a:xfrm xmlns:a="http://schemas.openxmlformats.org/drawingml/2006/main">
+            <a:off x="1076325" y="2238375"/>
+            <a:ext cx="4762500" cy="895350"/>
+          </a:xfrm>
+          <a:prstGeom xmlns:a="http://schemas.openxmlformats.org/drawingml/2006/main" prst="rect">
+            <a:avLst/>
+          </a:prstGeom>
+          <a:noFill xmlns:a="http://schemas.openxmlformats.org/drawingml/2006/main"/>
+          <a:ln xmlns:a="http://schemas.openxmlformats.org/drawingml/2006/main" w="0">
+            <a:noFill/>
+            <a:prstDash val="solid"/>
+          </a:ln>
+        </p:spPr>
+        <p:txBody>
+          <a:bodyPr xmlns:a="http://schemas.openxmlformats.org/drawingml/2006/main" anchor="t">
+            <a:normAutofit fontScale="100000"/>
+          </a:bodyPr>
+          <a:lstStyle xmlns:a="http://schemas.openxmlformats.org/drawingml/2006/main"/>
+          <a:p xmlns:a="http://schemas.openxmlformats.org/drawingml/2006/main">
+            <a:pPr algn="l">
+              <a:defRPr sz="1575" b="1">
+                <a:solidFill>
+                  <a:srgbClr val="111111"/>
+                </a:solidFill>
+                <a:latin typeface="Helvetica Neue"/>
+                <a:ea typeface="Helvetica Neue"/>
+                <a:cs typeface="Helvetica Neue"/>
+              </a:defRPr>
+            </a:pPr>
+            <a:r>
+              <a:rPr sz="1575" b="1">
+                <a:solidFill>
+                  <a:srgbClr val="111111"/>
+                </a:solidFill>
+                <a:latin typeface="Helvetica Neue"/>
+                <a:ea typeface="Helvetica Neue"/>
+                <a:cs typeface="Helvetica Neue"/>
+              </a:rPr>
+              <a:t>How do temperature and top-p affect an agent loop?</a:t>
+            </a:r>
+          </a:p>
+        </p:txBody>
+      </p:sp>
+      <p:sp>
+        <p:nvSpPr>
+          <p:cNvPr id="8" name="exam-number-2">
+            <a:extLst xmlns:a="http://schemas.openxmlformats.org/drawingml/2006/main">
+              <a:ext uri="{FF2B5EF4-FFF2-40B4-BE49-F238E27FC236}">
+                <a16:creationId xmlns:a16="http://schemas.microsoft.com/office/drawing/2014/main" id="{62B5F73A-EDEC-4769-A94E-4329ED51406B}"/>
+              </a:ext>
+            </a:extLst>
+          </p:cNvPr>
+          <p:cNvSpPr>
+            <a:spLocks xmlns:a="http://schemas.openxmlformats.org/drawingml/2006/main" noGrp="1"/>
+          </p:cNvSpPr>
+          <p:nvPr/>
+        </p:nvSpPr>
+        <p:spPr>
+          <a:xfrm xmlns:a="http://schemas.openxmlformats.org/drawingml/2006/main">
+            <a:off x="6191250" y="2238375"/>
+            <a:ext cx="590550" cy="400050"/>
+          </a:xfrm>
+          <a:prstGeom xmlns:a="http://schemas.openxmlformats.org/drawingml/2006/main" prst="rect">
+            <a:avLst/>
+          </a:prstGeom>
+          <a:noFill xmlns:a="http://schemas.openxmlformats.org/drawingml/2006/main"/>
+          <a:ln xmlns:a="http://schemas.openxmlformats.org/drawingml/2006/main" w="0">
+            <a:noFill/>
+            <a:prstDash val="solid"/>
+          </a:ln>
+        </p:spPr>
+        <p:txBody>
+          <a:bodyPr xmlns:a="http://schemas.openxmlformats.org/drawingml/2006/main" anchor="t">
+            <a:noAutofit/>
+          </a:bodyPr>
+          <a:lstStyle xmlns:a="http://schemas.openxmlformats.org/drawingml/2006/main"/>
+          <a:p xmlns:a="http://schemas.openxmlformats.org/drawingml/2006/main">
+            <a:pPr algn="l">
+              <a:defRPr sz="1725" b="1">
+                <a:solidFill>
+                  <a:srgbClr val="B9F15B"/>
+                </a:solidFill>
+                <a:latin typeface="Helvetica Neue"/>
+                <a:ea typeface="Helvetica Neue"/>
+                <a:cs typeface="Helvetica Neue"/>
+              </a:defRPr>
+            </a:pPr>
+            <a:r>
+              <a:rPr sz="1725" b="1">
+                <a:solidFill>
+                  <a:srgbClr val="B9F15B"/>
+                </a:solidFill>
+                <a:latin typeface="Helvetica Neue"/>
+                <a:ea typeface="Helvetica Neue"/>
+                <a:cs typeface="Helvetica Neue"/>
+              </a:rPr>
+              <a:t>02</a:t>
+            </a:r>
+          </a:p>
+        </p:txBody>
+      </p:sp>
+      <p:sp>
+        <p:nvSpPr>
+          <p:cNvPr id="9" name="exam-question-2">
+            <a:extLst xmlns:a="http://schemas.openxmlformats.org/drawingml/2006/main">
+              <a:ext uri="{FF2B5EF4-FFF2-40B4-BE49-F238E27FC236}">
+                <a16:creationId xmlns:a16="http://schemas.microsoft.com/office/drawing/2014/main" id="{A543E338-9E64-499D-93F6-83C1F112C8EA}"/>
+              </a:ext>
+            </a:extLst>
+          </p:cNvPr>
+          <p:cNvSpPr>
+            <a:spLocks xmlns:a="http://schemas.openxmlformats.org/drawingml/2006/main" noGrp="1"/>
+          </p:cNvSpPr>
+          <p:nvPr/>
+        </p:nvSpPr>
+        <p:spPr>
+          <a:xfrm xmlns:a="http://schemas.openxmlformats.org/drawingml/2006/main">
+            <a:off x="6877050" y="2238375"/>
+            <a:ext cx="4762500" cy="895350"/>
+          </a:xfrm>
+          <a:prstGeom xmlns:a="http://schemas.openxmlformats.org/drawingml/2006/main" prst="rect">
+            <a:avLst/>
+          </a:prstGeom>
+          <a:noFill xmlns:a="http://schemas.openxmlformats.org/drawingml/2006/main"/>
+          <a:ln xmlns:a="http://schemas.openxmlformats.org/drawingml/2006/main" w="0">
+            <a:noFill/>
+            <a:prstDash val="solid"/>
+          </a:ln>
+        </p:spPr>
+        <p:txBody>
+          <a:bodyPr xmlns:a="http://schemas.openxmlformats.org/drawingml/2006/main" anchor="t">
+            <a:normAutofit fontScale="100000"/>
+          </a:bodyPr>
+          <a:lstStyle xmlns:a="http://schemas.openxmlformats.org/drawingml/2006/main"/>
+          <a:p xmlns:a="http://schemas.openxmlformats.org/drawingml/2006/main">
+            <a:pPr algn="l">
+              <a:defRPr sz="1575" b="1">
+                <a:solidFill>
+                  <a:srgbClr val="111111"/>
+                </a:solidFill>
+                <a:latin typeface="Helvetica Neue"/>
+                <a:ea typeface="Helvetica Neue"/>
+                <a:cs typeface="Helvetica Neue"/>
+              </a:defRPr>
+            </a:pPr>
+            <a:r>
+              <a:rPr sz="1575" b="1">
+                <a:solidFill>
+                  <a:srgbClr val="111111"/>
+                </a:solidFill>
+                <a:latin typeface="Helvetica Neue"/>
+                <a:ea typeface="Helvetica Neue"/>
+                <a:cs typeface="Helvetica Neue"/>
+              </a:rPr>
+              <a:t>What competes for space in the context window?</a:t>
+            </a:r>
+          </a:p>
+        </p:txBody>
+      </p:sp>
+      <p:sp>
+        <p:nvSpPr>
+          <p:cNvPr id="10" name="exam-number-3">
+            <a:extLst xmlns:a="http://schemas.openxmlformats.org/drawingml/2006/main">
+              <a:ext uri="{FF2B5EF4-FFF2-40B4-BE49-F238E27FC236}">
+                <a16:creationId xmlns:a16="http://schemas.microsoft.com/office/drawing/2014/main" id="{99841326-CC2B-4ABA-B7FD-2190B0354C93}"/>
+              </a:ext>
+            </a:extLst>
+          </p:cNvPr>
+          <p:cNvSpPr>
+            <a:spLocks xmlns:a="http://schemas.openxmlformats.org/drawingml/2006/main" noGrp="1"/>
+          </p:cNvSpPr>
+          <p:nvPr/>
+        </p:nvSpPr>
+        <p:spPr>
+          <a:xfrm xmlns:a="http://schemas.openxmlformats.org/drawingml/2006/main">
+            <a:off x="390525" y="3495675"/>
+            <a:ext cx="590550" cy="400050"/>
+          </a:xfrm>
+          <a:prstGeom xmlns:a="http://schemas.openxmlformats.org/drawingml/2006/main" prst="rect">
+            <a:avLst/>
+          </a:prstGeom>
+          <a:noFill xmlns:a="http://schemas.openxmlformats.org/drawingml/2006/main"/>
+          <a:ln xmlns:a="http://schemas.openxmlformats.org/drawingml/2006/main" w="0">
+            <a:noFill/>
+            <a:prstDash val="solid"/>
+          </a:ln>
+        </p:spPr>
+        <p:txBody>
+          <a:bodyPr xmlns:a="http://schemas.openxmlformats.org/drawingml/2006/main" anchor="t">
+            <a:noAutofit/>
+          </a:bodyPr>
+          <a:lstStyle xmlns:a="http://schemas.openxmlformats.org/drawingml/2006/main"/>
+          <a:p xmlns:a="http://schemas.openxmlformats.org/drawingml/2006/main">
+            <a:pPr algn="l">
+              <a:defRPr sz="1725" b="1">
+                <a:solidFill>
+                  <a:srgbClr val="B9F15B"/>
+                </a:solidFill>
+                <a:latin typeface="Helvetica Neue"/>
+                <a:ea typeface="Helvetica Neue"/>
+                <a:cs typeface="Helvetica Neue"/>
+              </a:defRPr>
+            </a:pPr>
+            <a:r>
+              <a:rPr sz="1725" b="1">
+                <a:solidFill>
+                  <a:srgbClr val="B9F15B"/>
+                </a:solidFill>
+                <a:latin typeface="Helvetica Neue"/>
+                <a:ea typeface="Helvetica Neue"/>
+                <a:cs typeface="Helvetica Neue"/>
+              </a:rPr>
+              <a:t>03</a:t>
+            </a:r>
+          </a:p>
+        </p:txBody>
+      </p:sp>
+      <p:sp>
+        <p:nvSpPr>
+          <p:cNvPr id="11" name="exam-question-3">
+            <a:extLst xmlns:a="http://schemas.openxmlformats.org/drawingml/2006/main">
+              <a:ext uri="{FF2B5EF4-FFF2-40B4-BE49-F238E27FC236}">
+                <a16:creationId xmlns:a16="http://schemas.microsoft.com/office/drawing/2014/main" id="{A67E97E9-5C6C-44FA-A8CA-1EBC653C3EA3}"/>
+              </a:ext>
+            </a:extLst>
+          </p:cNvPr>
+          <p:cNvSpPr>
+            <a:spLocks xmlns:a="http://schemas.openxmlformats.org/drawingml/2006/main" noGrp="1"/>
+          </p:cNvSpPr>
+          <p:nvPr/>
+        </p:nvSpPr>
+        <p:spPr>
+          <a:xfrm xmlns:a="http://schemas.openxmlformats.org/drawingml/2006/main">
+            <a:off x="1076325" y="3495675"/>
+            <a:ext cx="4762500" cy="895350"/>
+          </a:xfrm>
+          <a:prstGeom xmlns:a="http://schemas.openxmlformats.org/drawingml/2006/main" prst="rect">
+            <a:avLst/>
+          </a:prstGeom>
+          <a:noFill xmlns:a="http://schemas.openxmlformats.org/drawingml/2006/main"/>
+          <a:ln xmlns:a="http://schemas.openxmlformats.org/drawingml/2006/main" w="0">
+            <a:noFill/>
+            <a:prstDash val="solid"/>
+          </a:ln>
+        </p:spPr>
+        <p:txBody>
+          <a:bodyPr xmlns:a="http://schemas.openxmlformats.org/drawingml/2006/main" anchor="t">
+            <a:normAutofit fontScale="100000"/>
+          </a:bodyPr>
+          <a:lstStyle xmlns:a="http://schemas.openxmlformats.org/drawingml/2006/main"/>
+          <a:p xmlns:a="http://schemas.openxmlformats.org/drawingml/2006/main">
+            <a:pPr algn="l">
+              <a:defRPr sz="1575" b="1">
+                <a:solidFill>
+                  <a:srgbClr val="111111"/>
+                </a:solidFill>
+                <a:latin typeface="Helvetica Neue"/>
+                <a:ea typeface="Helvetica Neue"/>
+                <a:cs typeface="Helvetica Neue"/>
+              </a:defRPr>
+            </a:pPr>
+            <a:r>
+              <a:rPr sz="1575" b="1">
+                <a:solidFill>
+                  <a:srgbClr val="111111"/>
+                </a:solidFill>
+                <a:latin typeface="Helvetica Neue"/>
+                <a:ea typeface="Helvetica Neue"/>
+                <a:cs typeface="Helvetica Neue"/>
+              </a:rPr>
+              <a:t>Compare zero-shot, few-shot, chain-of-thought, self-consistency, and PAL.</a:t>
+            </a:r>
+          </a:p>
+        </p:txBody>
+      </p:sp>
+      <p:sp>
+        <p:nvSpPr>
+          <p:cNvPr id="12" name="exam-number-4">
+            <a:extLst xmlns:a="http://schemas.openxmlformats.org/drawingml/2006/main">
+              <a:ext uri="{FF2B5EF4-FFF2-40B4-BE49-F238E27FC236}">
+                <a16:creationId xmlns:a16="http://schemas.microsoft.com/office/drawing/2014/main" id="{086E485A-DC93-4511-83AC-C783315F31DE}"/>
+              </a:ext>
+            </a:extLst>
+          </p:cNvPr>
+          <p:cNvSpPr>
+            <a:spLocks xmlns:a="http://schemas.openxmlformats.org/drawingml/2006/main" noGrp="1"/>
+          </p:cNvSpPr>
+          <p:nvPr/>
+        </p:nvSpPr>
+        <p:spPr>
+          <a:xfrm xmlns:a="http://schemas.openxmlformats.org/drawingml/2006/main">
+            <a:off x="6191250" y="3495675"/>
+            <a:ext cx="590550" cy="400050"/>
+          </a:xfrm>
+          <a:prstGeom xmlns:a="http://schemas.openxmlformats.org/drawingml/2006/main" prst="rect">
+            <a:avLst/>
+          </a:prstGeom>
+          <a:noFill xmlns:a="http://schemas.openxmlformats.org/drawingml/2006/main"/>
+          <a:ln xmlns:a="http://schemas.openxmlformats.org/drawingml/2006/main" w="0">
+            <a:noFill/>
+            <a:prstDash val="solid"/>
+          </a:ln>
+        </p:spPr>
+        <p:txBody>
+          <a:bodyPr xmlns:a="http://schemas.openxmlformats.org/drawingml/2006/main" anchor="t">
+            <a:noAutofit/>
+          </a:bodyPr>
+          <a:lstStyle xmlns:a="http://schemas.openxmlformats.org/drawingml/2006/main"/>
+          <a:p xmlns:a="http://schemas.openxmlformats.org/drawingml/2006/main">
+            <a:pPr algn="l">
+              <a:defRPr sz="1725" b="1">
+                <a:solidFill>
+                  <a:srgbClr val="B9F15B"/>
+                </a:solidFill>
+                <a:latin typeface="Helvetica Neue"/>
+                <a:ea typeface="Helvetica Neue"/>
+                <a:cs typeface="Helvetica Neue"/>
+              </a:defRPr>
+            </a:pPr>
+            <a:r>
+              <a:rPr sz="1725" b="1">
+                <a:solidFill>
+                  <a:srgbClr val="B9F15B"/>
+                </a:solidFill>
+                <a:latin typeface="Helvetica Neue"/>
+                <a:ea typeface="Helvetica Neue"/>
+                <a:cs typeface="Helvetica Neue"/>
+              </a:rPr>
+              <a:t>04</a:t>
+            </a:r>
+          </a:p>
+        </p:txBody>
+      </p:sp>
+      <p:sp>
+        <p:nvSpPr>
+          <p:cNvPr id="13" name="exam-question-4">
+            <a:extLst xmlns:a="http://schemas.openxmlformats.org/drawingml/2006/main">
+              <a:ext uri="{FF2B5EF4-FFF2-40B4-BE49-F238E27FC236}">
+                <a16:creationId xmlns:a16="http://schemas.microsoft.com/office/drawing/2014/main" id="{848102BF-DA06-4ED4-9603-5B5E32363496}"/>
+              </a:ext>
+            </a:extLst>
+          </p:cNvPr>
+          <p:cNvSpPr>
+            <a:spLocks xmlns:a="http://schemas.openxmlformats.org/drawingml/2006/main" noGrp="1"/>
+          </p:cNvSpPr>
+          <p:nvPr/>
+        </p:nvSpPr>
+        <p:spPr>
+          <a:xfrm xmlns:a="http://schemas.openxmlformats.org/drawingml/2006/main">
+            <a:off x="6877050" y="3495675"/>
+            <a:ext cx="4762500" cy="895350"/>
+          </a:xfrm>
+          <a:prstGeom xmlns:a="http://schemas.openxmlformats.org/drawingml/2006/main" prst="rect">
+            <a:avLst/>
+          </a:prstGeom>
+          <a:noFill xmlns:a="http://schemas.openxmlformats.org/drawingml/2006/main"/>
+          <a:ln xmlns:a="http://schemas.openxmlformats.org/drawingml/2006/main" w="0">
+            <a:noFill/>
+            <a:prstDash val="solid"/>
+          </a:ln>
+        </p:spPr>
+        <p:txBody>
+          <a:bodyPr xmlns:a="http://schemas.openxmlformats.org/drawingml/2006/main" anchor="t">
+            <a:normAutofit fontScale="100000"/>
+          </a:bodyPr>
+          <a:lstStyle xmlns:a="http://schemas.openxmlformats.org/drawingml/2006/main"/>
+          <a:p xmlns:a="http://schemas.openxmlformats.org/drawingml/2006/main">
+            <a:pPr algn="l">
+              <a:defRPr sz="1575" b="1">
+                <a:solidFill>
+                  <a:srgbClr val="111111"/>
+                </a:solidFill>
+                <a:latin typeface="Helvetica Neue"/>
+                <a:ea typeface="Helvetica Neue"/>
+                <a:cs typeface="Helvetica Neue"/>
+              </a:defRPr>
+            </a:pPr>
+            <a:r>
+              <a:rPr sz="1575" b="1">
+                <a:solidFill>
+                  <a:srgbClr val="111111"/>
+                </a:solidFill>
+                <a:latin typeface="Helvetica Neue"/>
+                <a:ea typeface="Helvetica Neue"/>
+                <a:cs typeface="Helvetica Neue"/>
+              </a:rPr>
+              <a:t>Why is valid JSON insufficient as a security guarantee?</a:t>
+            </a:r>
+          </a:p>
+        </p:txBody>
+      </p:sp>
+      <p:sp>
+        <p:nvSpPr>
+          <p:cNvPr id="14" name="exam-number-5">
+            <a:extLst xmlns:a="http://schemas.openxmlformats.org/drawingml/2006/main">
+              <a:ext uri="{FF2B5EF4-FFF2-40B4-BE49-F238E27FC236}">
+                <a16:creationId xmlns:a16="http://schemas.microsoft.com/office/drawing/2014/main" id="{209B6BD5-EBC1-4FAF-B915-3550B113EBC5}"/>
+              </a:ext>
+            </a:extLst>
+          </p:cNvPr>
+          <p:cNvSpPr>
+            <a:spLocks xmlns:a="http://schemas.openxmlformats.org/drawingml/2006/main" noGrp="1"/>
+          </p:cNvSpPr>
+          <p:nvPr/>
+        </p:nvSpPr>
+        <p:spPr>
+          <a:xfrm xmlns:a="http://schemas.openxmlformats.org/drawingml/2006/main">
+            <a:off x="390525" y="4752975"/>
+            <a:ext cx="590550" cy="400050"/>
+          </a:xfrm>
+          <a:prstGeom xmlns:a="http://schemas.openxmlformats.org/drawingml/2006/main" prst="rect">
+            <a:avLst/>
+          </a:prstGeom>
+          <a:noFill xmlns:a="http://schemas.openxmlformats.org/drawingml/2006/main"/>
+          <a:ln xmlns:a="http://schemas.openxmlformats.org/drawingml/2006/main" w="0">
+            <a:noFill/>
+            <a:prstDash val="solid"/>
+          </a:ln>
+        </p:spPr>
+        <p:txBody>
+          <a:bodyPr xmlns:a="http://schemas.openxmlformats.org/drawingml/2006/main" anchor="t">
+            <a:noAutofit/>
+          </a:bodyPr>
+          <a:lstStyle xmlns:a="http://schemas.openxmlformats.org/drawingml/2006/main"/>
+          <a:p xmlns:a="http://schemas.openxmlformats.org/drawingml/2006/main">
+            <a:pPr algn="l">
+              <a:defRPr sz="1725" b="1">
+                <a:solidFill>
+                  <a:srgbClr val="B9F15B"/>
+                </a:solidFill>
+                <a:latin typeface="Helvetica Neue"/>
+                <a:ea typeface="Helvetica Neue"/>
+                <a:cs typeface="Helvetica Neue"/>
+              </a:defRPr>
+            </a:pPr>
+            <a:r>
+              <a:rPr sz="1725" b="1">
+                <a:solidFill>
+                  <a:srgbClr val="B9F15B"/>
+                </a:solidFill>
+                <a:latin typeface="Helvetica Neue"/>
+                <a:ea typeface="Helvetica Neue"/>
+                <a:cs typeface="Helvetica Neue"/>
+              </a:rPr>
+              <a:t>05</a:t>
+            </a:r>
+          </a:p>
+        </p:txBody>
+      </p:sp>
+      <p:sp>
+        <p:nvSpPr>
+          <p:cNvPr id="15" name="exam-question-5">
+            <a:extLst xmlns:a="http://schemas.openxmlformats.org/drawingml/2006/main">
+              <a:ext uri="{FF2B5EF4-FFF2-40B4-BE49-F238E27FC236}">
+                <a16:creationId xmlns:a16="http://schemas.microsoft.com/office/drawing/2014/main" id="{044685BD-3272-4313-A5D0-082FE930A3BB}"/>
+              </a:ext>
+            </a:extLst>
+          </p:cNvPr>
+          <p:cNvSpPr>
+            <a:spLocks xmlns:a="http://schemas.openxmlformats.org/drawingml/2006/main" noGrp="1"/>
+          </p:cNvSpPr>
+          <p:nvPr/>
+        </p:nvSpPr>
+        <p:spPr>
+          <a:xfrm xmlns:a="http://schemas.openxmlformats.org/drawingml/2006/main">
+            <a:off x="1076325" y="4752975"/>
+            <a:ext cx="4762500" cy="895350"/>
+          </a:xfrm>
+          <a:prstGeom xmlns:a="http://schemas.openxmlformats.org/drawingml/2006/main" prst="rect">
+            <a:avLst/>
+          </a:prstGeom>
+          <a:noFill xmlns:a="http://schemas.openxmlformats.org/drawingml/2006/main"/>
+          <a:ln xmlns:a="http://schemas.openxmlformats.org/drawingml/2006/main" w="0">
+            <a:noFill/>
+            <a:prstDash val="solid"/>
+          </a:ln>
+        </p:spPr>
+        <p:txBody>
+          <a:bodyPr xmlns:a="http://schemas.openxmlformats.org/drawingml/2006/main" anchor="t">
+            <a:normAutofit fontScale="100000"/>
+          </a:bodyPr>
+          <a:lstStyle xmlns:a="http://schemas.openxmlformats.org/drawingml/2006/main"/>
+          <a:p xmlns:a="http://schemas.openxmlformats.org/drawingml/2006/main">
+            <a:pPr algn="l">
+              <a:defRPr sz="1575" b="1">
+                <a:solidFill>
+                  <a:srgbClr val="111111"/>
+                </a:solidFill>
+                <a:latin typeface="Helvetica Neue"/>
+                <a:ea typeface="Helvetica Neue"/>
+                <a:cs typeface="Helvetica Neue"/>
+              </a:defRPr>
+            </a:pPr>
+            <a:r>
+              <a:rPr sz="1575" b="1">
+                <a:solidFill>
+                  <a:srgbClr val="111111"/>
+                </a:solidFill>
+                <a:latin typeface="Helvetica Neue"/>
+                <a:ea typeface="Helvetica Neue"/>
+                <a:cs typeface="Helvetica Neue"/>
+              </a:rPr>
+              <a:t>When should an engineer choose RAG rather than fine-tuning?</a:t>
+            </a:r>
+          </a:p>
+        </p:txBody>
+      </p:sp>
+      <p:sp>
+        <p:nvSpPr>
+          <p:cNvPr id="16" name="exam-number-6">
+            <a:extLst xmlns:a="http://schemas.openxmlformats.org/drawingml/2006/main">
+              <a:ext uri="{FF2B5EF4-FFF2-40B4-BE49-F238E27FC236}">
+                <a16:creationId xmlns:a16="http://schemas.microsoft.com/office/drawing/2014/main" id="{4640A2AE-6E9E-4A1D-B595-DA248A6B1B2B}"/>
+              </a:ext>
+            </a:extLst>
+          </p:cNvPr>
+          <p:cNvSpPr>
+            <a:spLocks xmlns:a="http://schemas.openxmlformats.org/drawingml/2006/main" noGrp="1"/>
+          </p:cNvSpPr>
+          <p:nvPr/>
+        </p:nvSpPr>
+        <p:spPr>
+          <a:xfrm xmlns:a="http://schemas.openxmlformats.org/drawingml/2006/main">
+            <a:off x="6191250" y="4752975"/>
+            <a:ext cx="590550" cy="400050"/>
+          </a:xfrm>
+          <a:prstGeom xmlns:a="http://schemas.openxmlformats.org/drawingml/2006/main" prst="rect">
+            <a:avLst/>
+          </a:prstGeom>
+          <a:noFill xmlns:a="http://schemas.openxmlformats.org/drawingml/2006/main"/>
+          <a:ln xmlns:a="http://schemas.openxmlformats.org/drawingml/2006/main" w="0">
+            <a:noFill/>
+            <a:prstDash val="solid"/>
+          </a:ln>
+        </p:spPr>
+        <p:txBody>
+          <a:bodyPr xmlns:a="http://schemas.openxmlformats.org/drawingml/2006/main" anchor="t">
+            <a:noAutofit/>
+          </a:bodyPr>
+          <a:lstStyle xmlns:a="http://schemas.openxmlformats.org/drawingml/2006/main"/>
+          <a:p xmlns:a="http://schemas.openxmlformats.org/drawingml/2006/main">
+            <a:pPr algn="l">
+              <a:defRPr sz="1725" b="1">
+                <a:solidFill>
+                  <a:srgbClr val="B9F15B"/>
+                </a:solidFill>
+                <a:latin typeface="Helvetica Neue"/>
+                <a:ea typeface="Helvetica Neue"/>
+                <a:cs typeface="Helvetica Neue"/>
+              </a:defRPr>
+            </a:pPr>
+            <a:r>
+              <a:rPr sz="1725" b="1">
+                <a:solidFill>
+                  <a:srgbClr val="B9F15B"/>
+                </a:solidFill>
+                <a:latin typeface="Helvetica Neue"/>
+                <a:ea typeface="Helvetica Neue"/>
+                <a:cs typeface="Helvetica Neue"/>
+              </a:rPr>
+              <a:t>06</a:t>
+            </a:r>
+          </a:p>
+        </p:txBody>
+      </p:sp>
+      <p:sp>
+        <p:nvSpPr>
+          <p:cNvPr id="17" name="exam-question-6">
+            <a:extLst xmlns:a="http://schemas.openxmlformats.org/drawingml/2006/main">
+              <a:ext uri="{FF2B5EF4-FFF2-40B4-BE49-F238E27FC236}">
+                <a16:creationId xmlns:a16="http://schemas.microsoft.com/office/drawing/2014/main" id="{BBFD0364-2B07-4BC9-B0BC-04EF5DFF8F3C}"/>
+              </a:ext>
+            </a:extLst>
+          </p:cNvPr>
+          <p:cNvSpPr>
+            <a:spLocks xmlns:a="http://schemas.openxmlformats.org/drawingml/2006/main" noGrp="1"/>
+          </p:cNvSpPr>
+          <p:nvPr/>
+        </p:nvSpPr>
+        <p:spPr>
+          <a:xfrm xmlns:a="http://schemas.openxmlformats.org/drawingml/2006/main">
+            <a:off x="6877050" y="4752975"/>
+            <a:ext cx="4762500" cy="895350"/>
+          </a:xfrm>
+          <a:prstGeom xmlns:a="http://schemas.openxmlformats.org/drawingml/2006/main" prst="rect">
+            <a:avLst/>
+          </a:prstGeom>
+          <a:noFill xmlns:a="http://schemas.openxmlformats.org/drawingml/2006/main"/>
+          <a:ln xmlns:a="http://schemas.openxmlformats.org/drawingml/2006/main" w="0">
+            <a:noFill/>
+            <a:prstDash val="solid"/>
+          </a:ln>
+        </p:spPr>
+        <p:txBody>
+          <a:bodyPr xmlns:a="http://schemas.openxmlformats.org/drawingml/2006/main" anchor="t">
+            <a:normAutofit fontScale="100000"/>
+          </a:bodyPr>
+          <a:lstStyle xmlns:a="http://schemas.openxmlformats.org/drawingml/2006/main"/>
+          <a:p xmlns:a="http://schemas.openxmlformats.org/drawingml/2006/main">
+            <a:pPr algn="l">
+              <a:defRPr sz="1575" b="1">
+                <a:solidFill>
+                  <a:srgbClr val="111111"/>
+                </a:solidFill>
+                <a:latin typeface="Helvetica Neue"/>
+                <a:ea typeface="Helvetica Neue"/>
+                <a:cs typeface="Helvetica Neue"/>
+              </a:defRPr>
+            </a:pPr>
+            <a:r>
+              <a:rPr sz="1575" b="1">
+                <a:solidFill>
+                  <a:srgbClr val="111111"/>
+                </a:solidFill>
+                <a:latin typeface="Helvetica Neue"/>
+                <a:ea typeface="Helvetica Neue"/>
+                <a:cs typeface="Helvetica Neue"/>
+              </a:rPr>
+              <a:t>Why can a valid schema and a plausible explanation still accompany a wrong answer?</a:t>
+            </a:r>
+          </a:p>
+        </p:txBody>
+      </p:sp>
+    </p:spTree>
+    <p:extLst>
+      <p:ext uri="{BB962C8B-B14F-4D97-AF65-F5344CB8AC3E}">
+        <p14:creationId xmlns:p14="http://schemas.microsoft.com/office/powerpoint/2010/main" val="2004675813"/>
+      </p:ext>
+    </p:extLst>
+  </p:cSld>
+</p:sld>
+</file>
+
+<file path=ppt/slides/slide11.xml><?xml version="1.0" encoding="utf-8"?>
 <p:sld xmlns:p="http://schemas.openxmlformats.org/presentationml/2006/main">
   <p:cSld>
     <p:bg>
@@ -2258,7 +3960,7 @@
           <p:cNvPr id="14" name="accent-line">
             <a:extLst xmlns:a="http://schemas.openxmlformats.org/drawingml/2006/main">
               <a:ext uri="{FF2B5EF4-FFF2-40B4-BE49-F238E27FC236}">
-                <a16:creationId xmlns:a16="http://schemas.microsoft.com/office/drawing/2014/main" id="{2873ADA3-11AB-4873-BFA3-C7215D049DD1}"/>
+                <a16:creationId xmlns:a16="http://schemas.microsoft.com/office/drawing/2014/main" id="{83D9E3C9-BBD5-4F0D-9A29-EEFD8D79E29D}"/>
               </a:ext>
             </a:extLst>
           </p:cNvPr>
@@ -2291,7 +3993,7 @@
           <p:cNvPr id="2" name="chapter-label">
             <a:extLst xmlns:a="http://schemas.openxmlformats.org/drawingml/2006/main">
               <a:ext uri="{FF2B5EF4-FFF2-40B4-BE49-F238E27FC236}">
-                <a16:creationId xmlns:a16="http://schemas.microsoft.com/office/drawing/2014/main" id="{F787E6D5-C05D-48D0-A9EC-004A9EB32E8C}"/>
+                <a16:creationId xmlns:a16="http://schemas.microsoft.com/office/drawing/2014/main" id="{C18177D8-B73C-4D7E-8CDC-5807C964A445}"/>
               </a:ext>
             </a:extLst>
           </p:cNvPr>
@@ -2349,7 +4051,7 @@
           <p:cNvPr id="3" name="slide-number">
             <a:extLst xmlns:a="http://schemas.openxmlformats.org/drawingml/2006/main">
               <a:ext uri="{FF2B5EF4-FFF2-40B4-BE49-F238E27FC236}">
-                <a16:creationId xmlns:a16="http://schemas.microsoft.com/office/drawing/2014/main" id="{91E94CF3-C7BC-4781-9749-65D73C124973}"/>
+                <a16:creationId xmlns:a16="http://schemas.microsoft.com/office/drawing/2014/main" id="{F65A715C-A856-4267-9F49-0D1561569C15}"/>
               </a:ext>
             </a:extLst>
           </p:cNvPr>
@@ -2397,7 +4099,7 @@
                 <a:ea typeface="Helvetica Neue"/>
                 <a:cs typeface="Helvetica Neue"/>
               </a:rPr>
-              <a:t>10</a:t>
+              <a:t>11</a:t>
             </a:r>
           </a:p>
         </p:txBody>
@@ -2407,7 +4109,7 @@
           <p:cNvPr id="4" name="chapter-footer">
             <a:extLst xmlns:a="http://schemas.openxmlformats.org/drawingml/2006/main">
               <a:ext uri="{FF2B5EF4-FFF2-40B4-BE49-F238E27FC236}">
-                <a16:creationId xmlns:a16="http://schemas.microsoft.com/office/drawing/2014/main" id="{008A74AF-0DC5-47DF-82C8-8625EE86DD22}"/>
+                <a16:creationId xmlns:a16="http://schemas.microsoft.com/office/drawing/2014/main" id="{DCF66FC5-C11D-40D1-8F82-421E9554A5B8}"/>
               </a:ext>
             </a:extLst>
           </p:cNvPr>
@@ -2465,7 +4167,7 @@
           <p:cNvPr id="5" name="closing-title">
             <a:extLst xmlns:a="http://schemas.openxmlformats.org/drawingml/2006/main">
               <a:ext uri="{FF2B5EF4-FFF2-40B4-BE49-F238E27FC236}">
-                <a16:creationId xmlns:a16="http://schemas.microsoft.com/office/drawing/2014/main" id="{585C278F-BF49-47B6-976F-1FE4B9F4B9B8}"/>
+                <a16:creationId xmlns:a16="http://schemas.microsoft.com/office/drawing/2014/main" id="{000ED990-6207-4F58-B596-C0540819EB5D}"/>
               </a:ext>
             </a:extLst>
           </p:cNvPr>
@@ -2523,7 +4225,7 @@
           <p:cNvPr id="6" name="takeaway-number-1">
             <a:extLst xmlns:a="http://schemas.openxmlformats.org/drawingml/2006/main">
               <a:ext uri="{FF2B5EF4-FFF2-40B4-BE49-F238E27FC236}">
-                <a16:creationId xmlns:a16="http://schemas.microsoft.com/office/drawing/2014/main" id="{64A33A64-62F0-47E1-9ADC-F104FA8709C6}"/>
+                <a16:creationId xmlns:a16="http://schemas.microsoft.com/office/drawing/2014/main" id="{7DF7483B-9FA6-4096-8B7F-8CA7EA4DAB32}"/>
               </a:ext>
             </a:extLst>
           </p:cNvPr>
@@ -2581,7 +4283,7 @@
           <p:cNvPr id="7" name="takeaway-1">
             <a:extLst xmlns:a="http://schemas.openxmlformats.org/drawingml/2006/main">
               <a:ext uri="{FF2B5EF4-FFF2-40B4-BE49-F238E27FC236}">
-                <a16:creationId xmlns:a16="http://schemas.microsoft.com/office/drawing/2014/main" id="{829D6D7F-1B8D-4BD9-B751-28E8302C1948}"/>
+                <a16:creationId xmlns:a16="http://schemas.microsoft.com/office/drawing/2014/main" id="{1B47E2C6-D9FB-4603-BDB2-4682B7FDF2AE}"/>
               </a:ext>
             </a:extLst>
           </p:cNvPr>
@@ -2639,7 +4341,7 @@
           <p:cNvPr id="8" name="takeaway-number-2">
             <a:extLst xmlns:a="http://schemas.openxmlformats.org/drawingml/2006/main">
               <a:ext uri="{FF2B5EF4-FFF2-40B4-BE49-F238E27FC236}">
-                <a16:creationId xmlns:a16="http://schemas.microsoft.com/office/drawing/2014/main" id="{44DDDE34-E294-443A-8CE5-BB28C8FFF323}"/>
+                <a16:creationId xmlns:a16="http://schemas.microsoft.com/office/drawing/2014/main" id="{976EE22C-2D12-47B5-B49A-36B87188E8A5}"/>
               </a:ext>
             </a:extLst>
           </p:cNvPr>
@@ -2697,7 +4399,7 @@
           <p:cNvPr id="9" name="takeaway-2">
             <a:extLst xmlns:a="http://schemas.openxmlformats.org/drawingml/2006/main">
               <a:ext uri="{FF2B5EF4-FFF2-40B4-BE49-F238E27FC236}">
-                <a16:creationId xmlns:a16="http://schemas.microsoft.com/office/drawing/2014/main" id="{41F7B015-2D85-43AE-A40F-367D62BE77F7}"/>
+                <a16:creationId xmlns:a16="http://schemas.microsoft.com/office/drawing/2014/main" id="{9D2949AD-0776-4EC5-A2FA-0355EDA9DAF9}"/>
               </a:ext>
             </a:extLst>
           </p:cNvPr>
@@ -2755,7 +4457,7 @@
           <p:cNvPr id="10" name="takeaway-number-3">
             <a:extLst xmlns:a="http://schemas.openxmlformats.org/drawingml/2006/main">
               <a:ext uri="{FF2B5EF4-FFF2-40B4-BE49-F238E27FC236}">
-                <a16:creationId xmlns:a16="http://schemas.microsoft.com/office/drawing/2014/main" id="{F86706D7-0E42-4EB8-A059-DA4AA51B2BCE}"/>
+                <a16:creationId xmlns:a16="http://schemas.microsoft.com/office/drawing/2014/main" id="{60A6F4F9-5352-4522-92BE-B5039E8282DF}"/>
               </a:ext>
             </a:extLst>
           </p:cNvPr>
@@ -2813,7 +4515,7 @@
           <p:cNvPr id="11" name="takeaway-3">
             <a:extLst xmlns:a="http://schemas.openxmlformats.org/drawingml/2006/main">
               <a:ext uri="{FF2B5EF4-FFF2-40B4-BE49-F238E27FC236}">
-                <a16:creationId xmlns:a16="http://schemas.microsoft.com/office/drawing/2014/main" id="{F07C9BE9-A7CE-43E0-8D4E-05814BC9B67F}"/>
+                <a16:creationId xmlns:a16="http://schemas.microsoft.com/office/drawing/2014/main" id="{E5AC1623-4969-48FB-83F9-0A16D355576D}"/>
               </a:ext>
             </a:extLst>
           </p:cNvPr>
@@ -2871,7 +4573,7 @@
           <p:cNvPr id="12" name="takeaway-number-4">
             <a:extLst xmlns:a="http://schemas.openxmlformats.org/drawingml/2006/main">
               <a:ext uri="{FF2B5EF4-FFF2-40B4-BE49-F238E27FC236}">
-                <a16:creationId xmlns:a16="http://schemas.microsoft.com/office/drawing/2014/main" id="{CC4670FD-C4ED-4E39-89AA-CCAFD0E3F740}"/>
+                <a16:creationId xmlns:a16="http://schemas.microsoft.com/office/drawing/2014/main" id="{1DACA89F-8D21-438B-A887-9806DD94DCA1}"/>
               </a:ext>
             </a:extLst>
           </p:cNvPr>
@@ -2929,7 +4631,7 @@
           <p:cNvPr id="13" name="takeaway-4">
             <a:extLst xmlns:a="http://schemas.openxmlformats.org/drawingml/2006/main">
               <a:ext uri="{FF2B5EF4-FFF2-40B4-BE49-F238E27FC236}">
-                <a16:creationId xmlns:a16="http://schemas.microsoft.com/office/drawing/2014/main" id="{2173A532-FDFB-4245-9C6F-568A95E6A59F}"/>
+                <a16:creationId xmlns:a16="http://schemas.microsoft.com/office/drawing/2014/main" id="{B40140CE-7876-437E-84FD-4FA995F9F786}"/>
               </a:ext>
             </a:extLst>
           </p:cNvPr>
@@ -2985,7 +4687,556 @@
     </p:spTree>
     <p:extLst>
       <p:ext uri="{BB962C8B-B14F-4D97-AF65-F5344CB8AC3E}">
-        <p14:creationId xmlns:p14="http://schemas.microsoft.com/office/powerpoint/2010/main" val="1327855930"/>
+        <p14:creationId xmlns:p14="http://schemas.microsoft.com/office/powerpoint/2010/main" val="1650347961"/>
+      </p:ext>
+    </p:extLst>
+  </p:cSld>
+</p:sld>
+</file>
+
+<file path=ppt/slides/slide12.xml><?xml version="1.0" encoding="utf-8"?>
+<p:sld xmlns:p="http://schemas.openxmlformats.org/presentationml/2006/main">
+  <p:cSld>
+    <p:bg>
+      <p:bgPr>
+        <a:solidFill xmlns:a="http://schemas.openxmlformats.org/drawingml/2006/main">
+          <a:srgbClr val="FFFFFF"/>
+        </a:solidFill>
+      </p:bgPr>
+    </p:bg>
+    <p:spTree>
+      <p:nvGrpSpPr>
+        <p:cNvPr id="1" name=""/>
+        <p:cNvGrpSpPr/>
+        <p:nvPr/>
+      </p:nvGrpSpPr>
+      <p:grpSpPr>
+        <a:xfrm xmlns:a="http://schemas.openxmlformats.org/drawingml/2006/main"/>
+      </p:grpSpPr>
+      <p:sp>
+        <p:nvSpPr>
+          <p:cNvPr id="10" name="accent-line">
+            <a:extLst xmlns:a="http://schemas.openxmlformats.org/drawingml/2006/main">
+              <a:ext uri="{FF2B5EF4-FFF2-40B4-BE49-F238E27FC236}">
+                <a16:creationId xmlns:a16="http://schemas.microsoft.com/office/drawing/2014/main" id="{9E9A5857-DB50-4EBE-83CE-31D372EC9FD2}"/>
+              </a:ext>
+            </a:extLst>
+          </p:cNvPr>
+          <p:cNvSpPr>
+            <a:spLocks xmlns:a="http://schemas.openxmlformats.org/drawingml/2006/main" noGrp="1"/>
+          </p:cNvSpPr>
+          <p:nvPr/>
+        </p:nvSpPr>
+        <p:spPr>
+          <a:xfrm xmlns:a="http://schemas.openxmlformats.org/drawingml/2006/main">
+            <a:off x="390525" y="304800"/>
+            <a:ext cx="11410950" cy="66675"/>
+          </a:xfrm>
+          <a:prstGeom xmlns:a="http://schemas.openxmlformats.org/drawingml/2006/main" prst="rect">
+            <a:avLst/>
+          </a:prstGeom>
+          <a:solidFill xmlns:a="http://schemas.openxmlformats.org/drawingml/2006/main">
+            <a:srgbClr val="B9F15B"/>
+          </a:solidFill>
+          <a:ln xmlns:a="http://schemas.openxmlformats.org/drawingml/2006/main" w="0">
+            <a:solidFill>
+              <a:srgbClr val="B9F15B"/>
+            </a:solidFill>
+            <a:prstDash val="solid"/>
+          </a:ln>
+        </p:spPr>
+      </p:sp>
+      <p:sp>
+        <p:nvSpPr>
+          <p:cNvPr id="2" name="chapter-label">
+            <a:extLst xmlns:a="http://schemas.openxmlformats.org/drawingml/2006/main">
+              <a:ext uri="{FF2B5EF4-FFF2-40B4-BE49-F238E27FC236}">
+                <a16:creationId xmlns:a16="http://schemas.microsoft.com/office/drawing/2014/main" id="{2EC48DDA-78E5-48CD-921E-1CCF550656EC}"/>
+              </a:ext>
+            </a:extLst>
+          </p:cNvPr>
+          <p:cNvSpPr>
+            <a:spLocks xmlns:a="http://schemas.openxmlformats.org/drawingml/2006/main" noGrp="1"/>
+          </p:cNvSpPr>
+          <p:nvPr/>
+        </p:nvSpPr>
+        <p:spPr>
+          <a:xfrm xmlns:a="http://schemas.openxmlformats.org/drawingml/2006/main">
+            <a:off x="390525" y="466725"/>
+            <a:ext cx="4953000" cy="323850"/>
+          </a:xfrm>
+          <a:prstGeom xmlns:a="http://schemas.openxmlformats.org/drawingml/2006/main" prst="rect">
+            <a:avLst/>
+          </a:prstGeom>
+          <a:noFill xmlns:a="http://schemas.openxmlformats.org/drawingml/2006/main"/>
+          <a:ln xmlns:a="http://schemas.openxmlformats.org/drawingml/2006/main" w="0">
+            <a:noFill/>
+            <a:prstDash val="solid"/>
+          </a:ln>
+        </p:spPr>
+        <p:txBody>
+          <a:bodyPr xmlns:a="http://schemas.openxmlformats.org/drawingml/2006/main" anchor="t">
+            <a:noAutofit/>
+          </a:bodyPr>
+          <a:lstStyle xmlns:a="http://schemas.openxmlformats.org/drawingml/2006/main"/>
+          <a:p xmlns:a="http://schemas.openxmlformats.org/drawingml/2006/main">
+            <a:pPr algn="l">
+              <a:defRPr sz="1275" b="1">
+                <a:solidFill>
+                  <a:srgbClr val="5B5B57"/>
+                </a:solidFill>
+                <a:latin typeface="Helvetica Neue"/>
+                <a:ea typeface="Helvetica Neue"/>
+                <a:cs typeface="Helvetica Neue"/>
+              </a:defRPr>
+            </a:pPr>
+            <a:r>
+              <a:rPr sz="1275" b="1">
+                <a:solidFill>
+                  <a:srgbClr val="5B5B57"/>
+                </a:solidFill>
+                <a:latin typeface="Helvetica Neue"/>
+                <a:ea typeface="Helvetica Neue"/>
+                <a:cs typeface="Helvetica Neue"/>
+              </a:rPr>
+              <a:t>PRACTICE AND READING  /  02</a:t>
+            </a:r>
+          </a:p>
+        </p:txBody>
+      </p:sp>
+      <p:sp>
+        <p:nvSpPr>
+          <p:cNvPr id="3" name="slide-number">
+            <a:extLst xmlns:a="http://schemas.openxmlformats.org/drawingml/2006/main">
+              <a:ext uri="{FF2B5EF4-FFF2-40B4-BE49-F238E27FC236}">
+                <a16:creationId xmlns:a16="http://schemas.microsoft.com/office/drawing/2014/main" id="{36DE7ACE-4BD5-4862-9A8B-B6BF35FD78AC}"/>
+              </a:ext>
+            </a:extLst>
+          </p:cNvPr>
+          <p:cNvSpPr>
+            <a:spLocks xmlns:a="http://schemas.openxmlformats.org/drawingml/2006/main" noGrp="1"/>
+          </p:cNvSpPr>
+          <p:nvPr/>
+        </p:nvSpPr>
+        <p:spPr>
+          <a:xfrm xmlns:a="http://schemas.openxmlformats.org/drawingml/2006/main">
+            <a:off x="11049000" y="6286500"/>
+            <a:ext cx="742950" cy="266700"/>
+          </a:xfrm>
+          <a:prstGeom xmlns:a="http://schemas.openxmlformats.org/drawingml/2006/main" prst="rect">
+            <a:avLst/>
+          </a:prstGeom>
+          <a:noFill xmlns:a="http://schemas.openxmlformats.org/drawingml/2006/main"/>
+          <a:ln xmlns:a="http://schemas.openxmlformats.org/drawingml/2006/main" w="0">
+            <a:noFill/>
+            <a:prstDash val="solid"/>
+          </a:ln>
+        </p:spPr>
+        <p:txBody>
+          <a:bodyPr xmlns:a="http://schemas.openxmlformats.org/drawingml/2006/main" anchor="t">
+            <a:noAutofit/>
+          </a:bodyPr>
+          <a:lstStyle xmlns:a="http://schemas.openxmlformats.org/drawingml/2006/main"/>
+          <a:p xmlns:a="http://schemas.openxmlformats.org/drawingml/2006/main">
+            <a:pPr algn="r">
+              <a:defRPr sz="1200" b="0">
+                <a:solidFill>
+                  <a:srgbClr val="5B5B57"/>
+                </a:solidFill>
+                <a:latin typeface="Helvetica Neue"/>
+                <a:ea typeface="Helvetica Neue"/>
+                <a:cs typeface="Helvetica Neue"/>
+              </a:defRPr>
+            </a:pPr>
+            <a:r>
+              <a:rPr sz="1200" b="0">
+                <a:solidFill>
+                  <a:srgbClr val="5B5B57"/>
+                </a:solidFill>
+                <a:latin typeface="Helvetica Neue"/>
+                <a:ea typeface="Helvetica Neue"/>
+                <a:cs typeface="Helvetica Neue"/>
+              </a:rPr>
+              <a:t>12</a:t>
+            </a:r>
+          </a:p>
+        </p:txBody>
+      </p:sp>
+      <p:sp>
+        <p:nvSpPr>
+          <p:cNvPr id="4" name="chapter-footer">
+            <a:extLst xmlns:a="http://schemas.openxmlformats.org/drawingml/2006/main">
+              <a:ext uri="{FF2B5EF4-FFF2-40B4-BE49-F238E27FC236}">
+                <a16:creationId xmlns:a16="http://schemas.microsoft.com/office/drawing/2014/main" id="{A47AE563-BAA0-4BCC-9239-C3D720432A55}"/>
+              </a:ext>
+            </a:extLst>
+          </p:cNvPr>
+          <p:cNvSpPr>
+            <a:spLocks xmlns:a="http://schemas.openxmlformats.org/drawingml/2006/main" noGrp="1"/>
+          </p:cNvSpPr>
+          <p:nvPr/>
+        </p:nvSpPr>
+        <p:spPr>
+          <a:xfrm xmlns:a="http://schemas.openxmlformats.org/drawingml/2006/main">
+            <a:off x="390525" y="6286500"/>
+            <a:ext cx="8191500" cy="266700"/>
+          </a:xfrm>
+          <a:prstGeom xmlns:a="http://schemas.openxmlformats.org/drawingml/2006/main" prst="rect">
+            <a:avLst/>
+          </a:prstGeom>
+          <a:noFill xmlns:a="http://schemas.openxmlformats.org/drawingml/2006/main"/>
+          <a:ln xmlns:a="http://schemas.openxmlformats.org/drawingml/2006/main" w="0">
+            <a:noFill/>
+            <a:prstDash val="solid"/>
+          </a:ln>
+        </p:spPr>
+        <p:txBody>
+          <a:bodyPr xmlns:a="http://schemas.openxmlformats.org/drawingml/2006/main" anchor="t">
+            <a:noAutofit/>
+          </a:bodyPr>
+          <a:lstStyle xmlns:a="http://schemas.openxmlformats.org/drawingml/2006/main"/>
+          <a:p xmlns:a="http://schemas.openxmlformats.org/drawingml/2006/main">
+            <a:pPr algn="l">
+              <a:defRPr sz="1125" b="0">
+                <a:solidFill>
+                  <a:srgbClr val="5B5B57"/>
+                </a:solidFill>
+                <a:latin typeface="Helvetica Neue"/>
+                <a:ea typeface="Helvetica Neue"/>
+                <a:cs typeface="Helvetica Neue"/>
+              </a:defRPr>
+            </a:pPr>
+            <a:r>
+              <a:rPr sz="1125" b="0">
+                <a:solidFill>
+                  <a:srgbClr val="5B5B57"/>
+                </a:solidFill>
+                <a:latin typeface="Helvetica Neue"/>
+                <a:ea typeface="Helvetica Neue"/>
+                <a:cs typeface="Helvetica Neue"/>
+              </a:rPr>
+              <a:t>The LLM as a Reasoning Engine</a:t>
+            </a:r>
+          </a:p>
+        </p:txBody>
+      </p:sp>
+      <p:sp>
+        <p:nvSpPr>
+          <p:cNvPr id="5" name="practice-title">
+            <a:extLst xmlns:a="http://schemas.openxmlformats.org/drawingml/2006/main">
+              <a:ext uri="{FF2B5EF4-FFF2-40B4-BE49-F238E27FC236}">
+                <a16:creationId xmlns:a16="http://schemas.microsoft.com/office/drawing/2014/main" id="{8B32783B-4FA4-4A6D-9621-10C63819ED4D}"/>
+              </a:ext>
+            </a:extLst>
+          </p:cNvPr>
+          <p:cNvSpPr>
+            <a:spLocks xmlns:a="http://schemas.openxmlformats.org/drawingml/2006/main" noGrp="1"/>
+          </p:cNvSpPr>
+          <p:nvPr/>
+        </p:nvSpPr>
+        <p:spPr>
+          <a:xfrm xmlns:a="http://schemas.openxmlformats.org/drawingml/2006/main">
+            <a:off x="390525" y="1000125"/>
+            <a:ext cx="11144250" cy="666750"/>
+          </a:xfrm>
+          <a:prstGeom xmlns:a="http://schemas.openxmlformats.org/drawingml/2006/main" prst="rect">
+            <a:avLst/>
+          </a:prstGeom>
+          <a:noFill xmlns:a="http://schemas.openxmlformats.org/drawingml/2006/main"/>
+          <a:ln xmlns:a="http://schemas.openxmlformats.org/drawingml/2006/main" w="0">
+            <a:noFill/>
+            <a:prstDash val="solid"/>
+          </a:ln>
+        </p:spPr>
+        <p:txBody>
+          <a:bodyPr xmlns:a="http://schemas.openxmlformats.org/drawingml/2006/main" anchor="t">
+            <a:normAutofit fontScale="100000"/>
+          </a:bodyPr>
+          <a:lstStyle xmlns:a="http://schemas.openxmlformats.org/drawingml/2006/main"/>
+          <a:p xmlns:a="http://schemas.openxmlformats.org/drawingml/2006/main">
+            <a:pPr algn="l">
+              <a:defRPr sz="3000" b="1">
+                <a:solidFill>
+                  <a:srgbClr val="111111"/>
+                </a:solidFill>
+                <a:latin typeface="Helvetica Neue"/>
+                <a:ea typeface="Helvetica Neue"/>
+                <a:cs typeface="Helvetica Neue"/>
+              </a:defRPr>
+            </a:pPr>
+            <a:r>
+              <a:rPr sz="3000" b="1">
+                <a:solidFill>
+                  <a:srgbClr val="111111"/>
+                </a:solidFill>
+                <a:latin typeface="Helvetica Neue"/>
+                <a:ea typeface="Helvetica Neue"/>
+                <a:cs typeface="Helvetica Neue"/>
+              </a:rPr>
+              <a:t>Evidence to submit</a:t>
+            </a:r>
+          </a:p>
+        </p:txBody>
+      </p:sp>
+      <p:sp>
+        <p:nvSpPr>
+          <p:cNvPr id="6" name="practice-task">
+            <a:extLst xmlns:a="http://schemas.openxmlformats.org/drawingml/2006/main">
+              <a:ext uri="{FF2B5EF4-FFF2-40B4-BE49-F238E27FC236}">
+                <a16:creationId xmlns:a16="http://schemas.microsoft.com/office/drawing/2014/main" id="{16D090F6-AE2B-4954-B30C-9743F22DAA10}"/>
+              </a:ext>
+            </a:extLst>
+          </p:cNvPr>
+          <p:cNvSpPr>
+            <a:spLocks xmlns:a="http://schemas.openxmlformats.org/drawingml/2006/main" noGrp="1"/>
+          </p:cNvSpPr>
+          <p:nvPr/>
+        </p:nvSpPr>
+        <p:spPr>
+          <a:xfrm xmlns:a="http://schemas.openxmlformats.org/drawingml/2006/main">
+            <a:off x="390525" y="2000250"/>
+            <a:ext cx="10953750" cy="1238250"/>
+          </a:xfrm>
+          <a:prstGeom xmlns:a="http://schemas.openxmlformats.org/drawingml/2006/main" prst="rect">
+            <a:avLst/>
+          </a:prstGeom>
+          <a:noFill xmlns:a="http://schemas.openxmlformats.org/drawingml/2006/main"/>
+          <a:ln xmlns:a="http://schemas.openxmlformats.org/drawingml/2006/main" w="0">
+            <a:noFill/>
+            <a:prstDash val="solid"/>
+          </a:ln>
+        </p:spPr>
+        <p:txBody>
+          <a:bodyPr xmlns:a="http://schemas.openxmlformats.org/drawingml/2006/main" anchor="t">
+            <a:normAutofit fontScale="100000"/>
+          </a:bodyPr>
+          <a:lstStyle xmlns:a="http://schemas.openxmlformats.org/drawingml/2006/main"/>
+          <a:p xmlns:a="http://schemas.openxmlformats.org/drawingml/2006/main">
+            <a:pPr algn="l">
+              <a:defRPr sz="1950" b="0">
+                <a:solidFill>
+                  <a:srgbClr val="111111"/>
+                </a:solidFill>
+                <a:latin typeface="Helvetica Neue"/>
+                <a:ea typeface="Helvetica Neue"/>
+                <a:cs typeface="Helvetica Neue"/>
+              </a:defRPr>
+            </a:pPr>
+            <a:r>
+              <a:rPr sz="1950" b="0">
+                <a:solidFill>
+                  <a:srgbClr val="111111"/>
+                </a:solidFill>
+                <a:latin typeface="Helvetica Neue"/>
+                <a:ea typeface="Helvetica Neue"/>
+                <a:cs typeface="Helvetica Neue"/>
+              </a:rPr>
+              <a:t>Keep a factual task fixed and add one misleading cue. Predict whether the answer will change. Record both conditions and identify which check tests structure, evidence, or policy.</a:t>
+            </a:r>
+          </a:p>
+        </p:txBody>
+      </p:sp>
+      <p:sp>
+        <p:nvSpPr>
+          <p:cNvPr id="7" name="practice-check">
+            <a:extLst xmlns:a="http://schemas.openxmlformats.org/drawingml/2006/main">
+              <a:ext uri="{FF2B5EF4-FFF2-40B4-BE49-F238E27FC236}">
+                <a16:creationId xmlns:a16="http://schemas.microsoft.com/office/drawing/2014/main" id="{6C8D602E-1A40-4C1E-9510-C0D01462B9A0}"/>
+              </a:ext>
+            </a:extLst>
+          </p:cNvPr>
+          <p:cNvSpPr>
+            <a:spLocks xmlns:a="http://schemas.openxmlformats.org/drawingml/2006/main" noGrp="1"/>
+          </p:cNvSpPr>
+          <p:nvPr/>
+        </p:nvSpPr>
+        <p:spPr>
+          <a:xfrm xmlns:a="http://schemas.openxmlformats.org/drawingml/2006/main">
+            <a:off x="390525" y="3381375"/>
+            <a:ext cx="10953750" cy="1095375"/>
+          </a:xfrm>
+          <a:prstGeom xmlns:a="http://schemas.openxmlformats.org/drawingml/2006/main" prst="rect">
+            <a:avLst/>
+          </a:prstGeom>
+          <a:noFill xmlns:a="http://schemas.openxmlformats.org/drawingml/2006/main"/>
+          <a:ln xmlns:a="http://schemas.openxmlformats.org/drawingml/2006/main" w="0">
+            <a:noFill/>
+            <a:prstDash val="solid"/>
+          </a:ln>
+        </p:spPr>
+        <p:txBody>
+          <a:bodyPr xmlns:a="http://schemas.openxmlformats.org/drawingml/2006/main" anchor="t">
+            <a:normAutofit fontScale="100000"/>
+          </a:bodyPr>
+          <a:lstStyle xmlns:a="http://schemas.openxmlformats.org/drawingml/2006/main"/>
+          <a:p xmlns:a="http://schemas.openxmlformats.org/drawingml/2006/main">
+            <a:pPr algn="l">
+              <a:defRPr sz="1800" b="0">
+                <a:solidFill>
+                  <a:srgbClr val="5B5B57"/>
+                </a:solidFill>
+                <a:latin typeface="Helvetica Neue"/>
+                <a:ea typeface="Helvetica Neue"/>
+                <a:cs typeface="Helvetica Neue"/>
+              </a:defRPr>
+            </a:pPr>
+            <a:r>
+              <a:rPr sz="1800" b="0">
+                <a:solidFill>
+                  <a:srgbClr val="5B5B57"/>
+                </a:solidFill>
+                <a:latin typeface="Helvetica Neue"/>
+                <a:ea typeface="Helvetica Neue"/>
+                <a:cs typeface="Helvetica Neue"/>
+              </a:rPr>
+              <a:t>The submission contains paired inputs and a testable prediction. It does not treat verbal reasoning as ground truth.</a:t>
+            </a:r>
+          </a:p>
+        </p:txBody>
+      </p:sp>
+      <p:sp>
+        <p:nvSpPr>
+          <p:cNvPr id="8" name="practice-readings">
+            <a:extLst xmlns:a="http://schemas.openxmlformats.org/drawingml/2006/main">
+              <a:ext uri="{FF2B5EF4-FFF2-40B4-BE49-F238E27FC236}">
+                <a16:creationId xmlns:a16="http://schemas.microsoft.com/office/drawing/2014/main" id="{F71BAF86-10B3-4AD8-89AE-4613E48612B6}"/>
+              </a:ext>
+            </a:extLst>
+          </p:cNvPr>
+          <p:cNvSpPr>
+            <a:spLocks xmlns:a="http://schemas.openxmlformats.org/drawingml/2006/main" noGrp="1"/>
+          </p:cNvSpPr>
+          <p:nvPr/>
+        </p:nvSpPr>
+        <p:spPr>
+          <a:xfrm xmlns:a="http://schemas.openxmlformats.org/drawingml/2006/main">
+            <a:off x="390525" y="4667250"/>
+            <a:ext cx="10953750" cy="1000125"/>
+          </a:xfrm>
+          <a:prstGeom xmlns:a="http://schemas.openxmlformats.org/drawingml/2006/main" prst="rect">
+            <a:avLst/>
+          </a:prstGeom>
+          <a:noFill xmlns:a="http://schemas.openxmlformats.org/drawingml/2006/main"/>
+          <a:ln xmlns:a="http://schemas.openxmlformats.org/drawingml/2006/main" w="0">
+            <a:noFill/>
+            <a:prstDash val="solid"/>
+          </a:ln>
+        </p:spPr>
+        <p:txBody>
+          <a:bodyPr xmlns:a="http://schemas.openxmlformats.org/drawingml/2006/main" anchor="t">
+            <a:normAutofit fontScale="100000"/>
+          </a:bodyPr>
+          <a:lstStyle xmlns:a="http://schemas.openxmlformats.org/drawingml/2006/main"/>
+          <a:p xmlns:a="http://schemas.openxmlformats.org/drawingml/2006/main">
+            <a:pPr algn="l">
+              <a:defRPr sz="1425" b="0">
+                <a:solidFill>
+                  <a:srgbClr val="111111"/>
+                </a:solidFill>
+                <a:latin typeface="Helvetica Neue"/>
+                <a:ea typeface="Helvetica Neue"/>
+                <a:cs typeface="Helvetica Neue"/>
+              </a:defRPr>
+            </a:pPr>
+            <a:r>
+              <a:rPr sz="1425" b="0">
+                <a:solidFill>
+                  <a:srgbClr val="111111"/>
+                </a:solidFill>
+                <a:latin typeface="Helvetica Neue"/>
+                <a:ea typeface="Helvetica Neue"/>
+                <a:cs typeface="Helvetica Neue"/>
+              </a:rPr>
+              <a:t>P3  Would this change your answer?</a:t>
+            </a:r>
+          </a:p>
+          <a:p xmlns:a="http://schemas.openxmlformats.org/drawingml/2006/main">
+            <a:pPr algn="l">
+              <a:defRPr sz="1425" b="0">
+                <a:solidFill>
+                  <a:srgbClr val="111111"/>
+                </a:solidFill>
+                <a:latin typeface="Helvetica Neue"/>
+                <a:ea typeface="Helvetica Neue"/>
+                <a:cs typeface="Helvetica Neue"/>
+              </a:defRPr>
+            </a:pPr>
+            <a:r>
+              <a:rPr sz="1425" b="0">
+                <a:solidFill>
+                  <a:srgbClr val="111111"/>
+                </a:solidFill>
+                <a:latin typeface="Helvetica Neue"/>
+                <a:ea typeface="Helvetica Neue"/>
+                <a:cs typeface="Helvetica Neue"/>
+              </a:rPr>
+              <a:t>S4  Gemini structured outputs</a:t>
+            </a:r>
+          </a:p>
+        </p:txBody>
+      </p:sp>
+      <p:sp>
+        <p:nvSpPr>
+          <p:cNvPr id="9" name="practice-lab">
+            <a:extLst xmlns:a="http://schemas.openxmlformats.org/drawingml/2006/main">
+              <a:ext uri="{FF2B5EF4-FFF2-40B4-BE49-F238E27FC236}">
+                <a16:creationId xmlns:a16="http://schemas.microsoft.com/office/drawing/2014/main" id="{86A7D1FC-6908-4584-B217-33D1CA36AB1C}"/>
+              </a:ext>
+            </a:extLst>
+          </p:cNvPr>
+          <p:cNvSpPr>
+            <a:spLocks xmlns:a="http://schemas.openxmlformats.org/drawingml/2006/main" noGrp="1"/>
+          </p:cNvSpPr>
+          <p:nvPr/>
+        </p:nvSpPr>
+        <p:spPr>
+          <a:xfrm xmlns:a="http://schemas.openxmlformats.org/drawingml/2006/main">
+            <a:off x="390525" y="5857875"/>
+            <a:ext cx="10953750" cy="266700"/>
+          </a:xfrm>
+          <a:prstGeom xmlns:a="http://schemas.openxmlformats.org/drawingml/2006/main" prst="rect">
+            <a:avLst/>
+          </a:prstGeom>
+          <a:noFill xmlns:a="http://schemas.openxmlformats.org/drawingml/2006/main"/>
+          <a:ln xmlns:a="http://schemas.openxmlformats.org/drawingml/2006/main" w="0">
+            <a:noFill/>
+            <a:prstDash val="solid"/>
+          </a:ln>
+        </p:spPr>
+        <p:txBody>
+          <a:bodyPr xmlns:a="http://schemas.openxmlformats.org/drawingml/2006/main" anchor="t">
+            <a:normAutofit fontScale="90196"/>
+          </a:bodyPr>
+          <a:lstStyle xmlns:a="http://schemas.openxmlformats.org/drawingml/2006/main"/>
+          <a:p xmlns:a="http://schemas.openxmlformats.org/drawingml/2006/main">
+            <a:pPr algn="l">
+              <a:defRPr sz="1275" b="0">
+                <a:solidFill>
+                  <a:srgbClr val="5B5B57"/>
+                </a:solidFill>
+                <a:latin typeface="Helvetica Neue"/>
+                <a:ea typeface="Helvetica Neue"/>
+                <a:cs typeface="Helvetica Neue"/>
+              </a:defRPr>
+            </a:pPr>
+            <a:r>
+              <a:rPr sz="1275" b="0">
+                <a:solidFill>
+                  <a:srgbClr val="5B5B57"/>
+                </a:solidFill>
+                <a:latin typeface="Helvetica Neue"/>
+                <a:ea typeface="Helvetica Neue"/>
+                <a:cs typeface="Helvetica Neue"/>
+              </a:rPr>
+              <a:t>labs/07_agents_sdk_evaluation.ipynb</a:t>
+            </a:r>
+          </a:p>
+        </p:txBody>
+      </p:sp>
+    </p:spTree>
+    <p:extLst>
+      <p:ext uri="{BB962C8B-B14F-4D97-AF65-F5344CB8AC3E}">
+        <p14:creationId xmlns:p14="http://schemas.microsoft.com/office/powerpoint/2010/main" val="827896392"/>
       </p:ext>
     </p:extLst>
   </p:cSld>
@@ -3016,7 +5267,7 @@
           <p:cNvPr id="14" name="accent-line">
             <a:extLst xmlns:a="http://schemas.openxmlformats.org/drawingml/2006/main">
               <a:ext uri="{FF2B5EF4-FFF2-40B4-BE49-F238E27FC236}">
-                <a16:creationId xmlns:a16="http://schemas.microsoft.com/office/drawing/2014/main" id="{C367107A-D958-4853-8BFF-2260C5739BEA}"/>
+                <a16:creationId xmlns:a16="http://schemas.microsoft.com/office/drawing/2014/main" id="{239EED9D-9597-4833-AD61-3EF721F06B7C}"/>
               </a:ext>
             </a:extLst>
           </p:cNvPr>
@@ -3049,7 +5300,7 @@
           <p:cNvPr id="2" name="chapter-label">
             <a:extLst xmlns:a="http://schemas.openxmlformats.org/drawingml/2006/main">
               <a:ext uri="{FF2B5EF4-FFF2-40B4-BE49-F238E27FC236}">
-                <a16:creationId xmlns:a16="http://schemas.microsoft.com/office/drawing/2014/main" id="{0CF86894-68AC-40EC-8EAF-449A7CD41B6F}"/>
+                <a16:creationId xmlns:a16="http://schemas.microsoft.com/office/drawing/2014/main" id="{5A104C0F-AE0C-451C-996B-17FE7AC338FE}"/>
               </a:ext>
             </a:extLst>
           </p:cNvPr>
@@ -3107,7 +5358,7 @@
           <p:cNvPr id="3" name="slide-number">
             <a:extLst xmlns:a="http://schemas.openxmlformats.org/drawingml/2006/main">
               <a:ext uri="{FF2B5EF4-FFF2-40B4-BE49-F238E27FC236}">
-                <a16:creationId xmlns:a16="http://schemas.microsoft.com/office/drawing/2014/main" id="{CEC24DD9-8F4E-492A-88A0-45673B36BFCD}"/>
+                <a16:creationId xmlns:a16="http://schemas.microsoft.com/office/drawing/2014/main" id="{63D4A18E-5459-447B-8032-3D1D37D511D6}"/>
               </a:ext>
             </a:extLst>
           </p:cNvPr>
@@ -3165,7 +5416,7 @@
           <p:cNvPr id="4" name="chapter-footer">
             <a:extLst xmlns:a="http://schemas.openxmlformats.org/drawingml/2006/main">
               <a:ext uri="{FF2B5EF4-FFF2-40B4-BE49-F238E27FC236}">
-                <a16:creationId xmlns:a16="http://schemas.microsoft.com/office/drawing/2014/main" id="{E29D8235-A0C2-4D37-AAB9-96CC4A2AFE5B}"/>
+                <a16:creationId xmlns:a16="http://schemas.microsoft.com/office/drawing/2014/main" id="{4CCF5149-42D7-4D08-B9AC-A582D57CA165}"/>
               </a:ext>
             </a:extLst>
           </p:cNvPr>
@@ -3223,7 +5474,7 @@
           <p:cNvPr id="5" name="objectives-title">
             <a:extLst xmlns:a="http://schemas.openxmlformats.org/drawingml/2006/main">
               <a:ext uri="{FF2B5EF4-FFF2-40B4-BE49-F238E27FC236}">
-                <a16:creationId xmlns:a16="http://schemas.microsoft.com/office/drawing/2014/main" id="{DDBAE6AD-D949-4C86-B20D-DC6C96755CCC}"/>
+                <a16:creationId xmlns:a16="http://schemas.microsoft.com/office/drawing/2014/main" id="{30969D0F-4820-442B-9AA5-0BB2B9156C46}"/>
               </a:ext>
             </a:extLst>
           </p:cNvPr>
@@ -3281,7 +5532,7 @@
           <p:cNvPr id="6" name="objective-number-1">
             <a:extLst xmlns:a="http://schemas.openxmlformats.org/drawingml/2006/main">
               <a:ext uri="{FF2B5EF4-FFF2-40B4-BE49-F238E27FC236}">
-                <a16:creationId xmlns:a16="http://schemas.microsoft.com/office/drawing/2014/main" id="{E09F8BF6-DF8E-4391-AB05-BFB025F1E240}"/>
+                <a16:creationId xmlns:a16="http://schemas.microsoft.com/office/drawing/2014/main" id="{25C365CA-7F71-4E2B-A4CC-172698A1C436}"/>
               </a:ext>
             </a:extLst>
           </p:cNvPr>
@@ -3339,7 +5590,7 @@
           <p:cNvPr id="7" name="objective-1">
             <a:extLst xmlns:a="http://schemas.openxmlformats.org/drawingml/2006/main">
               <a:ext uri="{FF2B5EF4-FFF2-40B4-BE49-F238E27FC236}">
-                <a16:creationId xmlns:a16="http://schemas.microsoft.com/office/drawing/2014/main" id="{15A3E362-7F29-4386-88D3-A1384B86DD31}"/>
+                <a16:creationId xmlns:a16="http://schemas.microsoft.com/office/drawing/2014/main" id="{5764EB65-36B3-4DB5-86DC-3EE94BBB421F}"/>
               </a:ext>
             </a:extLst>
           </p:cNvPr>
@@ -3397,7 +5648,7 @@
           <p:cNvPr id="8" name="objective-number-2">
             <a:extLst xmlns:a="http://schemas.openxmlformats.org/drawingml/2006/main">
               <a:ext uri="{FF2B5EF4-FFF2-40B4-BE49-F238E27FC236}">
-                <a16:creationId xmlns:a16="http://schemas.microsoft.com/office/drawing/2014/main" id="{45D1E201-3D44-4395-98F3-4FB132134E80}"/>
+                <a16:creationId xmlns:a16="http://schemas.microsoft.com/office/drawing/2014/main" id="{8DE10B3C-B124-4EF6-B84D-3DE7C9F4218A}"/>
               </a:ext>
             </a:extLst>
           </p:cNvPr>
@@ -3455,7 +5706,7 @@
           <p:cNvPr id="9" name="objective-2">
             <a:extLst xmlns:a="http://schemas.openxmlformats.org/drawingml/2006/main">
               <a:ext uri="{FF2B5EF4-FFF2-40B4-BE49-F238E27FC236}">
-                <a16:creationId xmlns:a16="http://schemas.microsoft.com/office/drawing/2014/main" id="{A1943119-4103-4114-98E7-4B5BFD334860}"/>
+                <a16:creationId xmlns:a16="http://schemas.microsoft.com/office/drawing/2014/main" id="{84312398-185A-408C-8D5D-BD4BB911CE0F}"/>
               </a:ext>
             </a:extLst>
           </p:cNvPr>
@@ -3513,7 +5764,7 @@
           <p:cNvPr id="10" name="objective-number-3">
             <a:extLst xmlns:a="http://schemas.openxmlformats.org/drawingml/2006/main">
               <a:ext uri="{FF2B5EF4-FFF2-40B4-BE49-F238E27FC236}">
-                <a16:creationId xmlns:a16="http://schemas.microsoft.com/office/drawing/2014/main" id="{07C60076-0C8E-47AD-AC74-43A74F7B0064}"/>
+                <a16:creationId xmlns:a16="http://schemas.microsoft.com/office/drawing/2014/main" id="{33450F15-4C7A-42BB-BC6A-13F05736AF04}"/>
               </a:ext>
             </a:extLst>
           </p:cNvPr>
@@ -3571,7 +5822,7 @@
           <p:cNvPr id="11" name="objective-3">
             <a:extLst xmlns:a="http://schemas.openxmlformats.org/drawingml/2006/main">
               <a:ext uri="{FF2B5EF4-FFF2-40B4-BE49-F238E27FC236}">
-                <a16:creationId xmlns:a16="http://schemas.microsoft.com/office/drawing/2014/main" id="{6FF552B7-36F9-4191-BEB9-E1DCB9B933B9}"/>
+                <a16:creationId xmlns:a16="http://schemas.microsoft.com/office/drawing/2014/main" id="{6F7891FB-0B8D-478F-9E87-D5059D47E1C4}"/>
               </a:ext>
             </a:extLst>
           </p:cNvPr>
@@ -3629,7 +5880,7 @@
           <p:cNvPr id="12" name="objective-number-4">
             <a:extLst xmlns:a="http://schemas.openxmlformats.org/drawingml/2006/main">
               <a:ext uri="{FF2B5EF4-FFF2-40B4-BE49-F238E27FC236}">
-                <a16:creationId xmlns:a16="http://schemas.microsoft.com/office/drawing/2014/main" id="{20F2E876-CD96-47E3-8F54-BF55B6295431}"/>
+                <a16:creationId xmlns:a16="http://schemas.microsoft.com/office/drawing/2014/main" id="{156EEDB7-7DF6-4759-9BFC-AA3F6583680F}"/>
               </a:ext>
             </a:extLst>
           </p:cNvPr>
@@ -3687,7 +5938,7 @@
           <p:cNvPr id="13" name="objective-4">
             <a:extLst xmlns:a="http://schemas.openxmlformats.org/drawingml/2006/main">
               <a:ext uri="{FF2B5EF4-FFF2-40B4-BE49-F238E27FC236}">
-                <a16:creationId xmlns:a16="http://schemas.microsoft.com/office/drawing/2014/main" id="{1EE6CCEF-01B2-4456-BE0E-1542402DBC40}"/>
+                <a16:creationId xmlns:a16="http://schemas.microsoft.com/office/drawing/2014/main" id="{03E11D87-93A2-45D2-9595-91A33AB4D4AE}"/>
               </a:ext>
             </a:extLst>
           </p:cNvPr>
@@ -3743,7 +5994,7 @@
     </p:spTree>
     <p:extLst>
       <p:ext uri="{BB962C8B-B14F-4D97-AF65-F5344CB8AC3E}">
-        <p14:creationId xmlns:p14="http://schemas.microsoft.com/office/powerpoint/2010/main" val="1162215118"/>
+        <p14:creationId xmlns:p14="http://schemas.microsoft.com/office/powerpoint/2010/main" val="1155748800"/>
       </p:ext>
     </p:extLst>
   </p:cSld>
@@ -3774,7 +6025,7 @@
           <p:cNvPr id="9" name="accent-line">
             <a:extLst xmlns:a="http://schemas.openxmlformats.org/drawingml/2006/main">
               <a:ext uri="{FF2B5EF4-FFF2-40B4-BE49-F238E27FC236}">
-                <a16:creationId xmlns:a16="http://schemas.microsoft.com/office/drawing/2014/main" id="{FEBEB4BE-056C-45A5-B2A5-D0CDED1955B0}"/>
+                <a16:creationId xmlns:a16="http://schemas.microsoft.com/office/drawing/2014/main" id="{34663D5B-D4B3-4543-833A-F93FABCCE0E4}"/>
               </a:ext>
             </a:extLst>
           </p:cNvPr>
@@ -3807,7 +6058,7 @@
           <p:cNvPr id="2" name="chapter-label">
             <a:extLst xmlns:a="http://schemas.openxmlformats.org/drawingml/2006/main">
               <a:ext uri="{FF2B5EF4-FFF2-40B4-BE49-F238E27FC236}">
-                <a16:creationId xmlns:a16="http://schemas.microsoft.com/office/drawing/2014/main" id="{439EF739-9EBC-48D1-93B1-998E07697E3A}"/>
+                <a16:creationId xmlns:a16="http://schemas.microsoft.com/office/drawing/2014/main" id="{25FC4B30-CB3C-40EC-ACA7-27385B49D0FF}"/>
               </a:ext>
             </a:extLst>
           </p:cNvPr>
@@ -3865,7 +6116,7 @@
           <p:cNvPr id="3" name="slide-number">
             <a:extLst xmlns:a="http://schemas.openxmlformats.org/drawingml/2006/main">
               <a:ext uri="{FF2B5EF4-FFF2-40B4-BE49-F238E27FC236}">
-                <a16:creationId xmlns:a16="http://schemas.microsoft.com/office/drawing/2014/main" id="{F67FBD71-8C13-4078-B73F-A92EFBF596E9}"/>
+                <a16:creationId xmlns:a16="http://schemas.microsoft.com/office/drawing/2014/main" id="{0B18F89F-D4B3-42A3-98D4-D9C674A9B809}"/>
               </a:ext>
             </a:extLst>
           </p:cNvPr>
@@ -3923,7 +6174,7 @@
           <p:cNvPr id="4" name="chapter-footer">
             <a:extLst xmlns:a="http://schemas.openxmlformats.org/drawingml/2006/main">
               <a:ext uri="{FF2B5EF4-FFF2-40B4-BE49-F238E27FC236}">
-                <a16:creationId xmlns:a16="http://schemas.microsoft.com/office/drawing/2014/main" id="{E77AAA80-8130-4789-A080-A3301A79F38C}"/>
+                <a16:creationId xmlns:a16="http://schemas.microsoft.com/office/drawing/2014/main" id="{1088373E-D4E3-4FA7-A3B4-FA6173329B2C}"/>
               </a:ext>
             </a:extLst>
           </p:cNvPr>
@@ -3981,7 +6232,7 @@
           <p:cNvPr id="5" name="section-title">
             <a:extLst xmlns:a="http://schemas.openxmlformats.org/drawingml/2006/main">
               <a:ext uri="{FF2B5EF4-FFF2-40B4-BE49-F238E27FC236}">
-                <a16:creationId xmlns:a16="http://schemas.microsoft.com/office/drawing/2014/main" id="{04A537A4-C427-449D-A495-89BFD147E9BD}"/>
+                <a16:creationId xmlns:a16="http://schemas.microsoft.com/office/drawing/2014/main" id="{394DB5C4-3236-40FD-BEF6-D0C05794732C}"/>
               </a:ext>
             </a:extLst>
           </p:cNvPr>
@@ -4039,7 +6290,7 @@
           <p:cNvPr id="6" name="section-explanation">
             <a:extLst xmlns:a="http://schemas.openxmlformats.org/drawingml/2006/main">
               <a:ext uri="{FF2B5EF4-FFF2-40B4-BE49-F238E27FC236}">
-                <a16:creationId xmlns:a16="http://schemas.microsoft.com/office/drawing/2014/main" id="{B336CF14-A172-4AA2-87AB-1EE39CB3BB85}"/>
+                <a16:creationId xmlns:a16="http://schemas.microsoft.com/office/drawing/2014/main" id="{69DEB188-2CD5-4076-8FE0-343DD9432C61}"/>
               </a:ext>
             </a:extLst>
           </p:cNvPr>
@@ -4097,7 +6348,7 @@
           <p:cNvPr id="7" name="column-rule">
             <a:extLst xmlns:a="http://schemas.openxmlformats.org/drawingml/2006/main">
               <a:ext uri="{FF2B5EF4-FFF2-40B4-BE49-F238E27FC236}">
-                <a16:creationId xmlns:a16="http://schemas.microsoft.com/office/drawing/2014/main" id="{DB6D8DD1-E79D-4CAB-88F3-7A5DE7CDD563}"/>
+                <a16:creationId xmlns:a16="http://schemas.microsoft.com/office/drawing/2014/main" id="{B493CA12-EB76-4BC6-8CCB-28EB41F70110}"/>
               </a:ext>
             </a:extLst>
           </p:cNvPr>
@@ -4130,7 +6381,7 @@
           <p:cNvPr id="8" name="section-points">
             <a:extLst xmlns:a="http://schemas.openxmlformats.org/drawingml/2006/main">
               <a:ext uri="{FF2B5EF4-FFF2-40B4-BE49-F238E27FC236}">
-                <a16:creationId xmlns:a16="http://schemas.microsoft.com/office/drawing/2014/main" id="{AB7CB039-1A51-4AFB-A197-6906A98B60D7}"/>
+                <a16:creationId xmlns:a16="http://schemas.microsoft.com/office/drawing/2014/main" id="{F288852F-54E0-4D62-B7C9-A05902C9C474}"/>
               </a:ext>
             </a:extLst>
           </p:cNvPr>
@@ -4242,7 +6493,7 @@
     </p:spTree>
     <p:extLst>
       <p:ext uri="{BB962C8B-B14F-4D97-AF65-F5344CB8AC3E}">
-        <p14:creationId xmlns:p14="http://schemas.microsoft.com/office/powerpoint/2010/main" val="2094354675"/>
+        <p14:creationId xmlns:p14="http://schemas.microsoft.com/office/powerpoint/2010/main" val="620078522"/>
       </p:ext>
     </p:extLst>
   </p:cSld>
@@ -4273,7 +6524,7 @@
           <p:cNvPr id="13" name="accent-line">
             <a:extLst xmlns:a="http://schemas.openxmlformats.org/drawingml/2006/main">
               <a:ext uri="{FF2B5EF4-FFF2-40B4-BE49-F238E27FC236}">
-                <a16:creationId xmlns:a16="http://schemas.microsoft.com/office/drawing/2014/main" id="{8288404D-BB34-4E17-899D-0887721E7C8C}"/>
+                <a16:creationId xmlns:a16="http://schemas.microsoft.com/office/drawing/2014/main" id="{C2D1F0DE-9851-4EFA-A2DA-3F9CE0E9CED6}"/>
               </a:ext>
             </a:extLst>
           </p:cNvPr>
@@ -4306,7 +6557,7 @@
           <p:cNvPr id="2" name="chapter-label">
             <a:extLst xmlns:a="http://schemas.openxmlformats.org/drawingml/2006/main">
               <a:ext uri="{FF2B5EF4-FFF2-40B4-BE49-F238E27FC236}">
-                <a16:creationId xmlns:a16="http://schemas.microsoft.com/office/drawing/2014/main" id="{34492EB9-2851-4307-83C6-CDFB624C8A65}"/>
+                <a16:creationId xmlns:a16="http://schemas.microsoft.com/office/drawing/2014/main" id="{8C0EAE5F-FDA2-424A-B944-7EDC5E36DC9E}"/>
               </a:ext>
             </a:extLst>
           </p:cNvPr>
@@ -4364,7 +6615,7 @@
           <p:cNvPr id="3" name="slide-number">
             <a:extLst xmlns:a="http://schemas.openxmlformats.org/drawingml/2006/main">
               <a:ext uri="{FF2B5EF4-FFF2-40B4-BE49-F238E27FC236}">
-                <a16:creationId xmlns:a16="http://schemas.microsoft.com/office/drawing/2014/main" id="{901C9CE8-582B-467D-B84F-1A889E6C776C}"/>
+                <a16:creationId xmlns:a16="http://schemas.microsoft.com/office/drawing/2014/main" id="{91C0A1CE-0E21-4F54-BB30-9E3CAA488E58}"/>
               </a:ext>
             </a:extLst>
           </p:cNvPr>
@@ -4422,7 +6673,7 @@
           <p:cNvPr id="4" name="chapter-footer">
             <a:extLst xmlns:a="http://schemas.openxmlformats.org/drawingml/2006/main">
               <a:ext uri="{FF2B5EF4-FFF2-40B4-BE49-F238E27FC236}">
-                <a16:creationId xmlns:a16="http://schemas.microsoft.com/office/drawing/2014/main" id="{035A86F5-6111-41AA-A865-2A870719DADD}"/>
+                <a16:creationId xmlns:a16="http://schemas.microsoft.com/office/drawing/2014/main" id="{814A4776-A657-41BD-B4A5-3C0664E2BD19}"/>
               </a:ext>
             </a:extLst>
           </p:cNvPr>
@@ -4480,7 +6731,7 @@
           <p:cNvPr id="5" name="section-title">
             <a:extLst xmlns:a="http://schemas.openxmlformats.org/drawingml/2006/main">
               <a:ext uri="{FF2B5EF4-FFF2-40B4-BE49-F238E27FC236}">
-                <a16:creationId xmlns:a16="http://schemas.microsoft.com/office/drawing/2014/main" id="{3EF62816-CF3C-42C3-A435-FFEFA68D27CD}"/>
+                <a16:creationId xmlns:a16="http://schemas.microsoft.com/office/drawing/2014/main" id="{299ECF47-BDCF-424C-898E-565E604B6CBF}"/>
               </a:ext>
             </a:extLst>
           </p:cNvPr>
@@ -4538,7 +6789,7 @@
           <p:cNvPr id="6" name="section-explanation">
             <a:extLst xmlns:a="http://schemas.openxmlformats.org/drawingml/2006/main">
               <a:ext uri="{FF2B5EF4-FFF2-40B4-BE49-F238E27FC236}">
-                <a16:creationId xmlns:a16="http://schemas.microsoft.com/office/drawing/2014/main" id="{4D289D88-4735-4082-A6CF-EA37D87F2498}"/>
+                <a16:creationId xmlns:a16="http://schemas.microsoft.com/office/drawing/2014/main" id="{AA25EB55-F53C-42F1-8CC5-F0146915C8A2}"/>
               </a:ext>
             </a:extLst>
           </p:cNvPr>
@@ -4596,7 +6847,7 @@
           <p:cNvPr id="7" name="point-band-1">
             <a:extLst xmlns:a="http://schemas.openxmlformats.org/drawingml/2006/main">
               <a:ext uri="{FF2B5EF4-FFF2-40B4-BE49-F238E27FC236}">
-                <a16:creationId xmlns:a16="http://schemas.microsoft.com/office/drawing/2014/main" id="{7B55B0D8-B036-4BFE-9C0E-9762F397ACB3}"/>
+                <a16:creationId xmlns:a16="http://schemas.microsoft.com/office/drawing/2014/main" id="{0FD03A22-720B-4E8A-ABE6-FE38FE556528}"/>
               </a:ext>
             </a:extLst>
           </p:cNvPr>
@@ -4629,7 +6880,7 @@
           <p:cNvPr id="8" name="point-1">
             <a:extLst xmlns:a="http://schemas.openxmlformats.org/drawingml/2006/main">
               <a:ext uri="{FF2B5EF4-FFF2-40B4-BE49-F238E27FC236}">
-                <a16:creationId xmlns:a16="http://schemas.microsoft.com/office/drawing/2014/main" id="{35220CA4-8457-47AA-BFF9-4660594CF8B4}"/>
+                <a16:creationId xmlns:a16="http://schemas.microsoft.com/office/drawing/2014/main" id="{1836853F-F84D-4E8C-AC42-D6AD81236210}"/>
               </a:ext>
             </a:extLst>
           </p:cNvPr>
@@ -4687,7 +6938,7 @@
           <p:cNvPr id="9" name="point-band-2">
             <a:extLst xmlns:a="http://schemas.openxmlformats.org/drawingml/2006/main">
               <a:ext uri="{FF2B5EF4-FFF2-40B4-BE49-F238E27FC236}">
-                <a16:creationId xmlns:a16="http://schemas.microsoft.com/office/drawing/2014/main" id="{54995F31-21C8-4AA7-A1E4-D687DE9D8F7A}"/>
+                <a16:creationId xmlns:a16="http://schemas.microsoft.com/office/drawing/2014/main" id="{0F48AAD9-F51C-4B41-BEC5-BB27EAF7A433}"/>
               </a:ext>
             </a:extLst>
           </p:cNvPr>
@@ -4720,7 +6971,7 @@
           <p:cNvPr id="10" name="point-2">
             <a:extLst xmlns:a="http://schemas.openxmlformats.org/drawingml/2006/main">
               <a:ext uri="{FF2B5EF4-FFF2-40B4-BE49-F238E27FC236}">
-                <a16:creationId xmlns:a16="http://schemas.microsoft.com/office/drawing/2014/main" id="{A6C34FE1-92D8-46B4-86F7-D447A1CBECEB}"/>
+                <a16:creationId xmlns:a16="http://schemas.microsoft.com/office/drawing/2014/main" id="{DEFE35C0-4545-4EAB-BCF0-54A5BB74E51D}"/>
               </a:ext>
             </a:extLst>
           </p:cNvPr>
@@ -4778,7 +7029,7 @@
           <p:cNvPr id="11" name="point-band-3">
             <a:extLst xmlns:a="http://schemas.openxmlformats.org/drawingml/2006/main">
               <a:ext uri="{FF2B5EF4-FFF2-40B4-BE49-F238E27FC236}">
-                <a16:creationId xmlns:a16="http://schemas.microsoft.com/office/drawing/2014/main" id="{66018036-8BDE-4EA5-A1F7-26C5282C3EFF}"/>
+                <a16:creationId xmlns:a16="http://schemas.microsoft.com/office/drawing/2014/main" id="{DB614210-C778-4EEF-91A7-5E593F6697E4}"/>
               </a:ext>
             </a:extLst>
           </p:cNvPr>
@@ -4811,7 +7062,7 @@
           <p:cNvPr id="12" name="point-3">
             <a:extLst xmlns:a="http://schemas.openxmlformats.org/drawingml/2006/main">
               <a:ext uri="{FF2B5EF4-FFF2-40B4-BE49-F238E27FC236}">
-                <a16:creationId xmlns:a16="http://schemas.microsoft.com/office/drawing/2014/main" id="{D609FC02-B1F4-43F9-B02B-34B776D97425}"/>
+                <a16:creationId xmlns:a16="http://schemas.microsoft.com/office/drawing/2014/main" id="{17C5D6A1-4C9E-4067-95A8-5BD2B06AE8D4}"/>
               </a:ext>
             </a:extLst>
           </p:cNvPr>
@@ -4867,7 +7118,7 @@
     </p:spTree>
     <p:extLst>
       <p:ext uri="{BB962C8B-B14F-4D97-AF65-F5344CB8AC3E}">
-        <p14:creationId xmlns:p14="http://schemas.microsoft.com/office/powerpoint/2010/main" val="106494847"/>
+        <p14:creationId xmlns:p14="http://schemas.microsoft.com/office/powerpoint/2010/main" val="487796672"/>
       </p:ext>
     </p:extLst>
   </p:cSld>
@@ -4898,7 +7149,7 @@
           <p:cNvPr id="9" name="accent-line">
             <a:extLst xmlns:a="http://schemas.openxmlformats.org/drawingml/2006/main">
               <a:ext uri="{FF2B5EF4-FFF2-40B4-BE49-F238E27FC236}">
-                <a16:creationId xmlns:a16="http://schemas.microsoft.com/office/drawing/2014/main" id="{C6CEAA13-F80E-41F9-81BD-AAF96FD9F7E4}"/>
+                <a16:creationId xmlns:a16="http://schemas.microsoft.com/office/drawing/2014/main" id="{51B127C6-B448-420C-9C8F-032DB8446EEE}"/>
               </a:ext>
             </a:extLst>
           </p:cNvPr>
@@ -4931,7 +7182,7 @@
           <p:cNvPr id="2" name="chapter-label">
             <a:extLst xmlns:a="http://schemas.openxmlformats.org/drawingml/2006/main">
               <a:ext uri="{FF2B5EF4-FFF2-40B4-BE49-F238E27FC236}">
-                <a16:creationId xmlns:a16="http://schemas.microsoft.com/office/drawing/2014/main" id="{01A20983-D5F0-43F9-A84B-B17824DC83EC}"/>
+                <a16:creationId xmlns:a16="http://schemas.microsoft.com/office/drawing/2014/main" id="{F817FA0C-D8C2-4F42-A0FC-562233C1E6D8}"/>
               </a:ext>
             </a:extLst>
           </p:cNvPr>
@@ -4989,7 +7240,7 @@
           <p:cNvPr id="3" name="slide-number">
             <a:extLst xmlns:a="http://schemas.openxmlformats.org/drawingml/2006/main">
               <a:ext uri="{FF2B5EF4-FFF2-40B4-BE49-F238E27FC236}">
-                <a16:creationId xmlns:a16="http://schemas.microsoft.com/office/drawing/2014/main" id="{2B769FFF-AC15-4570-B340-4A6403E5BF6C}"/>
+                <a16:creationId xmlns:a16="http://schemas.microsoft.com/office/drawing/2014/main" id="{92CBF1CA-6301-4522-B828-3BF67A8CF9B1}"/>
               </a:ext>
             </a:extLst>
           </p:cNvPr>
@@ -5047,7 +7298,7 @@
           <p:cNvPr id="4" name="chapter-footer">
             <a:extLst xmlns:a="http://schemas.openxmlformats.org/drawingml/2006/main">
               <a:ext uri="{FF2B5EF4-FFF2-40B4-BE49-F238E27FC236}">
-                <a16:creationId xmlns:a16="http://schemas.microsoft.com/office/drawing/2014/main" id="{ED167F49-B286-4787-908B-86259D3ABC77}"/>
+                <a16:creationId xmlns:a16="http://schemas.microsoft.com/office/drawing/2014/main" id="{3CEEA469-BC91-4A63-8634-295AF2B54858}"/>
               </a:ext>
             </a:extLst>
           </p:cNvPr>
@@ -5105,7 +7356,7 @@
           <p:cNvPr id="5" name="section-title">
             <a:extLst xmlns:a="http://schemas.openxmlformats.org/drawingml/2006/main">
               <a:ext uri="{FF2B5EF4-FFF2-40B4-BE49-F238E27FC236}">
-                <a16:creationId xmlns:a16="http://schemas.microsoft.com/office/drawing/2014/main" id="{B2079E1A-D498-4802-B81A-5DDE014DF16C}"/>
+                <a16:creationId xmlns:a16="http://schemas.microsoft.com/office/drawing/2014/main" id="{68DB3741-84DD-480F-8920-BF8FBF3A076A}"/>
               </a:ext>
             </a:extLst>
           </p:cNvPr>
@@ -5163,7 +7414,7 @@
           <p:cNvPr id="6" name="section-explanation">
             <a:extLst xmlns:a="http://schemas.openxmlformats.org/drawingml/2006/main">
               <a:ext uri="{FF2B5EF4-FFF2-40B4-BE49-F238E27FC236}">
-                <a16:creationId xmlns:a16="http://schemas.microsoft.com/office/drawing/2014/main" id="{E6D02115-E4E7-4A79-942D-60B3BFA1D202}"/>
+                <a16:creationId xmlns:a16="http://schemas.microsoft.com/office/drawing/2014/main" id="{DBC8C1EB-9BF7-42BB-9482-38EAFC1D46F1}"/>
               </a:ext>
             </a:extLst>
           </p:cNvPr>
@@ -5221,7 +7472,7 @@
           <p:cNvPr id="7" name="column-rule">
             <a:extLst xmlns:a="http://schemas.openxmlformats.org/drawingml/2006/main">
               <a:ext uri="{FF2B5EF4-FFF2-40B4-BE49-F238E27FC236}">
-                <a16:creationId xmlns:a16="http://schemas.microsoft.com/office/drawing/2014/main" id="{F56B33EA-5BA8-4D89-BBB7-6CBEA618C85F}"/>
+                <a16:creationId xmlns:a16="http://schemas.microsoft.com/office/drawing/2014/main" id="{FA8B79D6-71D2-41AB-83FA-BF6D3FAB2394}"/>
               </a:ext>
             </a:extLst>
           </p:cNvPr>
@@ -5254,7 +7505,7 @@
           <p:cNvPr id="8" name="section-points">
             <a:extLst xmlns:a="http://schemas.openxmlformats.org/drawingml/2006/main">
               <a:ext uri="{FF2B5EF4-FFF2-40B4-BE49-F238E27FC236}">
-                <a16:creationId xmlns:a16="http://schemas.microsoft.com/office/drawing/2014/main" id="{8463EE2E-AFB4-4CAF-B402-C3937118DF92}"/>
+                <a16:creationId xmlns:a16="http://schemas.microsoft.com/office/drawing/2014/main" id="{A9AF2E8C-4093-4AEA-BD9F-A4D894B5D90B}"/>
               </a:ext>
             </a:extLst>
           </p:cNvPr>
@@ -5366,7 +7617,7 @@
     </p:spTree>
     <p:extLst>
       <p:ext uri="{BB962C8B-B14F-4D97-AF65-F5344CB8AC3E}">
-        <p14:creationId xmlns:p14="http://schemas.microsoft.com/office/powerpoint/2010/main" val="1263336802"/>
+        <p14:creationId xmlns:p14="http://schemas.microsoft.com/office/powerpoint/2010/main" val="231595093"/>
       </p:ext>
     </p:extLst>
   </p:cSld>
@@ -5397,7 +7648,7 @@
           <p:cNvPr id="15" name="accent-line">
             <a:extLst xmlns:a="http://schemas.openxmlformats.org/drawingml/2006/main">
               <a:ext uri="{FF2B5EF4-FFF2-40B4-BE49-F238E27FC236}">
-                <a16:creationId xmlns:a16="http://schemas.microsoft.com/office/drawing/2014/main" id="{4001D744-7CD7-43D8-A1C4-EC22FFC63CFA}"/>
+                <a16:creationId xmlns:a16="http://schemas.microsoft.com/office/drawing/2014/main" id="{95DEF73E-EB14-4F0F-8E9C-6CD1F570B0CF}"/>
               </a:ext>
             </a:extLst>
           </p:cNvPr>
@@ -5430,7 +7681,7 @@
           <p:cNvPr id="2" name="chapter-label">
             <a:extLst xmlns:a="http://schemas.openxmlformats.org/drawingml/2006/main">
               <a:ext uri="{FF2B5EF4-FFF2-40B4-BE49-F238E27FC236}">
-                <a16:creationId xmlns:a16="http://schemas.microsoft.com/office/drawing/2014/main" id="{26D95A08-F5C5-4924-AFB2-96CD9104B6EE}"/>
+                <a16:creationId xmlns:a16="http://schemas.microsoft.com/office/drawing/2014/main" id="{4F56B069-F4CB-48DE-B14B-A70E579B539A}"/>
               </a:ext>
             </a:extLst>
           </p:cNvPr>
@@ -5488,7 +7739,7 @@
           <p:cNvPr id="3" name="slide-number">
             <a:extLst xmlns:a="http://schemas.openxmlformats.org/drawingml/2006/main">
               <a:ext uri="{FF2B5EF4-FFF2-40B4-BE49-F238E27FC236}">
-                <a16:creationId xmlns:a16="http://schemas.microsoft.com/office/drawing/2014/main" id="{96FEC0F7-E3AB-4638-9FF2-96BAA70D91E7}"/>
+                <a16:creationId xmlns:a16="http://schemas.microsoft.com/office/drawing/2014/main" id="{30C80039-61C0-4983-8008-6E64DD13B3DE}"/>
               </a:ext>
             </a:extLst>
           </p:cNvPr>
@@ -5546,7 +7797,7 @@
           <p:cNvPr id="4" name="chapter-footer">
             <a:extLst xmlns:a="http://schemas.openxmlformats.org/drawingml/2006/main">
               <a:ext uri="{FF2B5EF4-FFF2-40B4-BE49-F238E27FC236}">
-                <a16:creationId xmlns:a16="http://schemas.microsoft.com/office/drawing/2014/main" id="{225131FD-D57C-4438-9B1C-AE83A28079F3}"/>
+                <a16:creationId xmlns:a16="http://schemas.microsoft.com/office/drawing/2014/main" id="{04868170-EFC8-4E1F-9777-6D262D1B5B7E}"/>
               </a:ext>
             </a:extLst>
           </p:cNvPr>
@@ -5604,7 +7855,7 @@
           <p:cNvPr id="5" name="section-title">
             <a:extLst xmlns:a="http://schemas.openxmlformats.org/drawingml/2006/main">
               <a:ext uri="{FF2B5EF4-FFF2-40B4-BE49-F238E27FC236}">
-                <a16:creationId xmlns:a16="http://schemas.microsoft.com/office/drawing/2014/main" id="{F3CB6D04-3B56-4FBC-95CA-5E114EEE605F}"/>
+                <a16:creationId xmlns:a16="http://schemas.microsoft.com/office/drawing/2014/main" id="{2B531F53-3451-4D46-AFA4-5882B283ACD6}"/>
               </a:ext>
             </a:extLst>
           </p:cNvPr>
@@ -5662,7 +7913,7 @@
           <p:cNvPr id="6" name="section-explanation">
             <a:extLst xmlns:a="http://schemas.openxmlformats.org/drawingml/2006/main">
               <a:ext uri="{FF2B5EF4-FFF2-40B4-BE49-F238E27FC236}">
-                <a16:creationId xmlns:a16="http://schemas.microsoft.com/office/drawing/2014/main" id="{DC6EA88B-5F92-47FC-9A08-128973F227E8}"/>
+                <a16:creationId xmlns:a16="http://schemas.microsoft.com/office/drawing/2014/main" id="{4E5483FC-C65C-4592-9A9F-1AFF30F0EEB5}"/>
               </a:ext>
             </a:extLst>
           </p:cNvPr>
@@ -5720,7 +7971,7 @@
           <p:cNvPr id="7" name="point-band-1">
             <a:extLst xmlns:a="http://schemas.openxmlformats.org/drawingml/2006/main">
               <a:ext uri="{FF2B5EF4-FFF2-40B4-BE49-F238E27FC236}">
-                <a16:creationId xmlns:a16="http://schemas.microsoft.com/office/drawing/2014/main" id="{B92B438E-989A-43B3-80C7-7C202BB94DBF}"/>
+                <a16:creationId xmlns:a16="http://schemas.microsoft.com/office/drawing/2014/main" id="{F307E364-55A7-4567-9883-BA5BF5920BC8}"/>
               </a:ext>
             </a:extLst>
           </p:cNvPr>
@@ -5753,7 +8004,7 @@
           <p:cNvPr id="8" name="point-1">
             <a:extLst xmlns:a="http://schemas.openxmlformats.org/drawingml/2006/main">
               <a:ext uri="{FF2B5EF4-FFF2-40B4-BE49-F238E27FC236}">
-                <a16:creationId xmlns:a16="http://schemas.microsoft.com/office/drawing/2014/main" id="{DDB027D2-0FB7-46AF-87A2-BD6540FF151A}"/>
+                <a16:creationId xmlns:a16="http://schemas.microsoft.com/office/drawing/2014/main" id="{85EDC8FF-5D4D-4330-8774-18266E3D557D}"/>
               </a:ext>
             </a:extLst>
           </p:cNvPr>
@@ -5801,7 +8052,7 @@
                 <a:ea typeface="Helvetica Neue"/>
                 <a:cs typeface="Helvetica Neue"/>
               </a:rPr>
-              <a:t>Use a single chain for ordinary multi-step reasoning.</a:t>
+              <a:t>Compare direct answers and reasoning prompts on the target task.</a:t>
             </a:r>
           </a:p>
         </p:txBody>
@@ -5811,7 +8062,7 @@
           <p:cNvPr id="9" name="point-band-2">
             <a:extLst xmlns:a="http://schemas.openxmlformats.org/drawingml/2006/main">
               <a:ext uri="{FF2B5EF4-FFF2-40B4-BE49-F238E27FC236}">
-                <a16:creationId xmlns:a16="http://schemas.microsoft.com/office/drawing/2014/main" id="{2A8AE083-D7D9-4C55-9E41-7BAFD8AC399F}"/>
+                <a16:creationId xmlns:a16="http://schemas.microsoft.com/office/drawing/2014/main" id="{0AB40ED1-3AB7-4474-8376-906ECB1B1D32}"/>
               </a:ext>
             </a:extLst>
           </p:cNvPr>
@@ -5844,7 +8095,7 @@
           <p:cNvPr id="10" name="point-2">
             <a:extLst xmlns:a="http://schemas.openxmlformats.org/drawingml/2006/main">
               <a:ext uri="{FF2B5EF4-FFF2-40B4-BE49-F238E27FC236}">
-                <a16:creationId xmlns:a16="http://schemas.microsoft.com/office/drawing/2014/main" id="{EC0B08A9-EDF1-4CB3-BE01-774F09C4BCB4}"/>
+                <a16:creationId xmlns:a16="http://schemas.microsoft.com/office/drawing/2014/main" id="{A37368BD-0E5C-4844-BEB6-685A766E353C}"/>
               </a:ext>
             </a:extLst>
           </p:cNvPr>
@@ -5892,7 +8143,7 @@
                 <a:ea typeface="Helvetica Neue"/>
                 <a:cs typeface="Helvetica Neue"/>
               </a:rPr>
-              <a:t>Use voting when a clear answer needs robustness.</a:t>
+              <a:t>Test voting against a baseline with a declared call budget.</a:t>
             </a:r>
           </a:p>
         </p:txBody>
@@ -5902,7 +8153,7 @@
           <p:cNvPr id="11" name="point-band-3">
             <a:extLst xmlns:a="http://schemas.openxmlformats.org/drawingml/2006/main">
               <a:ext uri="{FF2B5EF4-FFF2-40B4-BE49-F238E27FC236}">
-                <a16:creationId xmlns:a16="http://schemas.microsoft.com/office/drawing/2014/main" id="{C390FF00-78FC-49FF-BA4E-045BFB876074}"/>
+                <a16:creationId xmlns:a16="http://schemas.microsoft.com/office/drawing/2014/main" id="{88E21C17-5B5F-4B99-BAD2-163CE7471C91}"/>
               </a:ext>
             </a:extLst>
           </p:cNvPr>
@@ -5935,7 +8186,7 @@
           <p:cNvPr id="12" name="point-3">
             <a:extLst xmlns:a="http://schemas.openxmlformats.org/drawingml/2006/main">
               <a:ext uri="{FF2B5EF4-FFF2-40B4-BE49-F238E27FC236}">
-                <a16:creationId xmlns:a16="http://schemas.microsoft.com/office/drawing/2014/main" id="{FA881AA7-D55B-453E-B527-B0FDE6471C43}"/>
+                <a16:creationId xmlns:a16="http://schemas.microsoft.com/office/drawing/2014/main" id="{D8CC169A-937B-4748-B76D-2444EE44BA24}"/>
               </a:ext>
             </a:extLst>
           </p:cNvPr>
@@ -5993,7 +8244,7 @@
           <p:cNvPr id="13" name="point-band-4">
             <a:extLst xmlns:a="http://schemas.openxmlformats.org/drawingml/2006/main">
               <a:ext uri="{FF2B5EF4-FFF2-40B4-BE49-F238E27FC236}">
-                <a16:creationId xmlns:a16="http://schemas.microsoft.com/office/drawing/2014/main" id="{A98842A2-5DF1-4D60-BFD2-1D909FF31DBF}"/>
+                <a16:creationId xmlns:a16="http://schemas.microsoft.com/office/drawing/2014/main" id="{0173C08C-ADEE-4620-B1A7-E492D4BDA0D1}"/>
               </a:ext>
             </a:extLst>
           </p:cNvPr>
@@ -6026,7 +8277,7 @@
           <p:cNvPr id="14" name="point-4">
             <a:extLst xmlns:a="http://schemas.openxmlformats.org/drawingml/2006/main">
               <a:ext uri="{FF2B5EF4-FFF2-40B4-BE49-F238E27FC236}">
-                <a16:creationId xmlns:a16="http://schemas.microsoft.com/office/drawing/2014/main" id="{36792FA2-90B5-452C-A241-D778CB255FA4}"/>
+                <a16:creationId xmlns:a16="http://schemas.microsoft.com/office/drawing/2014/main" id="{C8BAD32D-BA14-41A2-A764-2B15F1117DD5}"/>
               </a:ext>
             </a:extLst>
           </p:cNvPr>
@@ -6082,7 +8333,7 @@
     </p:spTree>
     <p:extLst>
       <p:ext uri="{BB962C8B-B14F-4D97-AF65-F5344CB8AC3E}">
-        <p14:creationId xmlns:p14="http://schemas.microsoft.com/office/powerpoint/2010/main" val="2105635856"/>
+        <p14:creationId xmlns:p14="http://schemas.microsoft.com/office/powerpoint/2010/main" val="536784670"/>
       </p:ext>
     </p:extLst>
   </p:cSld>
@@ -6113,7 +8364,7 @@
           <p:cNvPr id="9" name="accent-line">
             <a:extLst xmlns:a="http://schemas.openxmlformats.org/drawingml/2006/main">
               <a:ext uri="{FF2B5EF4-FFF2-40B4-BE49-F238E27FC236}">
-                <a16:creationId xmlns:a16="http://schemas.microsoft.com/office/drawing/2014/main" id="{1CBA4390-FA65-4FDC-893F-B3AAED2A4BEC}"/>
+                <a16:creationId xmlns:a16="http://schemas.microsoft.com/office/drawing/2014/main" id="{E1680557-0E6A-4C77-A679-E245071E1B57}"/>
               </a:ext>
             </a:extLst>
           </p:cNvPr>
@@ -6146,7 +8397,7 @@
           <p:cNvPr id="2" name="chapter-label">
             <a:extLst xmlns:a="http://schemas.openxmlformats.org/drawingml/2006/main">
               <a:ext uri="{FF2B5EF4-FFF2-40B4-BE49-F238E27FC236}">
-                <a16:creationId xmlns:a16="http://schemas.microsoft.com/office/drawing/2014/main" id="{6180510A-218F-4DF0-A223-0079204FA09D}"/>
+                <a16:creationId xmlns:a16="http://schemas.microsoft.com/office/drawing/2014/main" id="{0204B9AB-F5B9-454E-8BB4-938E7A6D9C79}"/>
               </a:ext>
             </a:extLst>
           </p:cNvPr>
@@ -6204,7 +8455,7 @@
           <p:cNvPr id="3" name="slide-number">
             <a:extLst xmlns:a="http://schemas.openxmlformats.org/drawingml/2006/main">
               <a:ext uri="{FF2B5EF4-FFF2-40B4-BE49-F238E27FC236}">
-                <a16:creationId xmlns:a16="http://schemas.microsoft.com/office/drawing/2014/main" id="{1183CFFA-8949-4615-97AD-64D131030F63}"/>
+                <a16:creationId xmlns:a16="http://schemas.microsoft.com/office/drawing/2014/main" id="{87799626-6A79-45EA-AA00-3DFD597F15C5}"/>
               </a:ext>
             </a:extLst>
           </p:cNvPr>
@@ -6262,7 +8513,7 @@
           <p:cNvPr id="4" name="chapter-footer">
             <a:extLst xmlns:a="http://schemas.openxmlformats.org/drawingml/2006/main">
               <a:ext uri="{FF2B5EF4-FFF2-40B4-BE49-F238E27FC236}">
-                <a16:creationId xmlns:a16="http://schemas.microsoft.com/office/drawing/2014/main" id="{E198B19A-0E49-4847-8EEA-15FCC76D959F}"/>
+                <a16:creationId xmlns:a16="http://schemas.microsoft.com/office/drawing/2014/main" id="{C50AE8D4-607A-46BA-B8FB-E719CE044701}"/>
               </a:ext>
             </a:extLst>
           </p:cNvPr>
@@ -6320,7 +8571,7 @@
           <p:cNvPr id="5" name="section-title">
             <a:extLst xmlns:a="http://schemas.openxmlformats.org/drawingml/2006/main">
               <a:ext uri="{FF2B5EF4-FFF2-40B4-BE49-F238E27FC236}">
-                <a16:creationId xmlns:a16="http://schemas.microsoft.com/office/drawing/2014/main" id="{27662AE4-3AE3-450F-964D-FEFC75859493}"/>
+                <a16:creationId xmlns:a16="http://schemas.microsoft.com/office/drawing/2014/main" id="{2649FA02-1BC9-4D5E-B36B-98EF527116B9}"/>
               </a:ext>
             </a:extLst>
           </p:cNvPr>
@@ -6378,7 +8629,7 @@
           <p:cNvPr id="6" name="section-explanation">
             <a:extLst xmlns:a="http://schemas.openxmlformats.org/drawingml/2006/main">
               <a:ext uri="{FF2B5EF4-FFF2-40B4-BE49-F238E27FC236}">
-                <a16:creationId xmlns:a16="http://schemas.microsoft.com/office/drawing/2014/main" id="{9F268471-B039-4531-8CBA-D492BA490249}"/>
+                <a16:creationId xmlns:a16="http://schemas.microsoft.com/office/drawing/2014/main" id="{7AD61C04-0A89-4507-86CB-F650FA30DB05}"/>
               </a:ext>
             </a:extLst>
           </p:cNvPr>
@@ -6426,7 +8677,7 @@
                 <a:ea typeface="Helvetica Neue"/>
                 <a:cs typeface="Helvetica Neue"/>
               </a:rPr>
-              <a:t>Free-form prose is difficult for a runtime to execute safely. Instructed JSON is brittle; constrained decoding enforces a grammar; native function calling produces provider-enforced structured calls. The runtime must still validate and authorize arguments.</a:t>
+              <a:t>Structured-output support varies by provider, model, and schema. Native function calling supplies a protocol for tool requests. The application must validate arguments, check policy, and handle invalid or incomplete responses.</a:t>
             </a:r>
           </a:p>
         </p:txBody>
@@ -6436,7 +8687,7 @@
           <p:cNvPr id="7" name="column-rule">
             <a:extLst xmlns:a="http://schemas.openxmlformats.org/drawingml/2006/main">
               <a:ext uri="{FF2B5EF4-FFF2-40B4-BE49-F238E27FC236}">
-                <a16:creationId xmlns:a16="http://schemas.microsoft.com/office/drawing/2014/main" id="{BADDF771-877E-4288-9B37-5A3730260EFA}"/>
+                <a16:creationId xmlns:a16="http://schemas.microsoft.com/office/drawing/2014/main" id="{D7504A9B-1F99-4787-9D50-BE5DBE0F3F75}"/>
               </a:ext>
             </a:extLst>
           </p:cNvPr>
@@ -6469,7 +8720,7 @@
           <p:cNvPr id="8" name="section-points">
             <a:extLst xmlns:a="http://schemas.openxmlformats.org/drawingml/2006/main">
               <a:ext uri="{FF2B5EF4-FFF2-40B4-BE49-F238E27FC236}">
-                <a16:creationId xmlns:a16="http://schemas.microsoft.com/office/drawing/2014/main" id="{A23469E9-1045-4A2A-A5E9-2706FEFB6C3D}"/>
+                <a16:creationId xmlns:a16="http://schemas.microsoft.com/office/drawing/2014/main" id="{1F151A5F-A27A-4A14-B8BF-8C77B90523C7}"/>
               </a:ext>
             </a:extLst>
           </p:cNvPr>
@@ -6581,7 +8832,7 @@
     </p:spTree>
     <p:extLst>
       <p:ext uri="{BB962C8B-B14F-4D97-AF65-F5344CB8AC3E}">
-        <p14:creationId xmlns:p14="http://schemas.microsoft.com/office/powerpoint/2010/main" val="310898551"/>
+        <p14:creationId xmlns:p14="http://schemas.microsoft.com/office/powerpoint/2010/main" val="1297229246"/>
       </p:ext>
     </p:extLst>
   </p:cSld>
@@ -6612,7 +8863,7 @@
           <p:cNvPr id="15" name="accent-line">
             <a:extLst xmlns:a="http://schemas.openxmlformats.org/drawingml/2006/main">
               <a:ext uri="{FF2B5EF4-FFF2-40B4-BE49-F238E27FC236}">
-                <a16:creationId xmlns:a16="http://schemas.microsoft.com/office/drawing/2014/main" id="{2252B410-61B2-4876-B7DF-2D895BC366ED}"/>
+                <a16:creationId xmlns:a16="http://schemas.microsoft.com/office/drawing/2014/main" id="{A5601924-5F95-45D9-B37E-6BBE01C55FF8}"/>
               </a:ext>
             </a:extLst>
           </p:cNvPr>
@@ -6645,7 +8896,7 @@
           <p:cNvPr id="2" name="chapter-label">
             <a:extLst xmlns:a="http://schemas.openxmlformats.org/drawingml/2006/main">
               <a:ext uri="{FF2B5EF4-FFF2-40B4-BE49-F238E27FC236}">
-                <a16:creationId xmlns:a16="http://schemas.microsoft.com/office/drawing/2014/main" id="{E43A8FC4-3389-43A5-B95E-18FD1B55D4B1}"/>
+                <a16:creationId xmlns:a16="http://schemas.microsoft.com/office/drawing/2014/main" id="{9DC16095-7AE8-4B4C-9D68-EFA354C68E85}"/>
               </a:ext>
             </a:extLst>
           </p:cNvPr>
@@ -6703,7 +8954,7 @@
           <p:cNvPr id="3" name="slide-number">
             <a:extLst xmlns:a="http://schemas.openxmlformats.org/drawingml/2006/main">
               <a:ext uri="{FF2B5EF4-FFF2-40B4-BE49-F238E27FC236}">
-                <a16:creationId xmlns:a16="http://schemas.microsoft.com/office/drawing/2014/main" id="{6D4AE82C-14B2-4648-B19D-56207026E9DF}"/>
+                <a16:creationId xmlns:a16="http://schemas.microsoft.com/office/drawing/2014/main" id="{56B12450-E50B-466C-ABD9-7A44A077137B}"/>
               </a:ext>
             </a:extLst>
           </p:cNvPr>
@@ -6761,7 +9012,7 @@
           <p:cNvPr id="4" name="chapter-footer">
             <a:extLst xmlns:a="http://schemas.openxmlformats.org/drawingml/2006/main">
               <a:ext uri="{FF2B5EF4-FFF2-40B4-BE49-F238E27FC236}">
-                <a16:creationId xmlns:a16="http://schemas.microsoft.com/office/drawing/2014/main" id="{916C500A-6A43-4F7E-88E2-05DD8F9C3B1D}"/>
+                <a16:creationId xmlns:a16="http://schemas.microsoft.com/office/drawing/2014/main" id="{637C6121-1AB5-452F-B57A-4E5B2803E888}"/>
               </a:ext>
             </a:extLst>
           </p:cNvPr>
@@ -6819,7 +9070,7 @@
           <p:cNvPr id="5" name="section-title">
             <a:extLst xmlns:a="http://schemas.openxmlformats.org/drawingml/2006/main">
               <a:ext uri="{FF2B5EF4-FFF2-40B4-BE49-F238E27FC236}">
-                <a16:creationId xmlns:a16="http://schemas.microsoft.com/office/drawing/2014/main" id="{3A2B75E7-F67D-46FB-8D98-32CC468CDE93}"/>
+                <a16:creationId xmlns:a16="http://schemas.microsoft.com/office/drawing/2014/main" id="{8688AFEF-34D4-4369-8BFC-94FBB72DE133}"/>
               </a:ext>
             </a:extLst>
           </p:cNvPr>
@@ -6877,7 +9128,7 @@
           <p:cNvPr id="6" name="section-explanation">
             <a:extLst xmlns:a="http://schemas.openxmlformats.org/drawingml/2006/main">
               <a:ext uri="{FF2B5EF4-FFF2-40B4-BE49-F238E27FC236}">
-                <a16:creationId xmlns:a16="http://schemas.microsoft.com/office/drawing/2014/main" id="{9662E621-12AB-40DD-BAE0-2F535D107AE4}"/>
+                <a16:creationId xmlns:a16="http://schemas.microsoft.com/office/drawing/2014/main" id="{DE3F431E-7AE2-4913-91B1-6D5D77DB53BA}"/>
               </a:ext>
             </a:extLst>
           </p:cNvPr>
@@ -6935,7 +9186,7 @@
           <p:cNvPr id="7" name="point-band-1">
             <a:extLst xmlns:a="http://schemas.openxmlformats.org/drawingml/2006/main">
               <a:ext uri="{FF2B5EF4-FFF2-40B4-BE49-F238E27FC236}">
-                <a16:creationId xmlns:a16="http://schemas.microsoft.com/office/drawing/2014/main" id="{C71C94EA-FF24-4184-8FE6-A5D4C5A7A471}"/>
+                <a16:creationId xmlns:a16="http://schemas.microsoft.com/office/drawing/2014/main" id="{192FB680-0F41-421E-A0C5-2A2EC7443099}"/>
               </a:ext>
             </a:extLst>
           </p:cNvPr>
@@ -6968,7 +9219,7 @@
           <p:cNvPr id="8" name="point-1">
             <a:extLst xmlns:a="http://schemas.openxmlformats.org/drawingml/2006/main">
               <a:ext uri="{FF2B5EF4-FFF2-40B4-BE49-F238E27FC236}">
-                <a16:creationId xmlns:a16="http://schemas.microsoft.com/office/drawing/2014/main" id="{CE2F1298-D6D9-47A5-8B10-3F1086EE588A}"/>
+                <a16:creationId xmlns:a16="http://schemas.microsoft.com/office/drawing/2014/main" id="{EE767FA6-4874-42F8-816B-630C3480EADB}"/>
               </a:ext>
             </a:extLst>
           </p:cNvPr>
@@ -7026,7 +9277,7 @@
           <p:cNvPr id="9" name="point-band-2">
             <a:extLst xmlns:a="http://schemas.openxmlformats.org/drawingml/2006/main">
               <a:ext uri="{FF2B5EF4-FFF2-40B4-BE49-F238E27FC236}">
-                <a16:creationId xmlns:a16="http://schemas.microsoft.com/office/drawing/2014/main" id="{8565156E-A8F3-45FE-A2D6-AC3071E8A176}"/>
+                <a16:creationId xmlns:a16="http://schemas.microsoft.com/office/drawing/2014/main" id="{0CDC1546-7536-45C6-B191-D37B968BB8B5}"/>
               </a:ext>
             </a:extLst>
           </p:cNvPr>
@@ -7059,7 +9310,7 @@
           <p:cNvPr id="10" name="point-2">
             <a:extLst xmlns:a="http://schemas.openxmlformats.org/drawingml/2006/main">
               <a:ext uri="{FF2B5EF4-FFF2-40B4-BE49-F238E27FC236}">
-                <a16:creationId xmlns:a16="http://schemas.microsoft.com/office/drawing/2014/main" id="{9F779F5E-FFC0-4027-A820-86E6AF7B6C09}"/>
+                <a16:creationId xmlns:a16="http://schemas.microsoft.com/office/drawing/2014/main" id="{D9731CAB-7ABB-45D8-9BF4-FC77F2213704}"/>
               </a:ext>
             </a:extLst>
           </p:cNvPr>
@@ -7117,7 +9368,7 @@
           <p:cNvPr id="11" name="point-band-3">
             <a:extLst xmlns:a="http://schemas.openxmlformats.org/drawingml/2006/main">
               <a:ext uri="{FF2B5EF4-FFF2-40B4-BE49-F238E27FC236}">
-                <a16:creationId xmlns:a16="http://schemas.microsoft.com/office/drawing/2014/main" id="{805BE8A7-5C35-4F93-BAAE-039EFA3F7A17}"/>
+                <a16:creationId xmlns:a16="http://schemas.microsoft.com/office/drawing/2014/main" id="{F487AF37-10A1-4B27-AA4A-59DFD2486FFF}"/>
               </a:ext>
             </a:extLst>
           </p:cNvPr>
@@ -7150,7 +9401,7 @@
           <p:cNvPr id="12" name="point-3">
             <a:extLst xmlns:a="http://schemas.openxmlformats.org/drawingml/2006/main">
               <a:ext uri="{FF2B5EF4-FFF2-40B4-BE49-F238E27FC236}">
-                <a16:creationId xmlns:a16="http://schemas.microsoft.com/office/drawing/2014/main" id="{15259C78-43CA-43A2-9DA8-30323847229A}"/>
+                <a16:creationId xmlns:a16="http://schemas.microsoft.com/office/drawing/2014/main" id="{07D04ECD-CABB-4631-A582-4149716441D7}"/>
               </a:ext>
             </a:extLst>
           </p:cNvPr>
@@ -7208,7 +9459,7 @@
           <p:cNvPr id="13" name="point-band-4">
             <a:extLst xmlns:a="http://schemas.openxmlformats.org/drawingml/2006/main">
               <a:ext uri="{FF2B5EF4-FFF2-40B4-BE49-F238E27FC236}">
-                <a16:creationId xmlns:a16="http://schemas.microsoft.com/office/drawing/2014/main" id="{C72AC4AD-5555-489E-AF0F-F2D65C621624}"/>
+                <a16:creationId xmlns:a16="http://schemas.microsoft.com/office/drawing/2014/main" id="{352682A0-45C9-4509-BB54-1164E8443C13}"/>
               </a:ext>
             </a:extLst>
           </p:cNvPr>
@@ -7241,7 +9492,7 @@
           <p:cNvPr id="14" name="point-4">
             <a:extLst xmlns:a="http://schemas.openxmlformats.org/drawingml/2006/main">
               <a:ext uri="{FF2B5EF4-FFF2-40B4-BE49-F238E27FC236}">
-                <a16:creationId xmlns:a16="http://schemas.microsoft.com/office/drawing/2014/main" id="{0C750F5B-2187-4BE5-825D-FC31BFC1B6B7}"/>
+                <a16:creationId xmlns:a16="http://schemas.microsoft.com/office/drawing/2014/main" id="{441A325E-9B26-4CEE-8C4C-E96571CBF33D}"/>
               </a:ext>
             </a:extLst>
           </p:cNvPr>
@@ -7297,7 +9548,7 @@
     </p:spTree>
     <p:extLst>
       <p:ext uri="{BB962C8B-B14F-4D97-AF65-F5344CB8AC3E}">
-        <p14:creationId xmlns:p14="http://schemas.microsoft.com/office/powerpoint/2010/main" val="1853374722"/>
+        <p14:creationId xmlns:p14="http://schemas.microsoft.com/office/powerpoint/2010/main" val="1303524669"/>
       </p:ext>
     </p:extLst>
   </p:cSld>
@@ -7325,10 +9576,10 @@
       </p:grpSpPr>
       <p:sp>
         <p:nvSpPr>
-          <p:cNvPr id="18" name="accent-line">
-            <a:extLst xmlns:a="http://schemas.openxmlformats.org/drawingml/2006/main">
-              <a:ext uri="{FF2B5EF4-FFF2-40B4-BE49-F238E27FC236}">
-                <a16:creationId xmlns:a16="http://schemas.microsoft.com/office/drawing/2014/main" id="{B5516661-2777-4A0F-8A67-BD13B2AFBA7E}"/>
+          <p:cNvPr id="9" name="accent-line">
+            <a:extLst xmlns:a="http://schemas.openxmlformats.org/drawingml/2006/main">
+              <a:ext uri="{FF2B5EF4-FFF2-40B4-BE49-F238E27FC236}">
+                <a16:creationId xmlns:a16="http://schemas.microsoft.com/office/drawing/2014/main" id="{3AE4F542-E395-425D-9A03-1D2C85303488}"/>
               </a:ext>
             </a:extLst>
           </p:cNvPr>
@@ -7361,7 +9612,7 @@
           <p:cNvPr id="2" name="chapter-label">
             <a:extLst xmlns:a="http://schemas.openxmlformats.org/drawingml/2006/main">
               <a:ext uri="{FF2B5EF4-FFF2-40B4-BE49-F238E27FC236}">
-                <a16:creationId xmlns:a16="http://schemas.microsoft.com/office/drawing/2014/main" id="{129362DA-E140-4DD4-B392-501E2731C50E}"/>
+                <a16:creationId xmlns:a16="http://schemas.microsoft.com/office/drawing/2014/main" id="{FB8F8D6B-84F6-4BB1-BB9B-604F59233DDE}"/>
               </a:ext>
             </a:extLst>
           </p:cNvPr>
@@ -7409,7 +9660,7 @@
                 <a:ea typeface="Helvetica Neue"/>
                 <a:cs typeface="Helvetica Neue"/>
               </a:rPr>
-              <a:t>EXAM CHECK  /  02</a:t>
+              <a:t>CORE IDEA 07  /  02</a:t>
             </a:r>
           </a:p>
         </p:txBody>
@@ -7419,7 +9670,7 @@
           <p:cNvPr id="3" name="slide-number">
             <a:extLst xmlns:a="http://schemas.openxmlformats.org/drawingml/2006/main">
               <a:ext uri="{FF2B5EF4-FFF2-40B4-BE49-F238E27FC236}">
-                <a16:creationId xmlns:a16="http://schemas.microsoft.com/office/drawing/2014/main" id="{B5B05F39-5742-4E21-AD6C-ABCD65DA0903}"/>
+                <a16:creationId xmlns:a16="http://schemas.microsoft.com/office/drawing/2014/main" id="{D707F8F3-EC76-41DF-8CFC-59998DBEF118}"/>
               </a:ext>
             </a:extLst>
           </p:cNvPr>
@@ -7477,7 +9728,7 @@
           <p:cNvPr id="4" name="chapter-footer">
             <a:extLst xmlns:a="http://schemas.openxmlformats.org/drawingml/2006/main">
               <a:ext uri="{FF2B5EF4-FFF2-40B4-BE49-F238E27FC236}">
-                <a16:creationId xmlns:a16="http://schemas.microsoft.com/office/drawing/2014/main" id="{40FF4803-25C2-4432-A1B5-E83ECD62415B}"/>
+                <a16:creationId xmlns:a16="http://schemas.microsoft.com/office/drawing/2014/main" id="{1559E342-6B64-4D84-B0D8-BF9718741EE9}"/>
               </a:ext>
             </a:extLst>
           </p:cNvPr>
@@ -7532,138 +9783,22 @@
       </p:sp>
       <p:sp>
         <p:nvSpPr>
-          <p:cNvPr id="5" name="exam-title">
-            <a:extLst xmlns:a="http://schemas.openxmlformats.org/drawingml/2006/main">
-              <a:ext uri="{FF2B5EF4-FFF2-40B4-BE49-F238E27FC236}">
-                <a16:creationId xmlns:a16="http://schemas.microsoft.com/office/drawing/2014/main" id="{70379F70-EBB5-40A3-B3D2-5E76DBBA4575}"/>
-              </a:ext>
-            </a:extLst>
-          </p:cNvPr>
-          <p:cNvSpPr>
-            <a:spLocks xmlns:a="http://schemas.openxmlformats.org/drawingml/2006/main" noGrp="1"/>
-          </p:cNvSpPr>
-          <p:nvPr/>
-        </p:nvSpPr>
-        <p:spPr>
-          <a:xfrm xmlns:a="http://schemas.openxmlformats.org/drawingml/2006/main">
-            <a:off x="390525" y="981075"/>
-            <a:ext cx="10668000" cy="781050"/>
-          </a:xfrm>
-          <a:prstGeom xmlns:a="http://schemas.openxmlformats.org/drawingml/2006/main" prst="rect">
-            <a:avLst/>
-          </a:prstGeom>
-          <a:noFill xmlns:a="http://schemas.openxmlformats.org/drawingml/2006/main"/>
-          <a:ln xmlns:a="http://schemas.openxmlformats.org/drawingml/2006/main" w="0">
-            <a:noFill/>
-            <a:prstDash val="solid"/>
-          </a:ln>
-        </p:spPr>
-        <p:txBody>
-          <a:bodyPr xmlns:a="http://schemas.openxmlformats.org/drawingml/2006/main" anchor="t">
-            <a:noAutofit/>
-          </a:bodyPr>
-          <a:lstStyle xmlns:a="http://schemas.openxmlformats.org/drawingml/2006/main"/>
-          <a:p xmlns:a="http://schemas.openxmlformats.org/drawingml/2006/main">
-            <a:pPr algn="l">
-              <a:defRPr sz="3150" b="1">
-                <a:solidFill>
-                  <a:srgbClr val="111111"/>
-                </a:solidFill>
-                <a:latin typeface="Helvetica Neue"/>
-                <a:ea typeface="Helvetica Neue"/>
-                <a:cs typeface="Helvetica Neue"/>
-              </a:defRPr>
-            </a:pPr>
-            <a:r>
-              <a:rPr sz="3150" b="1">
-                <a:solidFill>
-                  <a:srgbClr val="111111"/>
-                </a:solidFill>
-                <a:latin typeface="Helvetica Neue"/>
-                <a:ea typeface="Helvetica Neue"/>
-                <a:cs typeface="Helvetica Neue"/>
-              </a:rPr>
-              <a:t>Can you answer these without notes?</a:t>
-            </a:r>
-          </a:p>
-        </p:txBody>
-      </p:sp>
-      <p:sp>
-        <p:nvSpPr>
-          <p:cNvPr id="6" name="exam-number-1">
-            <a:extLst xmlns:a="http://schemas.openxmlformats.org/drawingml/2006/main">
-              <a:ext uri="{FF2B5EF4-FFF2-40B4-BE49-F238E27FC236}">
-                <a16:creationId xmlns:a16="http://schemas.microsoft.com/office/drawing/2014/main" id="{A53DC136-3660-493A-B2AD-C498059689E5}"/>
-              </a:ext>
-            </a:extLst>
-          </p:cNvPr>
-          <p:cNvSpPr>
-            <a:spLocks xmlns:a="http://schemas.openxmlformats.org/drawingml/2006/main" noGrp="1"/>
-          </p:cNvSpPr>
-          <p:nvPr/>
-        </p:nvSpPr>
-        <p:spPr>
-          <a:xfrm xmlns:a="http://schemas.openxmlformats.org/drawingml/2006/main">
-            <a:off x="390525" y="2238375"/>
-            <a:ext cx="590550" cy="400050"/>
-          </a:xfrm>
-          <a:prstGeom xmlns:a="http://schemas.openxmlformats.org/drawingml/2006/main" prst="rect">
-            <a:avLst/>
-          </a:prstGeom>
-          <a:noFill xmlns:a="http://schemas.openxmlformats.org/drawingml/2006/main"/>
-          <a:ln xmlns:a="http://schemas.openxmlformats.org/drawingml/2006/main" w="0">
-            <a:noFill/>
-            <a:prstDash val="solid"/>
-          </a:ln>
-        </p:spPr>
-        <p:txBody>
-          <a:bodyPr xmlns:a="http://schemas.openxmlformats.org/drawingml/2006/main" anchor="t">
-            <a:noAutofit/>
-          </a:bodyPr>
-          <a:lstStyle xmlns:a="http://schemas.openxmlformats.org/drawingml/2006/main"/>
-          <a:p xmlns:a="http://schemas.openxmlformats.org/drawingml/2006/main">
-            <a:pPr algn="l">
-              <a:defRPr sz="1725" b="1">
-                <a:solidFill>
-                  <a:srgbClr val="B9F15B"/>
-                </a:solidFill>
-                <a:latin typeface="Helvetica Neue"/>
-                <a:ea typeface="Helvetica Neue"/>
-                <a:cs typeface="Helvetica Neue"/>
-              </a:defRPr>
-            </a:pPr>
-            <a:r>
-              <a:rPr sz="1725" b="1">
-                <a:solidFill>
-                  <a:srgbClr val="B9F15B"/>
-                </a:solidFill>
-                <a:latin typeface="Helvetica Neue"/>
-                <a:ea typeface="Helvetica Neue"/>
-                <a:cs typeface="Helvetica Neue"/>
-              </a:rPr>
-              <a:t>01</a:t>
-            </a:r>
-          </a:p>
-        </p:txBody>
-      </p:sp>
-      <p:sp>
-        <p:nvSpPr>
-          <p:cNvPr id="7" name="exam-question-1">
-            <a:extLst xmlns:a="http://schemas.openxmlformats.org/drawingml/2006/main">
-              <a:ext uri="{FF2B5EF4-FFF2-40B4-BE49-F238E27FC236}">
-                <a16:creationId xmlns:a16="http://schemas.microsoft.com/office/drawing/2014/main" id="{048EECA7-3D27-4EFE-83F6-89EB00A24177}"/>
-              </a:ext>
-            </a:extLst>
-          </p:cNvPr>
-          <p:cNvSpPr>
-            <a:spLocks xmlns:a="http://schemas.openxmlformats.org/drawingml/2006/main" noGrp="1"/>
-          </p:cNvSpPr>
-          <p:nvPr/>
-        </p:nvSpPr>
-        <p:spPr>
-          <a:xfrm xmlns:a="http://schemas.openxmlformats.org/drawingml/2006/main">
-            <a:off x="1076325" y="2238375"/>
-            <a:ext cx="4762500" cy="895350"/>
+          <p:cNvPr id="5" name="section-title">
+            <a:extLst xmlns:a="http://schemas.openxmlformats.org/drawingml/2006/main">
+              <a:ext uri="{FF2B5EF4-FFF2-40B4-BE49-F238E27FC236}">
+                <a16:creationId xmlns:a16="http://schemas.microsoft.com/office/drawing/2014/main" id="{06CEC2BA-3BD7-468F-AF36-0CB0E321C0BF}"/>
+              </a:ext>
+            </a:extLst>
+          </p:cNvPr>
+          <p:cNvSpPr>
+            <a:spLocks xmlns:a="http://schemas.openxmlformats.org/drawingml/2006/main" noGrp="1"/>
+          </p:cNvSpPr>
+          <p:nvPr/>
+        </p:nvSpPr>
+        <p:spPr>
+          <a:xfrm xmlns:a="http://schemas.openxmlformats.org/drawingml/2006/main">
+            <a:off x="390525" y="971550"/>
+            <a:ext cx="11144250" cy="971550"/>
           </a:xfrm>
           <a:prstGeom xmlns:a="http://schemas.openxmlformats.org/drawingml/2006/main" prst="rect">
             <a:avLst/>
@@ -7681,105 +9816,47 @@
           <a:lstStyle xmlns:a="http://schemas.openxmlformats.org/drawingml/2006/main"/>
           <a:p xmlns:a="http://schemas.openxmlformats.org/drawingml/2006/main">
             <a:pPr algn="l">
-              <a:defRPr sz="1575" b="1">
-                <a:solidFill>
-                  <a:srgbClr val="111111"/>
-                </a:solidFill>
-                <a:latin typeface="Helvetica Neue"/>
-                <a:ea typeface="Helvetica Neue"/>
-                <a:cs typeface="Helvetica Neue"/>
-              </a:defRPr>
-            </a:pPr>
-            <a:r>
-              <a:rPr sz="1575" b="1">
-                <a:solidFill>
-                  <a:srgbClr val="111111"/>
-                </a:solidFill>
-                <a:latin typeface="Helvetica Neue"/>
-                <a:ea typeface="Helvetica Neue"/>
-                <a:cs typeface="Helvetica Neue"/>
-              </a:rPr>
-              <a:t>How do temperature and top-p affect an agent loop?</a:t>
-            </a:r>
-          </a:p>
-        </p:txBody>
-      </p:sp>
-      <p:sp>
-        <p:nvSpPr>
-          <p:cNvPr id="8" name="exam-number-2">
-            <a:extLst xmlns:a="http://schemas.openxmlformats.org/drawingml/2006/main">
-              <a:ext uri="{FF2B5EF4-FFF2-40B4-BE49-F238E27FC236}">
-                <a16:creationId xmlns:a16="http://schemas.microsoft.com/office/drawing/2014/main" id="{3ACCF07C-C02F-40DD-94DE-7E89F181162B}"/>
-              </a:ext>
-            </a:extLst>
-          </p:cNvPr>
-          <p:cNvSpPr>
-            <a:spLocks xmlns:a="http://schemas.openxmlformats.org/drawingml/2006/main" noGrp="1"/>
-          </p:cNvSpPr>
-          <p:nvPr/>
-        </p:nvSpPr>
-        <p:spPr>
-          <a:xfrm xmlns:a="http://schemas.openxmlformats.org/drawingml/2006/main">
-            <a:off x="6191250" y="2238375"/>
-            <a:ext cx="590550" cy="400050"/>
-          </a:xfrm>
-          <a:prstGeom xmlns:a="http://schemas.openxmlformats.org/drawingml/2006/main" prst="rect">
-            <a:avLst/>
-          </a:prstGeom>
-          <a:noFill xmlns:a="http://schemas.openxmlformats.org/drawingml/2006/main"/>
-          <a:ln xmlns:a="http://schemas.openxmlformats.org/drawingml/2006/main" w="0">
-            <a:noFill/>
-            <a:prstDash val="solid"/>
-          </a:ln>
-        </p:spPr>
-        <p:txBody>
-          <a:bodyPr xmlns:a="http://schemas.openxmlformats.org/drawingml/2006/main" anchor="t">
-            <a:noAutofit/>
-          </a:bodyPr>
-          <a:lstStyle xmlns:a="http://schemas.openxmlformats.org/drawingml/2006/main"/>
-          <a:p xmlns:a="http://schemas.openxmlformats.org/drawingml/2006/main">
-            <a:pPr algn="l">
-              <a:defRPr sz="1725" b="1">
-                <a:solidFill>
-                  <a:srgbClr val="B9F15B"/>
-                </a:solidFill>
-                <a:latin typeface="Helvetica Neue"/>
-                <a:ea typeface="Helvetica Neue"/>
-                <a:cs typeface="Helvetica Neue"/>
-              </a:defRPr>
-            </a:pPr>
-            <a:r>
-              <a:rPr sz="1725" b="1">
-                <a:solidFill>
-                  <a:srgbClr val="B9F15B"/>
-                </a:solidFill>
-                <a:latin typeface="Helvetica Neue"/>
-                <a:ea typeface="Helvetica Neue"/>
-                <a:cs typeface="Helvetica Neue"/>
-              </a:rPr>
-              <a:t>02</a:t>
-            </a:r>
-          </a:p>
-        </p:txBody>
-      </p:sp>
-      <p:sp>
-        <p:nvSpPr>
-          <p:cNvPr id="9" name="exam-question-2">
-            <a:extLst xmlns:a="http://schemas.openxmlformats.org/drawingml/2006/main">
-              <a:ext uri="{FF2B5EF4-FFF2-40B4-BE49-F238E27FC236}">
-                <a16:creationId xmlns:a16="http://schemas.microsoft.com/office/drawing/2014/main" id="{DC377884-3AA2-4D62-A905-45D7B2A6CAA9}"/>
-              </a:ext>
-            </a:extLst>
-          </p:cNvPr>
-          <p:cNvSpPr>
-            <a:spLocks xmlns:a="http://schemas.openxmlformats.org/drawingml/2006/main" noGrp="1"/>
-          </p:cNvSpPr>
-          <p:nvPr/>
-        </p:nvSpPr>
-        <p:spPr>
-          <a:xfrm xmlns:a="http://schemas.openxmlformats.org/drawingml/2006/main">
-            <a:off x="6877050" y="2238375"/>
-            <a:ext cx="4762500" cy="895350"/>
+              <a:defRPr sz="3000" b="1">
+                <a:solidFill>
+                  <a:srgbClr val="111111"/>
+                </a:solidFill>
+                <a:latin typeface="Helvetica Neue"/>
+                <a:ea typeface="Helvetica Neue"/>
+                <a:cs typeface="Helvetica Neue"/>
+              </a:defRPr>
+            </a:pPr>
+            <a:r>
+              <a:rPr sz="3000" b="1">
+                <a:solidFill>
+                  <a:srgbClr val="111111"/>
+                </a:solidFill>
+                <a:latin typeface="Helvetica Neue"/>
+                <a:ea typeface="Helvetica Neue"/>
+                <a:cs typeface="Helvetica Neue"/>
+              </a:rPr>
+              <a:t>Behavioral claims need an external check</a:t>
+            </a:r>
+          </a:p>
+        </p:txBody>
+      </p:sp>
+      <p:sp>
+        <p:nvSpPr>
+          <p:cNvPr id="6" name="section-explanation">
+            <a:extLst xmlns:a="http://schemas.openxmlformats.org/drawingml/2006/main">
+              <a:ext uri="{FF2B5EF4-FFF2-40B4-BE49-F238E27FC236}">
+                <a16:creationId xmlns:a16="http://schemas.microsoft.com/office/drawing/2014/main" id="{56788BDD-AEDA-4578-B358-B724DBC559F6}"/>
+              </a:ext>
+            </a:extLst>
+          </p:cNvPr>
+          <p:cNvSpPr>
+            <a:spLocks xmlns:a="http://schemas.openxmlformats.org/drawingml/2006/main" noGrp="1"/>
+          </p:cNvSpPr>
+          <p:nvPr/>
+        </p:nvSpPr>
+        <p:spPr>
+          <a:xfrm xmlns:a="http://schemas.openxmlformats.org/drawingml/2006/main">
+            <a:off x="390525" y="2381250"/>
+            <a:ext cx="4524375" cy="2905125"/>
           </a:xfrm>
           <a:prstGeom xmlns:a="http://schemas.openxmlformats.org/drawingml/2006/main" prst="rect">
             <a:avLst/>
@@ -7797,105 +9874,80 @@
           <a:lstStyle xmlns:a="http://schemas.openxmlformats.org/drawingml/2006/main"/>
           <a:p xmlns:a="http://schemas.openxmlformats.org/drawingml/2006/main">
             <a:pPr algn="l">
-              <a:defRPr sz="1575" b="1">
-                <a:solidFill>
-                  <a:srgbClr val="111111"/>
-                </a:solidFill>
-                <a:latin typeface="Helvetica Neue"/>
-                <a:ea typeface="Helvetica Neue"/>
-                <a:cs typeface="Helvetica Neue"/>
-              </a:defRPr>
-            </a:pPr>
-            <a:r>
-              <a:rPr sz="1575" b="1">
-                <a:solidFill>
-                  <a:srgbClr val="111111"/>
-                </a:solidFill>
-                <a:latin typeface="Helvetica Neue"/>
-                <a:ea typeface="Helvetica Neue"/>
-                <a:cs typeface="Helvetica Neue"/>
-              </a:rPr>
-              <a:t>What competes for space in the context window?</a:t>
-            </a:r>
-          </a:p>
-        </p:txBody>
-      </p:sp>
-      <p:sp>
-        <p:nvSpPr>
-          <p:cNvPr id="10" name="exam-number-3">
-            <a:extLst xmlns:a="http://schemas.openxmlformats.org/drawingml/2006/main">
-              <a:ext uri="{FF2B5EF4-FFF2-40B4-BE49-F238E27FC236}">
-                <a16:creationId xmlns:a16="http://schemas.microsoft.com/office/drawing/2014/main" id="{025BF838-AA14-401F-B0B3-EB97391835B3}"/>
-              </a:ext>
-            </a:extLst>
-          </p:cNvPr>
-          <p:cNvSpPr>
-            <a:spLocks xmlns:a="http://schemas.openxmlformats.org/drawingml/2006/main" noGrp="1"/>
-          </p:cNvSpPr>
-          <p:nvPr/>
-        </p:nvSpPr>
-        <p:spPr>
-          <a:xfrm xmlns:a="http://schemas.openxmlformats.org/drawingml/2006/main">
-            <a:off x="390525" y="3495675"/>
-            <a:ext cx="590550" cy="400050"/>
-          </a:xfrm>
-          <a:prstGeom xmlns:a="http://schemas.openxmlformats.org/drawingml/2006/main" prst="rect">
-            <a:avLst/>
-          </a:prstGeom>
-          <a:noFill xmlns:a="http://schemas.openxmlformats.org/drawingml/2006/main"/>
-          <a:ln xmlns:a="http://schemas.openxmlformats.org/drawingml/2006/main" w="0">
-            <a:noFill/>
-            <a:prstDash val="solid"/>
-          </a:ln>
-        </p:spPr>
-        <p:txBody>
-          <a:bodyPr xmlns:a="http://schemas.openxmlformats.org/drawingml/2006/main" anchor="t">
-            <a:noAutofit/>
-          </a:bodyPr>
-          <a:lstStyle xmlns:a="http://schemas.openxmlformats.org/drawingml/2006/main"/>
-          <a:p xmlns:a="http://schemas.openxmlformats.org/drawingml/2006/main">
-            <a:pPr algn="l">
-              <a:defRPr sz="1725" b="1">
-                <a:solidFill>
-                  <a:srgbClr val="B9F15B"/>
-                </a:solidFill>
-                <a:latin typeface="Helvetica Neue"/>
-                <a:ea typeface="Helvetica Neue"/>
-                <a:cs typeface="Helvetica Neue"/>
-              </a:defRPr>
-            </a:pPr>
-            <a:r>
-              <a:rPr sz="1725" b="1">
-                <a:solidFill>
-                  <a:srgbClr val="B9F15B"/>
-                </a:solidFill>
-                <a:latin typeface="Helvetica Neue"/>
-                <a:ea typeface="Helvetica Neue"/>
-                <a:cs typeface="Helvetica Neue"/>
-              </a:rPr>
-              <a:t>03</a:t>
-            </a:r>
-          </a:p>
-        </p:txBody>
-      </p:sp>
-      <p:sp>
-        <p:nvSpPr>
-          <p:cNvPr id="11" name="exam-question-3">
-            <a:extLst xmlns:a="http://schemas.openxmlformats.org/drawingml/2006/main">
-              <a:ext uri="{FF2B5EF4-FFF2-40B4-BE49-F238E27FC236}">
-                <a16:creationId xmlns:a16="http://schemas.microsoft.com/office/drawing/2014/main" id="{12A114F0-A204-41D5-8526-DB3296437CC5}"/>
-              </a:ext>
-            </a:extLst>
-          </p:cNvPr>
-          <p:cNvSpPr>
-            <a:spLocks xmlns:a="http://schemas.openxmlformats.org/drawingml/2006/main" noGrp="1"/>
-          </p:cNvSpPr>
-          <p:nvPr/>
-        </p:nvSpPr>
-        <p:spPr>
-          <a:xfrm xmlns:a="http://schemas.openxmlformats.org/drawingml/2006/main">
-            <a:off x="1076325" y="3495675"/>
-            <a:ext cx="4762500" cy="895350"/>
+              <a:defRPr sz="1875" b="0">
+                <a:solidFill>
+                  <a:srgbClr val="5B5B57"/>
+                </a:solidFill>
+                <a:latin typeface="Helvetica Neue"/>
+                <a:ea typeface="Helvetica Neue"/>
+                <a:cs typeface="Helvetica Neue"/>
+              </a:defRPr>
+            </a:pPr>
+            <a:r>
+              <a:rPr sz="1875" b="0">
+                <a:solidFill>
+                  <a:srgbClr val="5B5B57"/>
+                </a:solidFill>
+                <a:latin typeface="Helvetica Neue"/>
+                <a:ea typeface="Helvetica Neue"/>
+                <a:cs typeface="Helvetica Neue"/>
+              </a:rPr>
+              <a:t>CHIVE investigates model behavior by editing prompts and measuring the resulting responses. In this course, a plausible explanation is a hypothesis to test. Schema checks, factual checks, and policy checks answer different questions.</a:t>
+            </a:r>
+          </a:p>
+        </p:txBody>
+      </p:sp>
+      <p:sp>
+        <p:nvSpPr>
+          <p:cNvPr id="7" name="column-rule">
+            <a:extLst xmlns:a="http://schemas.openxmlformats.org/drawingml/2006/main">
+              <a:ext uri="{FF2B5EF4-FFF2-40B4-BE49-F238E27FC236}">
+                <a16:creationId xmlns:a16="http://schemas.microsoft.com/office/drawing/2014/main" id="{0F79AB13-90F9-483F-9581-66577281AC7A}"/>
+              </a:ext>
+            </a:extLst>
+          </p:cNvPr>
+          <p:cNvSpPr>
+            <a:spLocks xmlns:a="http://schemas.openxmlformats.org/drawingml/2006/main" noGrp="1"/>
+          </p:cNvSpPr>
+          <p:nvPr/>
+        </p:nvSpPr>
+        <p:spPr>
+          <a:xfrm xmlns:a="http://schemas.openxmlformats.org/drawingml/2006/main">
+            <a:off x="5334000" y="2343150"/>
+            <a:ext cx="47625" cy="3257550"/>
+          </a:xfrm>
+          <a:prstGeom xmlns:a="http://schemas.openxmlformats.org/drawingml/2006/main" prst="rect">
+            <a:avLst/>
+          </a:prstGeom>
+          <a:solidFill xmlns:a="http://schemas.openxmlformats.org/drawingml/2006/main">
+            <a:srgbClr val="B9F15B"/>
+          </a:solidFill>
+          <a:ln xmlns:a="http://schemas.openxmlformats.org/drawingml/2006/main" w="0">
+            <a:solidFill>
+              <a:srgbClr val="B9F15B"/>
+            </a:solidFill>
+            <a:prstDash val="solid"/>
+          </a:ln>
+        </p:spPr>
+      </p:sp>
+      <p:sp>
+        <p:nvSpPr>
+          <p:cNvPr id="8" name="section-points">
+            <a:extLst xmlns:a="http://schemas.openxmlformats.org/drawingml/2006/main">
+              <a:ext uri="{FF2B5EF4-FFF2-40B4-BE49-F238E27FC236}">
+                <a16:creationId xmlns:a16="http://schemas.microsoft.com/office/drawing/2014/main" id="{D93E52C8-D8DA-4313-BA83-D0BD0BED07AE}"/>
+              </a:ext>
+            </a:extLst>
+          </p:cNvPr>
+          <p:cNvSpPr>
+            <a:spLocks xmlns:a="http://schemas.openxmlformats.org/drawingml/2006/main" noGrp="1"/>
+          </p:cNvSpPr>
+          <p:nvPr/>
+        </p:nvSpPr>
+        <p:spPr>
+          <a:xfrm xmlns:a="http://schemas.openxmlformats.org/drawingml/2006/main">
+            <a:off x="5857875" y="2343150"/>
+            <a:ext cx="5572125" cy="3429000"/>
           </a:xfrm>
           <a:prstGeom xmlns:a="http://schemas.openxmlformats.org/drawingml/2006/main" prst="rect">
             <a:avLst/>
@@ -7913,67 +9965,37 @@
           <a:lstStyle xmlns:a="http://schemas.openxmlformats.org/drawingml/2006/main"/>
           <a:p xmlns:a="http://schemas.openxmlformats.org/drawingml/2006/main">
             <a:pPr algn="l">
-              <a:defRPr sz="1575" b="1">
-                <a:solidFill>
-                  <a:srgbClr val="111111"/>
-                </a:solidFill>
-                <a:latin typeface="Helvetica Neue"/>
-                <a:ea typeface="Helvetica Neue"/>
-                <a:cs typeface="Helvetica Neue"/>
-              </a:defRPr>
-            </a:pPr>
-            <a:r>
-              <a:rPr sz="1575" b="1">
-                <a:solidFill>
-                  <a:srgbClr val="111111"/>
-                </a:solidFill>
-                <a:latin typeface="Helvetica Neue"/>
-                <a:ea typeface="Helvetica Neue"/>
-                <a:cs typeface="Helvetica Neue"/>
-              </a:rPr>
-              <a:t>Compare zero-shot, few-shot, chain-of-thought, self-consistency, and PAL.</a:t>
-            </a:r>
-          </a:p>
-        </p:txBody>
-      </p:sp>
-      <p:sp>
-        <p:nvSpPr>
-          <p:cNvPr id="12" name="exam-number-4">
-            <a:extLst xmlns:a="http://schemas.openxmlformats.org/drawingml/2006/main">
-              <a:ext uri="{FF2B5EF4-FFF2-40B4-BE49-F238E27FC236}">
-                <a16:creationId xmlns:a16="http://schemas.microsoft.com/office/drawing/2014/main" id="{DAB3062F-8A12-4D71-B8E4-443D224E6077}"/>
-              </a:ext>
-            </a:extLst>
-          </p:cNvPr>
-          <p:cNvSpPr>
-            <a:spLocks xmlns:a="http://schemas.openxmlformats.org/drawingml/2006/main" noGrp="1"/>
-          </p:cNvSpPr>
-          <p:nvPr/>
-        </p:nvSpPr>
-        <p:spPr>
-          <a:xfrm xmlns:a="http://schemas.openxmlformats.org/drawingml/2006/main">
-            <a:off x="6191250" y="3495675"/>
-            <a:ext cx="590550" cy="400050"/>
-          </a:xfrm>
-          <a:prstGeom xmlns:a="http://schemas.openxmlformats.org/drawingml/2006/main" prst="rect">
-            <a:avLst/>
-          </a:prstGeom>
-          <a:noFill xmlns:a="http://schemas.openxmlformats.org/drawingml/2006/main"/>
-          <a:ln xmlns:a="http://schemas.openxmlformats.org/drawingml/2006/main" w="0">
-            <a:noFill/>
-            <a:prstDash val="solid"/>
-          </a:ln>
-        </p:spPr>
-        <p:txBody>
-          <a:bodyPr xmlns:a="http://schemas.openxmlformats.org/drawingml/2006/main" anchor="t">
-            <a:noAutofit/>
-          </a:bodyPr>
-          <a:lstStyle xmlns:a="http://schemas.openxmlformats.org/drawingml/2006/main"/>
+              <a:defRPr sz="1725" b="1">
+                <a:solidFill>
+                  <a:srgbClr val="111111"/>
+                </a:solidFill>
+                <a:latin typeface="Helvetica Neue"/>
+                <a:ea typeface="Helvetica Neue"/>
+                <a:cs typeface="Helvetica Neue"/>
+              </a:defRPr>
+            </a:pPr>
+            <a:r>
+              <a:rPr sz="1725" b="1">
+                <a:solidFill>
+                  <a:srgbClr val="111111"/>
+                </a:solidFill>
+                <a:latin typeface="Helvetica Neue"/>
+                <a:ea typeface="Helvetica Neue"/>
+                <a:cs typeface="Helvetica Neue"/>
+              </a:rPr>
+              <a:t>01  Predict the effect of one prompt edit.</a:t>
+            </a:r>
+          </a:p>
+          <a:p xmlns:a="http://schemas.openxmlformats.org/drawingml/2006/main">
+            <a:r>
+              <a:t/>
+            </a:r>
+          </a:p>
           <a:p xmlns:a="http://schemas.openxmlformats.org/drawingml/2006/main">
             <a:pPr algn="l">
               <a:defRPr sz="1725" b="1">
                 <a:solidFill>
-                  <a:srgbClr val="B9F15B"/>
+                  <a:srgbClr val="111111"/>
                 </a:solidFill>
                 <a:latin typeface="Helvetica Neue"/>
                 <a:ea typeface="Helvetica Neue"/>
@@ -7983,113 +10005,25 @@
             <a:r>
               <a:rPr sz="1725" b="1">
                 <a:solidFill>
-                  <a:srgbClr val="B9F15B"/>
-                </a:solidFill>
-                <a:latin typeface="Helvetica Neue"/>
-                <a:ea typeface="Helvetica Neue"/>
-                <a:cs typeface="Helvetica Neue"/>
-              </a:rPr>
-              <a:t>04</a:t>
-            </a:r>
-          </a:p>
-        </p:txBody>
-      </p:sp>
-      <p:sp>
-        <p:nvSpPr>
-          <p:cNvPr id="13" name="exam-question-4">
-            <a:extLst xmlns:a="http://schemas.openxmlformats.org/drawingml/2006/main">
-              <a:ext uri="{FF2B5EF4-FFF2-40B4-BE49-F238E27FC236}">
-                <a16:creationId xmlns:a16="http://schemas.microsoft.com/office/drawing/2014/main" id="{6EA402F3-4F3B-4DC4-A009-D2258A938776}"/>
-              </a:ext>
-            </a:extLst>
-          </p:cNvPr>
-          <p:cNvSpPr>
-            <a:spLocks xmlns:a="http://schemas.openxmlformats.org/drawingml/2006/main" noGrp="1"/>
-          </p:cNvSpPr>
-          <p:nvPr/>
-        </p:nvSpPr>
-        <p:spPr>
-          <a:xfrm xmlns:a="http://schemas.openxmlformats.org/drawingml/2006/main">
-            <a:off x="6877050" y="3495675"/>
-            <a:ext cx="4762500" cy="895350"/>
-          </a:xfrm>
-          <a:prstGeom xmlns:a="http://schemas.openxmlformats.org/drawingml/2006/main" prst="rect">
-            <a:avLst/>
-          </a:prstGeom>
-          <a:noFill xmlns:a="http://schemas.openxmlformats.org/drawingml/2006/main"/>
-          <a:ln xmlns:a="http://schemas.openxmlformats.org/drawingml/2006/main" w="0">
-            <a:noFill/>
-            <a:prstDash val="solid"/>
-          </a:ln>
-        </p:spPr>
-        <p:txBody>
-          <a:bodyPr xmlns:a="http://schemas.openxmlformats.org/drawingml/2006/main" anchor="t">
-            <a:normAutofit fontScale="100000"/>
-          </a:bodyPr>
-          <a:lstStyle xmlns:a="http://schemas.openxmlformats.org/drawingml/2006/main"/>
-          <a:p xmlns:a="http://schemas.openxmlformats.org/drawingml/2006/main">
-            <a:pPr algn="l">
-              <a:defRPr sz="1575" b="1">
-                <a:solidFill>
-                  <a:srgbClr val="111111"/>
-                </a:solidFill>
-                <a:latin typeface="Helvetica Neue"/>
-                <a:ea typeface="Helvetica Neue"/>
-                <a:cs typeface="Helvetica Neue"/>
-              </a:defRPr>
-            </a:pPr>
-            <a:r>
-              <a:rPr sz="1575" b="1">
-                <a:solidFill>
-                  <a:srgbClr val="111111"/>
-                </a:solidFill>
-                <a:latin typeface="Helvetica Neue"/>
-                <a:ea typeface="Helvetica Neue"/>
-                <a:cs typeface="Helvetica Neue"/>
-              </a:rPr>
-              <a:t>Why is valid JSON insufficient as a security guarantee?</a:t>
-            </a:r>
-          </a:p>
-        </p:txBody>
-      </p:sp>
-      <p:sp>
-        <p:nvSpPr>
-          <p:cNvPr id="14" name="exam-number-5">
-            <a:extLst xmlns:a="http://schemas.openxmlformats.org/drawingml/2006/main">
-              <a:ext uri="{FF2B5EF4-FFF2-40B4-BE49-F238E27FC236}">
-                <a16:creationId xmlns:a16="http://schemas.microsoft.com/office/drawing/2014/main" id="{C085C9D9-A554-4407-83D3-90B50F840840}"/>
-              </a:ext>
-            </a:extLst>
-          </p:cNvPr>
-          <p:cNvSpPr>
-            <a:spLocks xmlns:a="http://schemas.openxmlformats.org/drawingml/2006/main" noGrp="1"/>
-          </p:cNvSpPr>
-          <p:nvPr/>
-        </p:nvSpPr>
-        <p:spPr>
-          <a:xfrm xmlns:a="http://schemas.openxmlformats.org/drawingml/2006/main">
-            <a:off x="390525" y="4752975"/>
-            <a:ext cx="590550" cy="400050"/>
-          </a:xfrm>
-          <a:prstGeom xmlns:a="http://schemas.openxmlformats.org/drawingml/2006/main" prst="rect">
-            <a:avLst/>
-          </a:prstGeom>
-          <a:noFill xmlns:a="http://schemas.openxmlformats.org/drawingml/2006/main"/>
-          <a:ln xmlns:a="http://schemas.openxmlformats.org/drawingml/2006/main" w="0">
-            <a:noFill/>
-            <a:prstDash val="solid"/>
-          </a:ln>
-        </p:spPr>
-        <p:txBody>
-          <a:bodyPr xmlns:a="http://schemas.openxmlformats.org/drawingml/2006/main" anchor="t">
-            <a:noAutofit/>
-          </a:bodyPr>
-          <a:lstStyle xmlns:a="http://schemas.openxmlformats.org/drawingml/2006/main"/>
+                  <a:srgbClr val="111111"/>
+                </a:solidFill>
+                <a:latin typeface="Helvetica Neue"/>
+                <a:ea typeface="Helvetica Neue"/>
+                <a:cs typeface="Helvetica Neue"/>
+              </a:rPr>
+              <a:t>02  Score the response with a stated criterion.</a:t>
+            </a:r>
+          </a:p>
+          <a:p xmlns:a="http://schemas.openxmlformats.org/drawingml/2006/main">
+            <a:r>
+              <a:t/>
+            </a:r>
+          </a:p>
           <a:p xmlns:a="http://schemas.openxmlformats.org/drawingml/2006/main">
             <a:pPr algn="l">
               <a:defRPr sz="1725" b="1">
                 <a:solidFill>
-                  <a:srgbClr val="B9F15B"/>
+                  <a:srgbClr val="111111"/>
                 </a:solidFill>
                 <a:latin typeface="Helvetica Neue"/>
                 <a:ea typeface="Helvetica Neue"/>
@@ -8099,187 +10033,13 @@
             <a:r>
               <a:rPr sz="1725" b="1">
                 <a:solidFill>
-                  <a:srgbClr val="B9F15B"/>
-                </a:solidFill>
-                <a:latin typeface="Helvetica Neue"/>
-                <a:ea typeface="Helvetica Neue"/>
-                <a:cs typeface="Helvetica Neue"/>
-              </a:rPr>
-              <a:t>05</a:t>
-            </a:r>
-          </a:p>
-        </p:txBody>
-      </p:sp>
-      <p:sp>
-        <p:nvSpPr>
-          <p:cNvPr id="15" name="exam-question-5">
-            <a:extLst xmlns:a="http://schemas.openxmlformats.org/drawingml/2006/main">
-              <a:ext uri="{FF2B5EF4-FFF2-40B4-BE49-F238E27FC236}">
-                <a16:creationId xmlns:a16="http://schemas.microsoft.com/office/drawing/2014/main" id="{10DA145D-8F72-44A0-83B0-A6167188BE15}"/>
-              </a:ext>
-            </a:extLst>
-          </p:cNvPr>
-          <p:cNvSpPr>
-            <a:spLocks xmlns:a="http://schemas.openxmlformats.org/drawingml/2006/main" noGrp="1"/>
-          </p:cNvSpPr>
-          <p:nvPr/>
-        </p:nvSpPr>
-        <p:spPr>
-          <a:xfrm xmlns:a="http://schemas.openxmlformats.org/drawingml/2006/main">
-            <a:off x="1076325" y="4752975"/>
-            <a:ext cx="4762500" cy="895350"/>
-          </a:xfrm>
-          <a:prstGeom xmlns:a="http://schemas.openxmlformats.org/drawingml/2006/main" prst="rect">
-            <a:avLst/>
-          </a:prstGeom>
-          <a:noFill xmlns:a="http://schemas.openxmlformats.org/drawingml/2006/main"/>
-          <a:ln xmlns:a="http://schemas.openxmlformats.org/drawingml/2006/main" w="0">
-            <a:noFill/>
-            <a:prstDash val="solid"/>
-          </a:ln>
-        </p:spPr>
-        <p:txBody>
-          <a:bodyPr xmlns:a="http://schemas.openxmlformats.org/drawingml/2006/main" anchor="t">
-            <a:normAutofit fontScale="100000"/>
-          </a:bodyPr>
-          <a:lstStyle xmlns:a="http://schemas.openxmlformats.org/drawingml/2006/main"/>
-          <a:p xmlns:a="http://schemas.openxmlformats.org/drawingml/2006/main">
-            <a:pPr algn="l">
-              <a:defRPr sz="1575" b="1">
-                <a:solidFill>
-                  <a:srgbClr val="111111"/>
-                </a:solidFill>
-                <a:latin typeface="Helvetica Neue"/>
-                <a:ea typeface="Helvetica Neue"/>
-                <a:cs typeface="Helvetica Neue"/>
-              </a:defRPr>
-            </a:pPr>
-            <a:r>
-              <a:rPr sz="1575" b="1">
-                <a:solidFill>
-                  <a:srgbClr val="111111"/>
-                </a:solidFill>
-                <a:latin typeface="Helvetica Neue"/>
-                <a:ea typeface="Helvetica Neue"/>
-                <a:cs typeface="Helvetica Neue"/>
-              </a:rPr>
-              <a:t>When should an engineer choose RAG rather than fine-tuning?</a:t>
-            </a:r>
-          </a:p>
-        </p:txBody>
-      </p:sp>
-      <p:sp>
-        <p:nvSpPr>
-          <p:cNvPr id="16" name="exam-number-6">
-            <a:extLst xmlns:a="http://schemas.openxmlformats.org/drawingml/2006/main">
-              <a:ext uri="{FF2B5EF4-FFF2-40B4-BE49-F238E27FC236}">
-                <a16:creationId xmlns:a16="http://schemas.microsoft.com/office/drawing/2014/main" id="{0A1CDAC2-55B3-4D53-BD1D-45D8A3F5D051}"/>
-              </a:ext>
-            </a:extLst>
-          </p:cNvPr>
-          <p:cNvSpPr>
-            <a:spLocks xmlns:a="http://schemas.openxmlformats.org/drawingml/2006/main" noGrp="1"/>
-          </p:cNvSpPr>
-          <p:nvPr/>
-        </p:nvSpPr>
-        <p:spPr>
-          <a:xfrm xmlns:a="http://schemas.openxmlformats.org/drawingml/2006/main">
-            <a:off x="6191250" y="4752975"/>
-            <a:ext cx="590550" cy="400050"/>
-          </a:xfrm>
-          <a:prstGeom xmlns:a="http://schemas.openxmlformats.org/drawingml/2006/main" prst="rect">
-            <a:avLst/>
-          </a:prstGeom>
-          <a:noFill xmlns:a="http://schemas.openxmlformats.org/drawingml/2006/main"/>
-          <a:ln xmlns:a="http://schemas.openxmlformats.org/drawingml/2006/main" w="0">
-            <a:noFill/>
-            <a:prstDash val="solid"/>
-          </a:ln>
-        </p:spPr>
-        <p:txBody>
-          <a:bodyPr xmlns:a="http://schemas.openxmlformats.org/drawingml/2006/main" anchor="t">
-            <a:noAutofit/>
-          </a:bodyPr>
-          <a:lstStyle xmlns:a="http://schemas.openxmlformats.org/drawingml/2006/main"/>
-          <a:p xmlns:a="http://schemas.openxmlformats.org/drawingml/2006/main">
-            <a:pPr algn="l">
-              <a:defRPr sz="1725" b="1">
-                <a:solidFill>
-                  <a:srgbClr val="B9F15B"/>
-                </a:solidFill>
-                <a:latin typeface="Helvetica Neue"/>
-                <a:ea typeface="Helvetica Neue"/>
-                <a:cs typeface="Helvetica Neue"/>
-              </a:defRPr>
-            </a:pPr>
-            <a:r>
-              <a:rPr sz="1725" b="1">
-                <a:solidFill>
-                  <a:srgbClr val="B9F15B"/>
-                </a:solidFill>
-                <a:latin typeface="Helvetica Neue"/>
-                <a:ea typeface="Helvetica Neue"/>
-                <a:cs typeface="Helvetica Neue"/>
-              </a:rPr>
-              <a:t>06</a:t>
-            </a:r>
-          </a:p>
-        </p:txBody>
-      </p:sp>
-      <p:sp>
-        <p:nvSpPr>
-          <p:cNvPr id="17" name="exam-question-6">
-            <a:extLst xmlns:a="http://schemas.openxmlformats.org/drawingml/2006/main">
-              <a:ext uri="{FF2B5EF4-FFF2-40B4-BE49-F238E27FC236}">
-                <a16:creationId xmlns:a16="http://schemas.microsoft.com/office/drawing/2014/main" id="{08D60BD8-6715-49D9-BEC5-E6F7CB8121DA}"/>
-              </a:ext>
-            </a:extLst>
-          </p:cNvPr>
-          <p:cNvSpPr>
-            <a:spLocks xmlns:a="http://schemas.openxmlformats.org/drawingml/2006/main" noGrp="1"/>
-          </p:cNvSpPr>
-          <p:nvPr/>
-        </p:nvSpPr>
-        <p:spPr>
-          <a:xfrm xmlns:a="http://schemas.openxmlformats.org/drawingml/2006/main">
-            <a:off x="6877050" y="4752975"/>
-            <a:ext cx="4762500" cy="895350"/>
-          </a:xfrm>
-          <a:prstGeom xmlns:a="http://schemas.openxmlformats.org/drawingml/2006/main" prst="rect">
-            <a:avLst/>
-          </a:prstGeom>
-          <a:noFill xmlns:a="http://schemas.openxmlformats.org/drawingml/2006/main"/>
-          <a:ln xmlns:a="http://schemas.openxmlformats.org/drawingml/2006/main" w="0">
-            <a:noFill/>
-            <a:prstDash val="solid"/>
-          </a:ln>
-        </p:spPr>
-        <p:txBody>
-          <a:bodyPr xmlns:a="http://schemas.openxmlformats.org/drawingml/2006/main" anchor="t">
-            <a:normAutofit fontScale="100000"/>
-          </a:bodyPr>
-          <a:lstStyle xmlns:a="http://schemas.openxmlformats.org/drawingml/2006/main"/>
-          <a:p xmlns:a="http://schemas.openxmlformats.org/drawingml/2006/main">
-            <a:pPr algn="l">
-              <a:defRPr sz="1575" b="1">
-                <a:solidFill>
-                  <a:srgbClr val="111111"/>
-                </a:solidFill>
-                <a:latin typeface="Helvetica Neue"/>
-                <a:ea typeface="Helvetica Neue"/>
-                <a:cs typeface="Helvetica Neue"/>
-              </a:defRPr>
-            </a:pPr>
-            <a:r>
-              <a:rPr sz="1575" b="1">
-                <a:solidFill>
-                  <a:srgbClr val="111111"/>
-                </a:solidFill>
-                <a:latin typeface="Helvetica Neue"/>
-                <a:ea typeface="Helvetica Neue"/>
-                <a:cs typeface="Helvetica Neue"/>
-              </a:rPr>
-              <a:t>What do LoRA and QLoRA change about fine-tuning economics?</a:t>
+                  <a:srgbClr val="111111"/>
+                </a:solidFill>
+                <a:latin typeface="Helvetica Neue"/>
+                <a:ea typeface="Helvetica Neue"/>
+                <a:cs typeface="Helvetica Neue"/>
+              </a:rPr>
+              <a:t>03  Distinguish measured behavior from a causal explanation.</a:t>
             </a:r>
           </a:p>
         </p:txBody>
@@ -8287,7 +10047,7 @@
     </p:spTree>
     <p:extLst>
       <p:ext uri="{BB962C8B-B14F-4D97-AF65-F5344CB8AC3E}">
-        <p14:creationId xmlns:p14="http://schemas.microsoft.com/office/powerpoint/2010/main" val="1010515073"/>
+        <p14:creationId xmlns:p14="http://schemas.microsoft.com/office/powerpoint/2010/main" val="1237837713"/>
       </p:ext>
     </p:extLst>
   </p:cSld>
@@ -8295,9 +10055,9 @@
 </file>
 
 <file path=ppt/theme/theme1.xml><?xml version="1.0" encoding="utf-8"?>
-<a:theme xmlns:a="http://schemas.openxmlformats.org/drawingml/2006/main" name="ChatGPT">
+<a:theme xmlns:a="http://schemas.openxmlformats.org/drawingml/2006/main" name="Course">
   <a:themeElements>
-    <a:clrScheme name="ChatGPT">
+    <a:clrScheme name="Course">
       <a:dk1>
         <a:srgbClr val="000000"/>
       </a:dk1>
@@ -8347,7 +10107,7 @@
         <a:cs typeface="Calibri"/>
       </a:minorFont>
     </a:fontScheme>
-    <a:fmtScheme name="ChatGPT">
+    <a:fmtScheme name="Course">
       <a:fillStyleLst>
         <a:solidFill>
           <a:schemeClr val="phClr"/>
